--- a/templates/PlantillaSG.pptx
+++ b/templates/PlantillaSG.pptx
@@ -2518,41 +2518,304 @@
           <a:chExt cx="0" cy="0"/>
         </a:xfrm>
       </p:grpSpPr>
-      <p:sp>
-        <p:nvSpPr>
-          <p:cNvPr id="2" name="Title 1">
-            <a:extLst>
-              <a:ext uri="{FF2B5EF4-FFF2-40B4-BE49-F238E27FC236}">
-                <a16:creationId xmlns:a16="http://schemas.microsoft.com/office/drawing/2014/main" id="{EAF2FBD9-06F4-DD49-C2F9-7F5454104710}"/>
-              </a:ext>
-            </a:extLst>
-          </p:cNvPr>
-          <p:cNvSpPr>
-            <a:spLocks noGrp="1"/>
-          </p:cNvSpPr>
-          <p:nvPr>
-            <p:ph type="title"/>
-          </p:nvPr>
-        </p:nvSpPr>
+      <p:pic>
+        <p:nvPicPr>
+          <p:cNvPr id="8" name="Google Shape;105;p15">
+            <a:extLst>
+              <a:ext uri="{FF2B5EF4-FFF2-40B4-BE49-F238E27FC236}">
+                <a16:creationId xmlns:a16="http://schemas.microsoft.com/office/drawing/2014/main" id="{68907CA6-050B-6490-CBAC-CA81A5A22D2E}"/>
+              </a:ext>
+            </a:extLst>
+          </p:cNvPr>
+          <p:cNvPicPr preferRelativeResize="0"/>
+          <p:nvPr userDrawn="1"/>
+        </p:nvPicPr>
+        <p:blipFill rotWithShape="1">
+          <a:blip r:embed="rId2">
+            <a:alphaModFix/>
+          </a:blip>
+          <a:srcRect b="15139"/>
+          <a:stretch/>
+        </p:blipFill>
         <p:spPr>
           <a:xfrm>
-            <a:off x="839788" y="457200"/>
-            <a:ext cx="3932237" cy="1600200"/>
+            <a:off x="0" y="0"/>
+            <a:ext cx="12192000" cy="6895499"/>
+          </a:xfrm>
+          <a:prstGeom prst="rect">
+            <a:avLst/>
+          </a:prstGeom>
+          <a:noFill/>
+          <a:ln>
+            <a:noFill/>
+          </a:ln>
+        </p:spPr>
+      </p:pic>
+      <p:grpSp>
+        <p:nvGrpSpPr>
+          <p:cNvPr id="9" name="Google Shape;106;p15">
+            <a:extLst>
+              <a:ext uri="{FF2B5EF4-FFF2-40B4-BE49-F238E27FC236}">
+                <a16:creationId xmlns:a16="http://schemas.microsoft.com/office/drawing/2014/main" id="{D55F7F50-8021-AA5F-D201-7D04A2253E80}"/>
+              </a:ext>
+            </a:extLst>
+          </p:cNvPr>
+          <p:cNvGrpSpPr/>
+          <p:nvPr userDrawn="1"/>
+        </p:nvGrpSpPr>
+        <p:grpSpPr>
+          <a:xfrm>
+            <a:off x="10943664" y="-52"/>
+            <a:ext cx="1245319" cy="6857697"/>
+            <a:chOff x="10950525" y="35050"/>
+            <a:chExt cx="1239000" cy="6822900"/>
+          </a:xfrm>
+        </p:grpSpPr>
+        <p:sp>
+          <p:nvSpPr>
+            <p:cNvPr id="10" name="Google Shape;107;p15">
+              <a:extLst>
+                <a:ext uri="{FF2B5EF4-FFF2-40B4-BE49-F238E27FC236}">
+                  <a16:creationId xmlns:a16="http://schemas.microsoft.com/office/drawing/2014/main" id="{7E41384E-CFCF-8D18-BC56-0AFE340F5C93}"/>
+                </a:ext>
+              </a:extLst>
+            </p:cNvPr>
+            <p:cNvSpPr/>
+            <p:nvPr/>
+          </p:nvSpPr>
+          <p:spPr>
+            <a:xfrm flipH="1">
+              <a:off x="10950525" y="2554450"/>
+              <a:ext cx="1239000" cy="4303500"/>
+            </a:xfrm>
+            <a:prstGeom prst="rtTriangle">
+              <a:avLst/>
+            </a:prstGeom>
+            <a:solidFill>
+              <a:srgbClr val="FF0000"/>
+            </a:solidFill>
+            <a:ln>
+              <a:noFill/>
+            </a:ln>
+          </p:spPr>
+          <p:txBody>
+            <a:bodyPr spcFirstLastPara="1" wrap="square" lIns="91425" tIns="91425" rIns="91425" bIns="91425" anchor="ctr" anchorCtr="0">
+              <a:noAutofit/>
+            </a:bodyPr>
+            <a:lstStyle/>
+            <a:p>
+              <a:pPr marL="0" lvl="0" indent="0" algn="ctr" rtl="0">
+                <a:spcBef>
+                  <a:spcPts val="0"/>
+                </a:spcBef>
+                <a:spcAft>
+                  <a:spcPts val="0"/>
+                </a:spcAft>
+                <a:buNone/>
+              </a:pPr>
+              <a:endParaRPr>
+                <a:latin typeface="Calibri"/>
+                <a:ea typeface="Calibri"/>
+                <a:cs typeface="Calibri"/>
+                <a:sym typeface="Calibri"/>
+              </a:endParaRPr>
+            </a:p>
+          </p:txBody>
+        </p:sp>
+        <p:sp>
+          <p:nvSpPr>
+            <p:cNvPr id="11" name="Google Shape;108;p15">
+              <a:extLst>
+                <a:ext uri="{FF2B5EF4-FFF2-40B4-BE49-F238E27FC236}">
+                  <a16:creationId xmlns:a16="http://schemas.microsoft.com/office/drawing/2014/main" id="{8232798C-D740-2B7B-9996-76372C694F15}"/>
+                </a:ext>
+              </a:extLst>
+            </p:cNvPr>
+            <p:cNvSpPr/>
+            <p:nvPr/>
+          </p:nvSpPr>
+          <p:spPr>
+            <a:xfrm rot="10800000">
+              <a:off x="10950525" y="35050"/>
+              <a:ext cx="1239000" cy="2519400"/>
+            </a:xfrm>
+            <a:prstGeom prst="rtTriangle">
+              <a:avLst/>
+            </a:prstGeom>
+            <a:solidFill>
+              <a:srgbClr val="CC0000"/>
+            </a:solidFill>
+            <a:ln>
+              <a:noFill/>
+            </a:ln>
+          </p:spPr>
+          <p:txBody>
+            <a:bodyPr spcFirstLastPara="1" wrap="square" lIns="91425" tIns="91425" rIns="91425" bIns="91425" anchor="ctr" anchorCtr="0">
+              <a:noAutofit/>
+            </a:bodyPr>
+            <a:lstStyle/>
+            <a:p>
+              <a:pPr marL="0" lvl="0" indent="0" algn="ctr" rtl="0">
+                <a:spcBef>
+                  <a:spcPts val="0"/>
+                </a:spcBef>
+                <a:spcAft>
+                  <a:spcPts val="0"/>
+                </a:spcAft>
+                <a:buNone/>
+              </a:pPr>
+              <a:r>
+                <a:rPr lang="en-CO">
+                  <a:latin typeface="Calibri"/>
+                  <a:ea typeface="Calibri"/>
+                  <a:cs typeface="Calibri"/>
+                  <a:sym typeface="Calibri"/>
+                </a:rPr>
+                <a:t> </a:t>
+              </a:r>
+              <a:endParaRPr>
+                <a:latin typeface="Calibri"/>
+                <a:ea typeface="Calibri"/>
+                <a:cs typeface="Calibri"/>
+                <a:sym typeface="Calibri"/>
+              </a:endParaRPr>
+            </a:p>
+          </p:txBody>
+        </p:sp>
+        <p:pic>
+          <p:nvPicPr>
+            <p:cNvPr id="12" name="Google Shape;109;p15">
+              <a:extLst>
+                <a:ext uri="{FF2B5EF4-FFF2-40B4-BE49-F238E27FC236}">
+                  <a16:creationId xmlns:a16="http://schemas.microsoft.com/office/drawing/2014/main" id="{EF236F41-FB24-7DDE-6818-D0637E1075AF}"/>
+                </a:ext>
+              </a:extLst>
+            </p:cNvPr>
+            <p:cNvPicPr preferRelativeResize="0"/>
+            <p:nvPr/>
+          </p:nvPicPr>
+          <p:blipFill>
+            <a:blip r:embed="rId3">
+              <a:alphaModFix/>
+            </a:blip>
+            <a:stretch>
+              <a:fillRect/>
+            </a:stretch>
+          </p:blipFill>
+          <p:spPr>
+            <a:xfrm>
+              <a:off x="11161009" y="6465999"/>
+              <a:ext cx="949873" cy="310749"/>
+            </a:xfrm>
+            <a:prstGeom prst="rect">
+              <a:avLst/>
+            </a:prstGeom>
+            <a:noFill/>
+            <a:ln>
+              <a:noFill/>
+            </a:ln>
+          </p:spPr>
+        </p:pic>
+      </p:grpSp>
+      <p:sp>
+        <p:nvSpPr>
+          <p:cNvPr id="13" name="Google Shape;151;p19">
+            <a:extLst>
+              <a:ext uri="{FF2B5EF4-FFF2-40B4-BE49-F238E27FC236}">
+                <a16:creationId xmlns:a16="http://schemas.microsoft.com/office/drawing/2014/main" id="{04053E74-0E68-DBB2-A734-21DDCFBCF3CE}"/>
+              </a:ext>
+            </a:extLst>
+          </p:cNvPr>
+          <p:cNvSpPr/>
+          <p:nvPr userDrawn="1"/>
+        </p:nvSpPr>
+        <p:spPr>
+          <a:xfrm rot="10800000">
+            <a:off x="10943683" y="-103"/>
+            <a:ext cx="1245300" cy="2532300"/>
+          </a:xfrm>
+          <a:prstGeom prst="rtTriangle">
+            <a:avLst/>
+          </a:prstGeom>
+          <a:solidFill>
+            <a:schemeClr val="accent4"/>
+          </a:solidFill>
+          <a:ln>
+            <a:noFill/>
+          </a:ln>
+        </p:spPr>
+        <p:txBody>
+          <a:bodyPr spcFirstLastPara="1" wrap="square" lIns="91425" tIns="91425" rIns="91425" bIns="91425" anchor="ctr" anchorCtr="0">
+            <a:noAutofit/>
+          </a:bodyPr>
+          <a:lstStyle/>
+          <a:p>
+            <a:pPr marL="0" lvl="0" indent="0" algn="ctr" rtl="0">
+              <a:spcBef>
+                <a:spcPts val="0"/>
+              </a:spcBef>
+              <a:spcAft>
+                <a:spcPts val="0"/>
+              </a:spcAft>
+              <a:buNone/>
+            </a:pPr>
+            <a:r>
+              <a:rPr lang="en-CO">
+                <a:latin typeface="Calibri"/>
+                <a:ea typeface="Calibri"/>
+                <a:cs typeface="Calibri"/>
+                <a:sym typeface="Calibri"/>
+              </a:rPr>
+              <a:t> </a:t>
+            </a:r>
+            <a:endParaRPr>
+              <a:latin typeface="Calibri"/>
+              <a:ea typeface="Calibri"/>
+              <a:cs typeface="Calibri"/>
+              <a:sym typeface="Calibri"/>
+            </a:endParaRPr>
+          </a:p>
+        </p:txBody>
+      </p:sp>
+      <p:sp>
+        <p:nvSpPr>
+          <p:cNvPr id="2" name="Title 1">
+            <a:extLst>
+              <a:ext uri="{FF2B5EF4-FFF2-40B4-BE49-F238E27FC236}">
+                <a16:creationId xmlns:a16="http://schemas.microsoft.com/office/drawing/2014/main" id="{EAF2FBD9-06F4-DD49-C2F9-7F5454104710}"/>
+              </a:ext>
+            </a:extLst>
+          </p:cNvPr>
+          <p:cNvSpPr>
+            <a:spLocks noGrp="1"/>
+          </p:cNvSpPr>
+          <p:nvPr>
+            <p:ph type="title"/>
+          </p:nvPr>
+        </p:nvSpPr>
+        <p:spPr>
+          <a:xfrm>
+            <a:off x="839788" y="986368"/>
+            <a:ext cx="3932237" cy="1071032"/>
           </a:xfrm>
         </p:spPr>
         <p:txBody>
           <a:bodyPr anchor="b"/>
           <a:lstStyle>
             <a:lvl1pPr>
-              <a:defRPr sz="3200"/>
+              <a:defRPr sz="3200">
+                <a:solidFill>
+                  <a:srgbClr val="CD0000"/>
+                </a:solidFill>
+              </a:defRPr>
             </a:lvl1pPr>
           </a:lstStyle>
           <a:p>
             <a:r>
-              <a:rPr lang="en-US"/>
+              <a:rPr lang="en-US" dirty="0"/>
               <a:t>Click to edit Master title style</a:t>
             </a:r>
-            <a:endParaRPr lang="es-ES_tradnl"/>
+            <a:endParaRPr lang="es-ES_tradnl" dirty="0"/>
           </a:p>
         </p:txBody>
       </p:sp>

--- a/templates/PlantillaSG.pptx
+++ b/templates/PlantillaSG.pptx
@@ -4,8 +4,16 @@
   <p:sldMasterIdLst>
     <p:sldMasterId id="2147483648" r:id="rId1"/>
   </p:sldMasterIdLst>
+  <p:notesMasterIdLst>
+    <p:notesMasterId r:id="rId5"/>
+  </p:notesMasterIdLst>
+  <p:handoutMasterIdLst>
+    <p:handoutMasterId r:id="rId6"/>
+  </p:handoutMasterIdLst>
   <p:sldIdLst>
     <p:sldId id="256" r:id="rId2"/>
+    <p:sldId id="259" r:id="rId3"/>
+    <p:sldId id="261" r:id="rId4"/>
   </p:sldIdLst>
   <p:sldSz cx="12192000" cy="6858000"/>
   <p:notesSz cx="6858000" cy="9144000"/>
@@ -108,8 +116,1095 @@
     <p:ext uri="{EFAFB233-063F-42B5-8137-9DF3F51BA10A}">
       <p15:sldGuideLst xmlns:p15="http://schemas.microsoft.com/office/powerpoint/2012/main"/>
     </p:ext>
+    <p:ext uri="{2D200454-40CA-4A62-9FC3-DE9A4176ACB9}">
+      <p15:notesGuideLst xmlns:p15="http://schemas.microsoft.com/office/powerpoint/2012/main"/>
+    </p:ext>
   </p:extLst>
 </p:presentation>
+</file>
+
+<file path=ppt/revisionInfo.xml><?xml version="1.0" encoding="utf-8"?>
+<p1510:revInfo xmlns:a="http://schemas.openxmlformats.org/drawingml/2006/main" xmlns:r="http://schemas.openxmlformats.org/officeDocument/2006/relationships" xmlns:p1510="http://schemas.microsoft.com/office/powerpoint/2015/10/main">
+  <p1510:revLst>
+    <p1510:client id="{123CDF9E-882E-3B44-9B07-04379EF3E374}" v="19" dt="2025-07-15T14:37:00.966"/>
+  </p1510:revLst>
+</p1510:revInfo>
+</file>
+
+<file path=ppt/changesInfos/changesInfo1.xml><?xml version="1.0" encoding="utf-8"?>
+<pc:chgInfo xmlns:a="http://schemas.openxmlformats.org/drawingml/2006/main" xmlns:r="http://schemas.openxmlformats.org/officeDocument/2006/relationships" xmlns:ac="http://schemas.microsoft.com/office/drawing/2013/main/command" xmlns:pc="http://schemas.microsoft.com/office/powerpoint/2013/main/command">
+  <pc:docChgLst>
+    <pc:chgData name="Harry Wong" userId="2e681b20-ff61-411d-b970-54b741321bcd" providerId="ADAL" clId="{123CDF9E-882E-3B44-9B07-04379EF3E374}"/>
+    <pc:docChg chg="undo custSel addSld delSld modSld modMainMaster">
+      <pc:chgData name="Harry Wong" userId="2e681b20-ff61-411d-b970-54b741321bcd" providerId="ADAL" clId="{123CDF9E-882E-3B44-9B07-04379EF3E374}" dt="2025-07-15T14:39:04.596" v="478" actId="20577"/>
+      <pc:docMkLst>
+        <pc:docMk/>
+      </pc:docMkLst>
+      <pc:sldChg chg="delSp modSp mod">
+        <pc:chgData name="Harry Wong" userId="2e681b20-ff61-411d-b970-54b741321bcd" providerId="ADAL" clId="{123CDF9E-882E-3B44-9B07-04379EF3E374}" dt="2025-07-15T14:28:06.573" v="381" actId="478"/>
+        <pc:sldMkLst>
+          <pc:docMk/>
+          <pc:sldMk cId="2354214095" sldId="259"/>
+        </pc:sldMkLst>
+        <pc:spChg chg="mod">
+          <ac:chgData name="Harry Wong" userId="2e681b20-ff61-411d-b970-54b741321bcd" providerId="ADAL" clId="{123CDF9E-882E-3B44-9B07-04379EF3E374}" dt="2025-07-15T14:27:45.765" v="378"/>
+          <ac:spMkLst>
+            <pc:docMk/>
+            <pc:sldMk cId="2354214095" sldId="259"/>
+            <ac:spMk id="5" creationId="{92CDF565-F4F7-3723-A2E2-89B34FAD3786}"/>
+          </ac:spMkLst>
+        </pc:spChg>
+        <pc:spChg chg="del mod">
+          <ac:chgData name="Harry Wong" userId="2e681b20-ff61-411d-b970-54b741321bcd" providerId="ADAL" clId="{123CDF9E-882E-3B44-9B07-04379EF3E374}" dt="2025-07-15T14:28:06.573" v="381" actId="478"/>
+          <ac:spMkLst>
+            <pc:docMk/>
+            <pc:sldMk cId="2354214095" sldId="259"/>
+            <ac:spMk id="6" creationId="{CAA967E3-284E-9047-43D7-423D29CBFE9B}"/>
+          </ac:spMkLst>
+        </pc:spChg>
+      </pc:sldChg>
+      <pc:sldChg chg="delSp modSp mod">
+        <pc:chgData name="Harry Wong" userId="2e681b20-ff61-411d-b970-54b741321bcd" providerId="ADAL" clId="{123CDF9E-882E-3B44-9B07-04379EF3E374}" dt="2025-07-15T14:30:07.614" v="405" actId="12"/>
+        <pc:sldMkLst>
+          <pc:docMk/>
+          <pc:sldMk cId="4273810623" sldId="261"/>
+        </pc:sldMkLst>
+        <pc:spChg chg="mod">
+          <ac:chgData name="Harry Wong" userId="2e681b20-ff61-411d-b970-54b741321bcd" providerId="ADAL" clId="{123CDF9E-882E-3B44-9B07-04379EF3E374}" dt="2025-07-15T14:30:07.614" v="405" actId="12"/>
+          <ac:spMkLst>
+            <pc:docMk/>
+            <pc:sldMk cId="4273810623" sldId="261"/>
+            <ac:spMk id="4" creationId="{79950ACC-0F5A-CAB9-2829-2F29FEA2FEB3}"/>
+          </ac:spMkLst>
+        </pc:spChg>
+        <pc:spChg chg="mod">
+          <ac:chgData name="Harry Wong" userId="2e681b20-ff61-411d-b970-54b741321bcd" providerId="ADAL" clId="{123CDF9E-882E-3B44-9B07-04379EF3E374}" dt="2025-07-15T14:27:45.765" v="378"/>
+          <ac:spMkLst>
+            <pc:docMk/>
+            <pc:sldMk cId="4273810623" sldId="261"/>
+            <ac:spMk id="5" creationId="{9672301E-EF48-B60F-DB34-37D2994E90DD}"/>
+          </ac:spMkLst>
+        </pc:spChg>
+        <pc:spChg chg="del mod">
+          <ac:chgData name="Harry Wong" userId="2e681b20-ff61-411d-b970-54b741321bcd" providerId="ADAL" clId="{123CDF9E-882E-3B44-9B07-04379EF3E374}" dt="2025-07-15T14:28:15.956" v="383" actId="478"/>
+          <ac:spMkLst>
+            <pc:docMk/>
+            <pc:sldMk cId="4273810623" sldId="261"/>
+            <ac:spMk id="6" creationId="{D78388EA-CB70-8F00-61F6-CE1811B51CBF}"/>
+          </ac:spMkLst>
+        </pc:spChg>
+      </pc:sldChg>
+      <pc:sldChg chg="addSp delSp modSp mod">
+        <pc:chgData name="Harry Wong" userId="2e681b20-ff61-411d-b970-54b741321bcd" providerId="ADAL" clId="{123CDF9E-882E-3B44-9B07-04379EF3E374}" dt="2025-07-15T14:39:04.596" v="478" actId="20577"/>
+        <pc:sldMkLst>
+          <pc:docMk/>
+          <pc:sldMk cId="2756963476" sldId="265"/>
+        </pc:sldMkLst>
+        <pc:spChg chg="mod">
+          <ac:chgData name="Harry Wong" userId="2e681b20-ff61-411d-b970-54b741321bcd" providerId="ADAL" clId="{123CDF9E-882E-3B44-9B07-04379EF3E374}" dt="2025-07-15T14:37:42.485" v="446" actId="26606"/>
+          <ac:spMkLst>
+            <pc:docMk/>
+            <pc:sldMk cId="2756963476" sldId="265"/>
+            <ac:spMk id="2" creationId="{FE8D94D5-D614-2153-2D17-D952DF34F04F}"/>
+          </ac:spMkLst>
+        </pc:spChg>
+        <pc:spChg chg="mod ord">
+          <ac:chgData name="Harry Wong" userId="2e681b20-ff61-411d-b970-54b741321bcd" providerId="ADAL" clId="{123CDF9E-882E-3B44-9B07-04379EF3E374}" dt="2025-07-15T14:39:04.596" v="478" actId="20577"/>
+          <ac:spMkLst>
+            <pc:docMk/>
+            <pc:sldMk cId="2756963476" sldId="265"/>
+            <ac:spMk id="4" creationId="{79950ACC-0F5A-CAB9-2829-2F29FEA2FEB3}"/>
+          </ac:spMkLst>
+        </pc:spChg>
+        <pc:spChg chg="mod ord">
+          <ac:chgData name="Harry Wong" userId="2e681b20-ff61-411d-b970-54b741321bcd" providerId="ADAL" clId="{123CDF9E-882E-3B44-9B07-04379EF3E374}" dt="2025-07-15T14:37:42.485" v="446" actId="26606"/>
+          <ac:spMkLst>
+            <pc:docMk/>
+            <pc:sldMk cId="2756963476" sldId="265"/>
+            <ac:spMk id="5" creationId="{9672301E-EF48-B60F-DB34-37D2994E90DD}"/>
+          </ac:spMkLst>
+        </pc:spChg>
+        <pc:spChg chg="del mod">
+          <ac:chgData name="Harry Wong" userId="2e681b20-ff61-411d-b970-54b741321bcd" providerId="ADAL" clId="{123CDF9E-882E-3B44-9B07-04379EF3E374}" dt="2025-07-15T14:28:12.149" v="382" actId="478"/>
+          <ac:spMkLst>
+            <pc:docMk/>
+            <pc:sldMk cId="2756963476" sldId="265"/>
+            <ac:spMk id="6" creationId="{D78388EA-CB70-8F00-61F6-CE1811B51CBF}"/>
+          </ac:spMkLst>
+        </pc:spChg>
+        <pc:picChg chg="add mod modCrop">
+          <ac:chgData name="Harry Wong" userId="2e681b20-ff61-411d-b970-54b741321bcd" providerId="ADAL" clId="{123CDF9E-882E-3B44-9B07-04379EF3E374}" dt="2025-07-15T14:37:55.046" v="447" actId="27614"/>
+          <ac:picMkLst>
+            <pc:docMk/>
+            <pc:sldMk cId="2756963476" sldId="265"/>
+            <ac:picMk id="3" creationId="{D617ACA3-8275-5777-0F14-786E33E1B124}"/>
+          </ac:picMkLst>
+        </pc:picChg>
+        <pc:picChg chg="del">
+          <ac:chgData name="Harry Wong" userId="2e681b20-ff61-411d-b970-54b741321bcd" providerId="ADAL" clId="{123CDF9E-882E-3B44-9B07-04379EF3E374}" dt="2025-07-15T14:36:59.544" v="442" actId="478"/>
+          <ac:picMkLst>
+            <pc:docMk/>
+            <pc:sldMk cId="2756963476" sldId="265"/>
+            <ac:picMk id="8" creationId="{13C7A039-91F6-A683-0C96-B98435A1CED3}"/>
+          </ac:picMkLst>
+        </pc:picChg>
+      </pc:sldChg>
+      <pc:sldChg chg="delSp modSp mod">
+        <pc:chgData name="Harry Wong" userId="2e681b20-ff61-411d-b970-54b741321bcd" providerId="ADAL" clId="{123CDF9E-882E-3B44-9B07-04379EF3E374}" dt="2025-07-15T14:28:21.870" v="384" actId="478"/>
+        <pc:sldMkLst>
+          <pc:docMk/>
+          <pc:sldMk cId="1753733377" sldId="267"/>
+        </pc:sldMkLst>
+        <pc:spChg chg="mod">
+          <ac:chgData name="Harry Wong" userId="2e681b20-ff61-411d-b970-54b741321bcd" providerId="ADAL" clId="{123CDF9E-882E-3B44-9B07-04379EF3E374}" dt="2025-07-15T14:21:52.336" v="327" actId="27636"/>
+          <ac:spMkLst>
+            <pc:docMk/>
+            <pc:sldMk cId="1753733377" sldId="267"/>
+            <ac:spMk id="4" creationId="{79950ACC-0F5A-CAB9-2829-2F29FEA2FEB3}"/>
+          </ac:spMkLst>
+        </pc:spChg>
+        <pc:spChg chg="mod">
+          <ac:chgData name="Harry Wong" userId="2e681b20-ff61-411d-b970-54b741321bcd" providerId="ADAL" clId="{123CDF9E-882E-3B44-9B07-04379EF3E374}" dt="2025-07-15T14:27:45.765" v="378"/>
+          <ac:spMkLst>
+            <pc:docMk/>
+            <pc:sldMk cId="1753733377" sldId="267"/>
+            <ac:spMk id="5" creationId="{9672301E-EF48-B60F-DB34-37D2994E90DD}"/>
+          </ac:spMkLst>
+        </pc:spChg>
+        <pc:spChg chg="del mod">
+          <ac:chgData name="Harry Wong" userId="2e681b20-ff61-411d-b970-54b741321bcd" providerId="ADAL" clId="{123CDF9E-882E-3B44-9B07-04379EF3E374}" dt="2025-07-15T14:28:21.870" v="384" actId="478"/>
+          <ac:spMkLst>
+            <pc:docMk/>
+            <pc:sldMk cId="1753733377" sldId="267"/>
+            <ac:spMk id="6" creationId="{D78388EA-CB70-8F00-61F6-CE1811B51CBF}"/>
+          </ac:spMkLst>
+        </pc:spChg>
+      </pc:sldChg>
+      <pc:sldChg chg="delSp modSp mod">
+        <pc:chgData name="Harry Wong" userId="2e681b20-ff61-411d-b970-54b741321bcd" providerId="ADAL" clId="{123CDF9E-882E-3B44-9B07-04379EF3E374}" dt="2025-07-15T14:28:25.797" v="385" actId="478"/>
+        <pc:sldMkLst>
+          <pc:docMk/>
+          <pc:sldMk cId="3602494886" sldId="268"/>
+        </pc:sldMkLst>
+        <pc:spChg chg="mod">
+          <ac:chgData name="Harry Wong" userId="2e681b20-ff61-411d-b970-54b741321bcd" providerId="ADAL" clId="{123CDF9E-882E-3B44-9B07-04379EF3E374}" dt="2025-07-15T14:20:16.387" v="317" actId="948"/>
+          <ac:spMkLst>
+            <pc:docMk/>
+            <pc:sldMk cId="3602494886" sldId="268"/>
+            <ac:spMk id="4" creationId="{79950ACC-0F5A-CAB9-2829-2F29FEA2FEB3}"/>
+          </ac:spMkLst>
+        </pc:spChg>
+        <pc:spChg chg="mod">
+          <ac:chgData name="Harry Wong" userId="2e681b20-ff61-411d-b970-54b741321bcd" providerId="ADAL" clId="{123CDF9E-882E-3B44-9B07-04379EF3E374}" dt="2025-07-15T14:27:45.765" v="378"/>
+          <ac:spMkLst>
+            <pc:docMk/>
+            <pc:sldMk cId="3602494886" sldId="268"/>
+            <ac:spMk id="5" creationId="{9672301E-EF48-B60F-DB34-37D2994E90DD}"/>
+          </ac:spMkLst>
+        </pc:spChg>
+        <pc:spChg chg="del mod">
+          <ac:chgData name="Harry Wong" userId="2e681b20-ff61-411d-b970-54b741321bcd" providerId="ADAL" clId="{123CDF9E-882E-3B44-9B07-04379EF3E374}" dt="2025-07-15T14:28:25.797" v="385" actId="478"/>
+          <ac:spMkLst>
+            <pc:docMk/>
+            <pc:sldMk cId="3602494886" sldId="268"/>
+            <ac:spMk id="6" creationId="{D78388EA-CB70-8F00-61F6-CE1811B51CBF}"/>
+          </ac:spMkLst>
+        </pc:spChg>
+      </pc:sldChg>
+      <pc:sldChg chg="delSp modSp add mod">
+        <pc:chgData name="Harry Wong" userId="2e681b20-ff61-411d-b970-54b741321bcd" providerId="ADAL" clId="{123CDF9E-882E-3B44-9B07-04379EF3E374}" dt="2025-07-15T14:28:30.965" v="386" actId="478"/>
+        <pc:sldMkLst>
+          <pc:docMk/>
+          <pc:sldMk cId="2417461542" sldId="269"/>
+        </pc:sldMkLst>
+        <pc:spChg chg="mod">
+          <ac:chgData name="Harry Wong" userId="2e681b20-ff61-411d-b970-54b741321bcd" providerId="ADAL" clId="{123CDF9E-882E-3B44-9B07-04379EF3E374}" dt="2025-07-15T14:13:12.679" v="80"/>
+          <ac:spMkLst>
+            <pc:docMk/>
+            <pc:sldMk cId="2417461542" sldId="269"/>
+            <ac:spMk id="2" creationId="{FE8D94D5-D614-2153-2D17-D952DF34F04F}"/>
+          </ac:spMkLst>
+        </pc:spChg>
+        <pc:spChg chg="mod">
+          <ac:chgData name="Harry Wong" userId="2e681b20-ff61-411d-b970-54b741321bcd" providerId="ADAL" clId="{123CDF9E-882E-3B44-9B07-04379EF3E374}" dt="2025-07-15T14:22:11.344" v="328" actId="948"/>
+          <ac:spMkLst>
+            <pc:docMk/>
+            <pc:sldMk cId="2417461542" sldId="269"/>
+            <ac:spMk id="4" creationId="{79950ACC-0F5A-CAB9-2829-2F29FEA2FEB3}"/>
+          </ac:spMkLst>
+        </pc:spChg>
+        <pc:spChg chg="mod">
+          <ac:chgData name="Harry Wong" userId="2e681b20-ff61-411d-b970-54b741321bcd" providerId="ADAL" clId="{123CDF9E-882E-3B44-9B07-04379EF3E374}" dt="2025-07-15T14:27:45.765" v="378"/>
+          <ac:spMkLst>
+            <pc:docMk/>
+            <pc:sldMk cId="2417461542" sldId="269"/>
+            <ac:spMk id="5" creationId="{9672301E-EF48-B60F-DB34-37D2994E90DD}"/>
+          </ac:spMkLst>
+        </pc:spChg>
+        <pc:spChg chg="del mod">
+          <ac:chgData name="Harry Wong" userId="2e681b20-ff61-411d-b970-54b741321bcd" providerId="ADAL" clId="{123CDF9E-882E-3B44-9B07-04379EF3E374}" dt="2025-07-15T14:28:30.965" v="386" actId="478"/>
+          <ac:spMkLst>
+            <pc:docMk/>
+            <pc:sldMk cId="2417461542" sldId="269"/>
+            <ac:spMk id="6" creationId="{D78388EA-CB70-8F00-61F6-CE1811B51CBF}"/>
+          </ac:spMkLst>
+        </pc:spChg>
+      </pc:sldChg>
+      <pc:sldChg chg="delSp modSp add mod">
+        <pc:chgData name="Harry Wong" userId="2e681b20-ff61-411d-b970-54b741321bcd" providerId="ADAL" clId="{123CDF9E-882E-3B44-9B07-04379EF3E374}" dt="2025-07-15T14:28:34.588" v="387" actId="478"/>
+        <pc:sldMkLst>
+          <pc:docMk/>
+          <pc:sldMk cId="3643409903" sldId="270"/>
+        </pc:sldMkLst>
+        <pc:spChg chg="mod">
+          <ac:chgData name="Harry Wong" userId="2e681b20-ff61-411d-b970-54b741321bcd" providerId="ADAL" clId="{123CDF9E-882E-3B44-9B07-04379EF3E374}" dt="2025-07-15T14:13:55.595" v="111" actId="20577"/>
+          <ac:spMkLst>
+            <pc:docMk/>
+            <pc:sldMk cId="3643409903" sldId="270"/>
+            <ac:spMk id="2" creationId="{FE8D94D5-D614-2153-2D17-D952DF34F04F}"/>
+          </ac:spMkLst>
+        </pc:spChg>
+        <pc:spChg chg="mod">
+          <ac:chgData name="Harry Wong" userId="2e681b20-ff61-411d-b970-54b741321bcd" providerId="ADAL" clId="{123CDF9E-882E-3B44-9B07-04379EF3E374}" dt="2025-07-15T14:22:55.610" v="354" actId="20577"/>
+          <ac:spMkLst>
+            <pc:docMk/>
+            <pc:sldMk cId="3643409903" sldId="270"/>
+            <ac:spMk id="4" creationId="{79950ACC-0F5A-CAB9-2829-2F29FEA2FEB3}"/>
+          </ac:spMkLst>
+        </pc:spChg>
+        <pc:spChg chg="mod">
+          <ac:chgData name="Harry Wong" userId="2e681b20-ff61-411d-b970-54b741321bcd" providerId="ADAL" clId="{123CDF9E-882E-3B44-9B07-04379EF3E374}" dt="2025-07-15T14:27:45.765" v="378"/>
+          <ac:spMkLst>
+            <pc:docMk/>
+            <pc:sldMk cId="3643409903" sldId="270"/>
+            <ac:spMk id="5" creationId="{9672301E-EF48-B60F-DB34-37D2994E90DD}"/>
+          </ac:spMkLst>
+        </pc:spChg>
+        <pc:spChg chg="del mod">
+          <ac:chgData name="Harry Wong" userId="2e681b20-ff61-411d-b970-54b741321bcd" providerId="ADAL" clId="{123CDF9E-882E-3B44-9B07-04379EF3E374}" dt="2025-07-15T14:28:34.588" v="387" actId="478"/>
+          <ac:spMkLst>
+            <pc:docMk/>
+            <pc:sldMk cId="3643409903" sldId="270"/>
+            <ac:spMk id="6" creationId="{D78388EA-CB70-8F00-61F6-CE1811B51CBF}"/>
+          </ac:spMkLst>
+        </pc:spChg>
+      </pc:sldChg>
+      <pc:sldChg chg="modSp new mod">
+        <pc:chgData name="Harry Wong" userId="2e681b20-ff61-411d-b970-54b741321bcd" providerId="ADAL" clId="{123CDF9E-882E-3B44-9B07-04379EF3E374}" dt="2025-07-15T14:23:55.977" v="363" actId="14100"/>
+        <pc:sldMkLst>
+          <pc:docMk/>
+          <pc:sldMk cId="2525084368" sldId="271"/>
+        </pc:sldMkLst>
+        <pc:spChg chg="mod">
+          <ac:chgData name="Harry Wong" userId="2e681b20-ff61-411d-b970-54b741321bcd" providerId="ADAL" clId="{123CDF9E-882E-3B44-9B07-04379EF3E374}" dt="2025-07-15T14:23:55.977" v="363" actId="14100"/>
+          <ac:spMkLst>
+            <pc:docMk/>
+            <pc:sldMk cId="2525084368" sldId="271"/>
+            <ac:spMk id="2" creationId="{D668C321-C2BD-0FAA-C48D-597D7738277F}"/>
+          </ac:spMkLst>
+        </pc:spChg>
+        <pc:spChg chg="mod">
+          <ac:chgData name="Harry Wong" userId="2e681b20-ff61-411d-b970-54b741321bcd" providerId="ADAL" clId="{123CDF9E-882E-3B44-9B07-04379EF3E374}" dt="2025-07-15T14:23:55.977" v="363" actId="14100"/>
+          <ac:spMkLst>
+            <pc:docMk/>
+            <pc:sldMk cId="2525084368" sldId="271"/>
+            <ac:spMk id="3" creationId="{85B6471F-7977-7A65-F5C2-2885469D4EF1}"/>
+          </ac:spMkLst>
+        </pc:spChg>
+      </pc:sldChg>
+      <pc:sldChg chg="new del">
+        <pc:chgData name="Harry Wong" userId="2e681b20-ff61-411d-b970-54b741321bcd" providerId="ADAL" clId="{123CDF9E-882E-3B44-9B07-04379EF3E374}" dt="2025-07-15T14:29:30.809" v="394" actId="2696"/>
+        <pc:sldMkLst>
+          <pc:docMk/>
+          <pc:sldMk cId="1807619364" sldId="272"/>
+        </pc:sldMkLst>
+      </pc:sldChg>
+      <pc:sldChg chg="delSp new del mod">
+        <pc:chgData name="Harry Wong" userId="2e681b20-ff61-411d-b970-54b741321bcd" providerId="ADAL" clId="{123CDF9E-882E-3B44-9B07-04379EF3E374}" dt="2025-07-15T14:29:24.808" v="392" actId="2696"/>
+        <pc:sldMkLst>
+          <pc:docMk/>
+          <pc:sldMk cId="2312042129" sldId="272"/>
+        </pc:sldMkLst>
+        <pc:spChg chg="del">
+          <ac:chgData name="Harry Wong" userId="2e681b20-ff61-411d-b970-54b741321bcd" providerId="ADAL" clId="{123CDF9E-882E-3B44-9B07-04379EF3E374}" dt="2025-07-15T14:29:22.980" v="391" actId="478"/>
+          <ac:spMkLst>
+            <pc:docMk/>
+            <pc:sldMk cId="2312042129" sldId="272"/>
+            <ac:spMk id="5" creationId="{4419252D-241B-4A04-B55B-4350CEA8D5D7}"/>
+          </ac:spMkLst>
+        </pc:spChg>
+      </pc:sldChg>
+      <pc:sldChg chg="modSp new del mod">
+        <pc:chgData name="Harry Wong" userId="2e681b20-ff61-411d-b970-54b741321bcd" providerId="ADAL" clId="{123CDF9E-882E-3B44-9B07-04379EF3E374}" dt="2025-07-15T14:31:23.742" v="441" actId="2696"/>
+        <pc:sldMkLst>
+          <pc:docMk/>
+          <pc:sldMk cId="2931135694" sldId="272"/>
+        </pc:sldMkLst>
+        <pc:spChg chg="mod">
+          <ac:chgData name="Harry Wong" userId="2e681b20-ff61-411d-b970-54b741321bcd" providerId="ADAL" clId="{123CDF9E-882E-3B44-9B07-04379EF3E374}" dt="2025-07-15T14:31:19.629" v="440" actId="5793"/>
+          <ac:spMkLst>
+            <pc:docMk/>
+            <pc:sldMk cId="2931135694" sldId="272"/>
+            <ac:spMk id="3" creationId="{F07010A5-4681-E45B-7577-176D876F7DA6}"/>
+          </ac:spMkLst>
+        </pc:spChg>
+      </pc:sldChg>
+      <pc:sldMasterChg chg="modSp mod modSldLayout">
+        <pc:chgData name="Harry Wong" userId="2e681b20-ff61-411d-b970-54b741321bcd" providerId="ADAL" clId="{123CDF9E-882E-3B44-9B07-04379EF3E374}" dt="2025-07-15T14:29:14.619" v="390"/>
+        <pc:sldMasterMkLst>
+          <pc:docMk/>
+          <pc:sldMasterMk cId="2089907493" sldId="2147483648"/>
+        </pc:sldMasterMkLst>
+        <pc:spChg chg="mod">
+          <ac:chgData name="Harry Wong" userId="2e681b20-ff61-411d-b970-54b741321bcd" providerId="ADAL" clId="{123CDF9E-882E-3B44-9B07-04379EF3E374}" dt="2025-07-15T14:17:00.926" v="302" actId="20577"/>
+          <ac:spMkLst>
+            <pc:docMk/>
+            <pc:sldMasterMk cId="2089907493" sldId="2147483648"/>
+            <ac:spMk id="3" creationId="{FB9EDDE8-1334-2126-E7DE-0E8F07211418}"/>
+          </ac:spMkLst>
+        </pc:spChg>
+        <pc:sldLayoutChg chg="addSp delSp modSp mod">
+          <pc:chgData name="Harry Wong" userId="2e681b20-ff61-411d-b970-54b741321bcd" providerId="ADAL" clId="{123CDF9E-882E-3B44-9B07-04379EF3E374}" dt="2025-07-15T14:29:14.619" v="390"/>
+          <pc:sldLayoutMkLst>
+            <pc:docMk/>
+            <pc:sldMasterMk cId="2089907493" sldId="2147483648"/>
+            <pc:sldLayoutMk cId="1320421244" sldId="2147483650"/>
+          </pc:sldLayoutMkLst>
+          <pc:spChg chg="mod">
+            <ac:chgData name="Harry Wong" userId="2e681b20-ff61-411d-b970-54b741321bcd" providerId="ADAL" clId="{123CDF9E-882E-3B44-9B07-04379EF3E374}" dt="2025-07-15T14:16:56.377" v="296" actId="20577"/>
+            <ac:spMkLst>
+              <pc:docMk/>
+              <pc:sldMasterMk cId="2089907493" sldId="2147483648"/>
+              <pc:sldLayoutMk cId="1320421244" sldId="2147483650"/>
+              <ac:spMk id="3" creationId="{E32F9BB0-EA3E-BD17-BAFE-A4343D3BF292}"/>
+            </ac:spMkLst>
+          </pc:spChg>
+          <pc:spChg chg="del">
+            <ac:chgData name="Harry Wong" userId="2e681b20-ff61-411d-b970-54b741321bcd" providerId="ADAL" clId="{123CDF9E-882E-3B44-9B07-04379EF3E374}" dt="2025-07-15T14:29:14.165" v="389" actId="478"/>
+            <ac:spMkLst>
+              <pc:docMk/>
+              <pc:sldMasterMk cId="2089907493" sldId="2147483648"/>
+              <pc:sldLayoutMk cId="1320421244" sldId="2147483650"/>
+              <ac:spMk id="5" creationId="{1B937E3B-D5AC-8C48-14A0-D4F79AE50388}"/>
+            </ac:spMkLst>
+          </pc:spChg>
+          <pc:picChg chg="add mod">
+            <ac:chgData name="Harry Wong" userId="2e681b20-ff61-411d-b970-54b741321bcd" providerId="ADAL" clId="{123CDF9E-882E-3B44-9B07-04379EF3E374}" dt="2025-07-15T14:29:14.619" v="390"/>
+            <ac:picMkLst>
+              <pc:docMk/>
+              <pc:sldMasterMk cId="2089907493" sldId="2147483648"/>
+              <pc:sldLayoutMk cId="1320421244" sldId="2147483650"/>
+              <ac:picMk id="13" creationId="{CDECAD2C-9B1C-3133-CA75-E50BAD194820}"/>
+            </ac:picMkLst>
+          </pc:picChg>
+        </pc:sldLayoutChg>
+        <pc:sldLayoutChg chg="addSp delSp modSp mod">
+          <pc:chgData name="Harry Wong" userId="2e681b20-ff61-411d-b970-54b741321bcd" providerId="ADAL" clId="{123CDF9E-882E-3B44-9B07-04379EF3E374}" dt="2025-07-15T14:27:54.975" v="380" actId="478"/>
+          <pc:sldLayoutMkLst>
+            <pc:docMk/>
+            <pc:sldMasterMk cId="2089907493" sldId="2147483648"/>
+            <pc:sldLayoutMk cId="1051143862" sldId="2147483656"/>
+          </pc:sldLayoutMkLst>
+          <pc:spChg chg="mod">
+            <ac:chgData name="Harry Wong" userId="2e681b20-ff61-411d-b970-54b741321bcd" providerId="ADAL" clId="{123CDF9E-882E-3B44-9B07-04379EF3E374}" dt="2025-07-15T14:21:27.930" v="323" actId="948"/>
+            <ac:spMkLst>
+              <pc:docMk/>
+              <pc:sldMasterMk cId="2089907493" sldId="2147483648"/>
+              <pc:sldLayoutMk cId="1051143862" sldId="2147483656"/>
+              <ac:spMk id="3" creationId="{01149384-F35F-5270-79AC-A8F5DCD56C27}"/>
+            </ac:spMkLst>
+          </pc:spChg>
+          <pc:spChg chg="del">
+            <ac:chgData name="Harry Wong" userId="2e681b20-ff61-411d-b970-54b741321bcd" providerId="ADAL" clId="{123CDF9E-882E-3B44-9B07-04379EF3E374}" dt="2025-07-15T14:27:45.765" v="378"/>
+            <ac:spMkLst>
+              <pc:docMk/>
+              <pc:sldMasterMk cId="2089907493" sldId="2147483648"/>
+              <pc:sldLayoutMk cId="1051143862" sldId="2147483656"/>
+              <ac:spMk id="5" creationId="{A4A7EABD-2894-EDD0-1582-FFB5CE9E1174}"/>
+            </ac:spMkLst>
+          </pc:spChg>
+          <pc:spChg chg="del mod">
+            <ac:chgData name="Harry Wong" userId="2e681b20-ff61-411d-b970-54b741321bcd" providerId="ADAL" clId="{123CDF9E-882E-3B44-9B07-04379EF3E374}" dt="2025-07-15T14:27:45.765" v="378"/>
+            <ac:spMkLst>
+              <pc:docMk/>
+              <pc:sldMasterMk cId="2089907493" sldId="2147483648"/>
+              <pc:sldLayoutMk cId="1051143862" sldId="2147483656"/>
+              <ac:spMk id="6" creationId="{8182BCA0-0CCB-7785-4554-6E5DE20D6B0C}"/>
+            </ac:spMkLst>
+          </pc:spChg>
+          <pc:spChg chg="del">
+            <ac:chgData name="Harry Wong" userId="2e681b20-ff61-411d-b970-54b741321bcd" providerId="ADAL" clId="{123CDF9E-882E-3B44-9B07-04379EF3E374}" dt="2025-07-15T14:27:45.765" v="378"/>
+            <ac:spMkLst>
+              <pc:docMk/>
+              <pc:sldMasterMk cId="2089907493" sldId="2147483648"/>
+              <pc:sldLayoutMk cId="1051143862" sldId="2147483656"/>
+              <ac:spMk id="7" creationId="{A33EBBDC-188D-4C5F-1B7B-7724CF7359FE}"/>
+            </ac:spMkLst>
+          </pc:spChg>
+          <pc:spChg chg="add mod">
+            <ac:chgData name="Harry Wong" userId="2e681b20-ff61-411d-b970-54b741321bcd" providerId="ADAL" clId="{123CDF9E-882E-3B44-9B07-04379EF3E374}" dt="2025-07-15T14:27:49.698" v="379"/>
+            <ac:spMkLst>
+              <pc:docMk/>
+              <pc:sldMasterMk cId="2089907493" sldId="2147483648"/>
+              <pc:sldLayoutMk cId="1051143862" sldId="2147483656"/>
+              <ac:spMk id="15" creationId="{3B354B9C-3CAE-C62A-599D-822460398899}"/>
+            </ac:spMkLst>
+          </pc:spChg>
+          <pc:spChg chg="add del mod">
+            <ac:chgData name="Harry Wong" userId="2e681b20-ff61-411d-b970-54b741321bcd" providerId="ADAL" clId="{123CDF9E-882E-3B44-9B07-04379EF3E374}" dt="2025-07-15T14:27:54.975" v="380" actId="478"/>
+            <ac:spMkLst>
+              <pc:docMk/>
+              <pc:sldMasterMk cId="2089907493" sldId="2147483648"/>
+              <pc:sldLayoutMk cId="1051143862" sldId="2147483656"/>
+              <ac:spMk id="16" creationId="{F7966C9A-E159-5A57-03FE-A1FB626E2600}"/>
+            </ac:spMkLst>
+          </pc:spChg>
+          <pc:spChg chg="add mod">
+            <ac:chgData name="Harry Wong" userId="2e681b20-ff61-411d-b970-54b741321bcd" providerId="ADAL" clId="{123CDF9E-882E-3B44-9B07-04379EF3E374}" dt="2025-07-15T14:27:49.698" v="379"/>
+            <ac:spMkLst>
+              <pc:docMk/>
+              <pc:sldMasterMk cId="2089907493" sldId="2147483648"/>
+              <pc:sldLayoutMk cId="1051143862" sldId="2147483656"/>
+              <ac:spMk id="17" creationId="{E501D1DD-1FF5-FD76-E030-4C75B8BA53EE}"/>
+            </ac:spMkLst>
+          </pc:spChg>
+          <pc:picChg chg="add mod">
+            <ac:chgData name="Harry Wong" userId="2e681b20-ff61-411d-b970-54b741321bcd" providerId="ADAL" clId="{123CDF9E-882E-3B44-9B07-04379EF3E374}" dt="2025-07-15T14:26:56.227" v="377" actId="1076"/>
+            <ac:picMkLst>
+              <pc:docMk/>
+              <pc:sldMasterMk cId="2089907493" sldId="2147483648"/>
+              <pc:sldLayoutMk cId="1051143862" sldId="2147483656"/>
+              <ac:picMk id="14" creationId="{E20550B4-0769-0D89-3F88-3A767EAC599E}"/>
+            </ac:picMkLst>
+          </pc:picChg>
+        </pc:sldLayoutChg>
+      </pc:sldMasterChg>
+    </pc:docChg>
+  </pc:docChgLst>
+</pc:chgInfo>
+</file>
+
+<file path=ppt/handoutMasters/handoutMaster1.xml><?xml version="1.0" encoding="utf-8"?>
+<p:handoutMaster xmlns:a="http://schemas.openxmlformats.org/drawingml/2006/main" xmlns:r="http://schemas.openxmlformats.org/officeDocument/2006/relationships" xmlns:p="http://schemas.openxmlformats.org/presentationml/2006/main">
+  <p:cSld>
+    <p:bg>
+      <p:bgRef idx="1001">
+        <a:schemeClr val="bg1"/>
+      </p:bgRef>
+    </p:bg>
+    <p:spTree>
+      <p:nvGrpSpPr>
+        <p:cNvPr id="1" name=""/>
+        <p:cNvGrpSpPr/>
+        <p:nvPr/>
+      </p:nvGrpSpPr>
+      <p:grpSpPr>
+        <a:xfrm>
+          <a:off x="0" y="0"/>
+          <a:ext cx="0" cy="0"/>
+          <a:chOff x="0" y="0"/>
+          <a:chExt cx="0" cy="0"/>
+        </a:xfrm>
+      </p:grpSpPr>
+      <p:sp>
+        <p:nvSpPr>
+          <p:cNvPr id="2" name="Header Placeholder 1">
+            <a:extLst>
+              <a:ext uri="{FF2B5EF4-FFF2-40B4-BE49-F238E27FC236}">
+                <a16:creationId xmlns:a16="http://schemas.microsoft.com/office/drawing/2014/main" id="{108C673E-F4EF-4987-0665-52E84149E7CA}"/>
+              </a:ext>
+            </a:extLst>
+          </p:cNvPr>
+          <p:cNvSpPr>
+            <a:spLocks noGrp="1"/>
+          </p:cNvSpPr>
+          <p:nvPr>
+            <p:ph type="hdr" sz="quarter"/>
+          </p:nvPr>
+        </p:nvSpPr>
+        <p:spPr>
+          <a:xfrm>
+            <a:off x="0" y="0"/>
+            <a:ext cx="2971800" cy="458788"/>
+          </a:xfrm>
+          <a:prstGeom prst="rect">
+            <a:avLst/>
+          </a:prstGeom>
+        </p:spPr>
+        <p:txBody>
+          <a:bodyPr vert="horz" lIns="91440" tIns="45720" rIns="91440" bIns="45720" rtlCol="0"/>
+          <a:lstStyle>
+            <a:lvl1pPr algn="l">
+              <a:defRPr sz="1200"/>
+            </a:lvl1pPr>
+          </a:lstStyle>
+          <a:p>
+            <a:endParaRPr lang="es-ES_tradnl"/>
+          </a:p>
+        </p:txBody>
+      </p:sp>
+      <p:sp>
+        <p:nvSpPr>
+          <p:cNvPr id="3" name="Date Placeholder 2">
+            <a:extLst>
+              <a:ext uri="{FF2B5EF4-FFF2-40B4-BE49-F238E27FC236}">
+                <a16:creationId xmlns:a16="http://schemas.microsoft.com/office/drawing/2014/main" id="{427C6984-A549-84BC-E46A-DBD7DB693E1E}"/>
+              </a:ext>
+            </a:extLst>
+          </p:cNvPr>
+          <p:cNvSpPr>
+            <a:spLocks noGrp="1"/>
+          </p:cNvSpPr>
+          <p:nvPr>
+            <p:ph type="dt" sz="quarter" idx="1"/>
+          </p:nvPr>
+        </p:nvSpPr>
+        <p:spPr>
+          <a:xfrm>
+            <a:off x="3884613" y="0"/>
+            <a:ext cx="2971800" cy="458788"/>
+          </a:xfrm>
+          <a:prstGeom prst="rect">
+            <a:avLst/>
+          </a:prstGeom>
+        </p:spPr>
+        <p:txBody>
+          <a:bodyPr vert="horz" lIns="91440" tIns="45720" rIns="91440" bIns="45720" rtlCol="0"/>
+          <a:lstStyle>
+            <a:lvl1pPr algn="r">
+              <a:defRPr sz="1200"/>
+            </a:lvl1pPr>
+          </a:lstStyle>
+          <a:p>
+            <a:fld id="{A13ED924-FA48-FD45-A084-FE8A0F93E5F4}" type="datetimeFigureOut">
+              <a:rPr lang="es-ES_tradnl" smtClean="0"/>
+              <a:t>15/7/25</a:t>
+            </a:fld>
+            <a:endParaRPr lang="es-ES_tradnl"/>
+          </a:p>
+        </p:txBody>
+      </p:sp>
+      <p:sp>
+        <p:nvSpPr>
+          <p:cNvPr id="4" name="Footer Placeholder 3">
+            <a:extLst>
+              <a:ext uri="{FF2B5EF4-FFF2-40B4-BE49-F238E27FC236}">
+                <a16:creationId xmlns:a16="http://schemas.microsoft.com/office/drawing/2014/main" id="{1A1ECC92-9ADA-3086-37D2-766BEEA89C07}"/>
+              </a:ext>
+            </a:extLst>
+          </p:cNvPr>
+          <p:cNvSpPr>
+            <a:spLocks noGrp="1"/>
+          </p:cNvSpPr>
+          <p:nvPr>
+            <p:ph type="ftr" sz="quarter" idx="2"/>
+          </p:nvPr>
+        </p:nvSpPr>
+        <p:spPr>
+          <a:xfrm>
+            <a:off x="0" y="8685213"/>
+            <a:ext cx="2971800" cy="458787"/>
+          </a:xfrm>
+          <a:prstGeom prst="rect">
+            <a:avLst/>
+          </a:prstGeom>
+        </p:spPr>
+        <p:txBody>
+          <a:bodyPr vert="horz" lIns="91440" tIns="45720" rIns="91440" bIns="45720" rtlCol="0" anchor="b"/>
+          <a:lstStyle>
+            <a:lvl1pPr algn="l">
+              <a:defRPr sz="1200"/>
+            </a:lvl1pPr>
+          </a:lstStyle>
+          <a:p>
+            <a:endParaRPr lang="es-ES_tradnl"/>
+          </a:p>
+        </p:txBody>
+      </p:sp>
+      <p:sp>
+        <p:nvSpPr>
+          <p:cNvPr id="5" name="Slide Number Placeholder 4">
+            <a:extLst>
+              <a:ext uri="{FF2B5EF4-FFF2-40B4-BE49-F238E27FC236}">
+                <a16:creationId xmlns:a16="http://schemas.microsoft.com/office/drawing/2014/main" id="{3EDA593A-C0DF-B01B-0F63-F155F29B9A04}"/>
+              </a:ext>
+            </a:extLst>
+          </p:cNvPr>
+          <p:cNvSpPr>
+            <a:spLocks noGrp="1"/>
+          </p:cNvSpPr>
+          <p:nvPr>
+            <p:ph type="sldNum" sz="quarter" idx="3"/>
+          </p:nvPr>
+        </p:nvSpPr>
+        <p:spPr>
+          <a:xfrm>
+            <a:off x="3884613" y="8685213"/>
+            <a:ext cx="2971800" cy="458787"/>
+          </a:xfrm>
+          <a:prstGeom prst="rect">
+            <a:avLst/>
+          </a:prstGeom>
+        </p:spPr>
+        <p:txBody>
+          <a:bodyPr vert="horz" lIns="91440" tIns="45720" rIns="91440" bIns="45720" rtlCol="0" anchor="b"/>
+          <a:lstStyle>
+            <a:lvl1pPr algn="r">
+              <a:defRPr sz="1200"/>
+            </a:lvl1pPr>
+          </a:lstStyle>
+          <a:p>
+            <a:fld id="{9A0E5C3F-5CA7-5046-95D5-E2C6EBEE4CEF}" type="slidenum">
+              <a:rPr lang="es-ES_tradnl" smtClean="0"/>
+              <a:t>‹#›</a:t>
+            </a:fld>
+            <a:endParaRPr lang="es-ES_tradnl"/>
+          </a:p>
+        </p:txBody>
+      </p:sp>
+    </p:spTree>
+    <p:extLst>
+      <p:ext uri="{BB962C8B-B14F-4D97-AF65-F5344CB8AC3E}">
+        <p14:creationId xmlns:p14="http://schemas.microsoft.com/office/powerpoint/2010/main" val="224327709"/>
+      </p:ext>
+    </p:extLst>
+  </p:cSld>
+  <p:clrMap bg1="lt1" tx1="dk1" bg2="lt2" tx2="dk2" accent1="accent1" accent2="accent2" accent3="accent3" accent4="accent4" accent5="accent5" accent6="accent6" hlink="hlink" folHlink="folHlink"/>
+</p:handoutMaster>
+</file>
+
+<file path=ppt/notesMasters/notesMaster1.xml><?xml version="1.0" encoding="utf-8"?>
+<p:notesMaster xmlns:a="http://schemas.openxmlformats.org/drawingml/2006/main" xmlns:r="http://schemas.openxmlformats.org/officeDocument/2006/relationships" xmlns:p="http://schemas.openxmlformats.org/presentationml/2006/main">
+  <p:cSld>
+    <p:bg>
+      <p:bgRef idx="1001">
+        <a:schemeClr val="bg1"/>
+      </p:bgRef>
+    </p:bg>
+    <p:spTree>
+      <p:nvGrpSpPr>
+        <p:cNvPr id="1" name=""/>
+        <p:cNvGrpSpPr/>
+        <p:nvPr/>
+      </p:nvGrpSpPr>
+      <p:grpSpPr>
+        <a:xfrm>
+          <a:off x="0" y="0"/>
+          <a:ext cx="0" cy="0"/>
+          <a:chOff x="0" y="0"/>
+          <a:chExt cx="0" cy="0"/>
+        </a:xfrm>
+      </p:grpSpPr>
+      <p:sp>
+        <p:nvSpPr>
+          <p:cNvPr id="2" name="Header Placeholder 1"/>
+          <p:cNvSpPr>
+            <a:spLocks noGrp="1"/>
+          </p:cNvSpPr>
+          <p:nvPr>
+            <p:ph type="hdr" sz="quarter"/>
+          </p:nvPr>
+        </p:nvSpPr>
+        <p:spPr>
+          <a:xfrm>
+            <a:off x="0" y="0"/>
+            <a:ext cx="2971800" cy="458788"/>
+          </a:xfrm>
+          <a:prstGeom prst="rect">
+            <a:avLst/>
+          </a:prstGeom>
+        </p:spPr>
+        <p:txBody>
+          <a:bodyPr vert="horz" lIns="91440" tIns="45720" rIns="91440" bIns="45720" rtlCol="0"/>
+          <a:lstStyle>
+            <a:lvl1pPr algn="l">
+              <a:defRPr sz="1200"/>
+            </a:lvl1pPr>
+          </a:lstStyle>
+          <a:p>
+            <a:endParaRPr lang="es-ES_tradnl"/>
+          </a:p>
+        </p:txBody>
+      </p:sp>
+      <p:sp>
+        <p:nvSpPr>
+          <p:cNvPr id="3" name="Date Placeholder 2"/>
+          <p:cNvSpPr>
+            <a:spLocks noGrp="1"/>
+          </p:cNvSpPr>
+          <p:nvPr>
+            <p:ph type="dt" idx="1"/>
+          </p:nvPr>
+        </p:nvSpPr>
+        <p:spPr>
+          <a:xfrm>
+            <a:off x="3884613" y="0"/>
+            <a:ext cx="2971800" cy="458788"/>
+          </a:xfrm>
+          <a:prstGeom prst="rect">
+            <a:avLst/>
+          </a:prstGeom>
+        </p:spPr>
+        <p:txBody>
+          <a:bodyPr vert="horz" lIns="91440" tIns="45720" rIns="91440" bIns="45720" rtlCol="0"/>
+          <a:lstStyle>
+            <a:lvl1pPr algn="r">
+              <a:defRPr sz="1200"/>
+            </a:lvl1pPr>
+          </a:lstStyle>
+          <a:p>
+            <a:fld id="{CA5846D4-FBD3-D544-A1F2-7C824B734CCB}" type="datetimeFigureOut">
+              <a:rPr lang="es-ES_tradnl" smtClean="0"/>
+              <a:t>15/7/25</a:t>
+            </a:fld>
+            <a:endParaRPr lang="es-ES_tradnl"/>
+          </a:p>
+        </p:txBody>
+      </p:sp>
+      <p:sp>
+        <p:nvSpPr>
+          <p:cNvPr id="4" name="Slide Image Placeholder 3"/>
+          <p:cNvSpPr>
+            <a:spLocks noGrp="1" noRot="1" noChangeAspect="1"/>
+          </p:cNvSpPr>
+          <p:nvPr>
+            <p:ph type="sldImg" idx="2"/>
+          </p:nvPr>
+        </p:nvSpPr>
+        <p:spPr>
+          <a:xfrm>
+            <a:off x="685800" y="1143000"/>
+            <a:ext cx="5486400" cy="3086100"/>
+          </a:xfrm>
+          <a:prstGeom prst="rect">
+            <a:avLst/>
+          </a:prstGeom>
+          <a:noFill/>
+          <a:ln w="12700">
+            <a:solidFill>
+              <a:prstClr val="black"/>
+            </a:solidFill>
+          </a:ln>
+        </p:spPr>
+        <p:txBody>
+          <a:bodyPr vert="horz" lIns="91440" tIns="45720" rIns="91440" bIns="45720" rtlCol="0" anchor="ctr"/>
+          <a:lstStyle/>
+          <a:p>
+            <a:endParaRPr lang="es-ES_tradnl"/>
+          </a:p>
+        </p:txBody>
+      </p:sp>
+      <p:sp>
+        <p:nvSpPr>
+          <p:cNvPr id="5" name="Notes Placeholder 4"/>
+          <p:cNvSpPr>
+            <a:spLocks noGrp="1"/>
+          </p:cNvSpPr>
+          <p:nvPr>
+            <p:ph type="body" sz="quarter" idx="3"/>
+          </p:nvPr>
+        </p:nvSpPr>
+        <p:spPr>
+          <a:xfrm>
+            <a:off x="685800" y="4400550"/>
+            <a:ext cx="5486400" cy="3600450"/>
+          </a:xfrm>
+          <a:prstGeom prst="rect">
+            <a:avLst/>
+          </a:prstGeom>
+        </p:spPr>
+        <p:txBody>
+          <a:bodyPr vert="horz" lIns="91440" tIns="45720" rIns="91440" bIns="45720" rtlCol="0"/>
+          <a:lstStyle/>
+          <a:p>
+            <a:pPr lvl="0"/>
+            <a:r>
+              <a:rPr lang="en-US"/>
+              <a:t>Click to edit Master text styles</a:t>
+            </a:r>
+          </a:p>
+          <a:p>
+            <a:pPr lvl="1"/>
+            <a:r>
+              <a:rPr lang="en-US"/>
+              <a:t>Second level</a:t>
+            </a:r>
+          </a:p>
+          <a:p>
+            <a:pPr lvl="2"/>
+            <a:r>
+              <a:rPr lang="en-US"/>
+              <a:t>Third level</a:t>
+            </a:r>
+          </a:p>
+          <a:p>
+            <a:pPr lvl="3"/>
+            <a:r>
+              <a:rPr lang="en-US"/>
+              <a:t>Fourth level</a:t>
+            </a:r>
+          </a:p>
+          <a:p>
+            <a:pPr lvl="4"/>
+            <a:r>
+              <a:rPr lang="en-US"/>
+              <a:t>Fifth level</a:t>
+            </a:r>
+            <a:endParaRPr lang="es-ES_tradnl"/>
+          </a:p>
+        </p:txBody>
+      </p:sp>
+      <p:sp>
+        <p:nvSpPr>
+          <p:cNvPr id="6" name="Footer Placeholder 5"/>
+          <p:cNvSpPr>
+            <a:spLocks noGrp="1"/>
+          </p:cNvSpPr>
+          <p:nvPr>
+            <p:ph type="ftr" sz="quarter" idx="4"/>
+          </p:nvPr>
+        </p:nvSpPr>
+        <p:spPr>
+          <a:xfrm>
+            <a:off x="0" y="8685213"/>
+            <a:ext cx="2971800" cy="458787"/>
+          </a:xfrm>
+          <a:prstGeom prst="rect">
+            <a:avLst/>
+          </a:prstGeom>
+        </p:spPr>
+        <p:txBody>
+          <a:bodyPr vert="horz" lIns="91440" tIns="45720" rIns="91440" bIns="45720" rtlCol="0" anchor="b"/>
+          <a:lstStyle>
+            <a:lvl1pPr algn="l">
+              <a:defRPr sz="1200"/>
+            </a:lvl1pPr>
+          </a:lstStyle>
+          <a:p>
+            <a:endParaRPr lang="es-ES_tradnl"/>
+          </a:p>
+        </p:txBody>
+      </p:sp>
+      <p:sp>
+        <p:nvSpPr>
+          <p:cNvPr id="7" name="Slide Number Placeholder 6"/>
+          <p:cNvSpPr>
+            <a:spLocks noGrp="1"/>
+          </p:cNvSpPr>
+          <p:nvPr>
+            <p:ph type="sldNum" sz="quarter" idx="5"/>
+          </p:nvPr>
+        </p:nvSpPr>
+        <p:spPr>
+          <a:xfrm>
+            <a:off x="3884613" y="8685213"/>
+            <a:ext cx="2971800" cy="458787"/>
+          </a:xfrm>
+          <a:prstGeom prst="rect">
+            <a:avLst/>
+          </a:prstGeom>
+        </p:spPr>
+        <p:txBody>
+          <a:bodyPr vert="horz" lIns="91440" tIns="45720" rIns="91440" bIns="45720" rtlCol="0" anchor="b"/>
+          <a:lstStyle>
+            <a:lvl1pPr algn="r">
+              <a:defRPr sz="1200"/>
+            </a:lvl1pPr>
+          </a:lstStyle>
+          <a:p>
+            <a:fld id="{486CD419-2AC2-0C44-AAD7-69EAB9D87D10}" type="slidenum">
+              <a:rPr lang="es-ES_tradnl" smtClean="0"/>
+              <a:t>‹#›</a:t>
+            </a:fld>
+            <a:endParaRPr lang="es-ES_tradnl"/>
+          </a:p>
+        </p:txBody>
+      </p:sp>
+    </p:spTree>
+    <p:extLst>
+      <p:ext uri="{BB962C8B-B14F-4D97-AF65-F5344CB8AC3E}">
+        <p14:creationId xmlns:p14="http://schemas.microsoft.com/office/powerpoint/2010/main" val="4072552346"/>
+      </p:ext>
+    </p:extLst>
+  </p:cSld>
+  <p:clrMap bg1="lt1" tx1="dk1" bg2="lt2" tx2="dk2" accent1="accent1" accent2="accent2" accent3="accent3" accent4="accent4" accent5="accent5" accent6="accent6" hlink="hlink" folHlink="folHlink"/>
+  <p:notesStyle>
+    <a:lvl1pPr marL="0" algn="l" defTabSz="914400" rtl="0" eaLnBrk="1" latinLnBrk="0" hangingPunct="1">
+      <a:defRPr sz="1200" kern="1200">
+        <a:solidFill>
+          <a:schemeClr val="tx1"/>
+        </a:solidFill>
+        <a:latin typeface="+mn-lt"/>
+        <a:ea typeface="+mn-ea"/>
+        <a:cs typeface="+mn-cs"/>
+      </a:defRPr>
+    </a:lvl1pPr>
+    <a:lvl2pPr marL="457200" algn="l" defTabSz="914400" rtl="0" eaLnBrk="1" latinLnBrk="0" hangingPunct="1">
+      <a:defRPr sz="1200" kern="1200">
+        <a:solidFill>
+          <a:schemeClr val="tx1"/>
+        </a:solidFill>
+        <a:latin typeface="+mn-lt"/>
+        <a:ea typeface="+mn-ea"/>
+        <a:cs typeface="+mn-cs"/>
+      </a:defRPr>
+    </a:lvl2pPr>
+    <a:lvl3pPr marL="914400" algn="l" defTabSz="914400" rtl="0" eaLnBrk="1" latinLnBrk="0" hangingPunct="1">
+      <a:defRPr sz="1200" kern="1200">
+        <a:solidFill>
+          <a:schemeClr val="tx1"/>
+        </a:solidFill>
+        <a:latin typeface="+mn-lt"/>
+        <a:ea typeface="+mn-ea"/>
+        <a:cs typeface="+mn-cs"/>
+      </a:defRPr>
+    </a:lvl3pPr>
+    <a:lvl4pPr marL="1371600" algn="l" defTabSz="914400" rtl="0" eaLnBrk="1" latinLnBrk="0" hangingPunct="1">
+      <a:defRPr sz="1200" kern="1200">
+        <a:solidFill>
+          <a:schemeClr val="tx1"/>
+        </a:solidFill>
+        <a:latin typeface="+mn-lt"/>
+        <a:ea typeface="+mn-ea"/>
+        <a:cs typeface="+mn-cs"/>
+      </a:defRPr>
+    </a:lvl4pPr>
+    <a:lvl5pPr marL="1828800" algn="l" defTabSz="914400" rtl="0" eaLnBrk="1" latinLnBrk="0" hangingPunct="1">
+      <a:defRPr sz="1200" kern="1200">
+        <a:solidFill>
+          <a:schemeClr val="tx1"/>
+        </a:solidFill>
+        <a:latin typeface="+mn-lt"/>
+        <a:ea typeface="+mn-ea"/>
+        <a:cs typeface="+mn-cs"/>
+      </a:defRPr>
+    </a:lvl5pPr>
+    <a:lvl6pPr marL="2286000" algn="l" defTabSz="914400" rtl="0" eaLnBrk="1" latinLnBrk="0" hangingPunct="1">
+      <a:defRPr sz="1200" kern="1200">
+        <a:solidFill>
+          <a:schemeClr val="tx1"/>
+        </a:solidFill>
+        <a:latin typeface="+mn-lt"/>
+        <a:ea typeface="+mn-ea"/>
+        <a:cs typeface="+mn-cs"/>
+      </a:defRPr>
+    </a:lvl6pPr>
+    <a:lvl7pPr marL="2743200" algn="l" defTabSz="914400" rtl="0" eaLnBrk="1" latinLnBrk="0" hangingPunct="1">
+      <a:defRPr sz="1200" kern="1200">
+        <a:solidFill>
+          <a:schemeClr val="tx1"/>
+        </a:solidFill>
+        <a:latin typeface="+mn-lt"/>
+        <a:ea typeface="+mn-ea"/>
+        <a:cs typeface="+mn-cs"/>
+      </a:defRPr>
+    </a:lvl7pPr>
+    <a:lvl8pPr marL="3200400" algn="l" defTabSz="914400" rtl="0" eaLnBrk="1" latinLnBrk="0" hangingPunct="1">
+      <a:defRPr sz="1200" kern="1200">
+        <a:solidFill>
+          <a:schemeClr val="tx1"/>
+        </a:solidFill>
+        <a:latin typeface="+mn-lt"/>
+        <a:ea typeface="+mn-ea"/>
+        <a:cs typeface="+mn-cs"/>
+      </a:defRPr>
+    </a:lvl8pPr>
+    <a:lvl9pPr marL="3657600" algn="l" defTabSz="914400" rtl="0" eaLnBrk="1" latinLnBrk="0" hangingPunct="1">
+      <a:defRPr sz="1200" kern="1200">
+        <a:solidFill>
+          <a:schemeClr val="tx1"/>
+        </a:solidFill>
+        <a:latin typeface="+mn-lt"/>
+        <a:ea typeface="+mn-ea"/>
+        <a:cs typeface="+mn-cs"/>
+      </a:defRPr>
+    </a:lvl9pPr>
+  </p:notesStyle>
+</p:notesMaster>
+</file>
+
+<file path=ppt/notesSlides/notesSlide1.xml><?xml version="1.0" encoding="utf-8"?>
+<p:notes xmlns:a="http://schemas.openxmlformats.org/drawingml/2006/main" xmlns:r="http://schemas.openxmlformats.org/officeDocument/2006/relationships" xmlns:p="http://schemas.openxmlformats.org/presentationml/2006/main">
+  <p:cSld>
+    <p:spTree>
+      <p:nvGrpSpPr>
+        <p:cNvPr id="1" name=""/>
+        <p:cNvGrpSpPr/>
+        <p:nvPr/>
+      </p:nvGrpSpPr>
+      <p:grpSpPr>
+        <a:xfrm>
+          <a:off x="0" y="0"/>
+          <a:ext cx="0" cy="0"/>
+          <a:chOff x="0" y="0"/>
+          <a:chExt cx="0" cy="0"/>
+        </a:xfrm>
+      </p:grpSpPr>
+      <p:sp>
+        <p:nvSpPr>
+          <p:cNvPr id="2" name="Slide Image Placeholder 1"/>
+          <p:cNvSpPr>
+            <a:spLocks noGrp="1" noRot="1" noChangeAspect="1"/>
+          </p:cNvSpPr>
+          <p:nvPr>
+            <p:ph type="sldImg"/>
+          </p:nvPr>
+        </p:nvSpPr>
+        <p:spPr/>
+      </p:sp>
+      <p:sp>
+        <p:nvSpPr>
+          <p:cNvPr id="3" name="Notes Placeholder 2"/>
+          <p:cNvSpPr>
+            <a:spLocks noGrp="1"/>
+          </p:cNvSpPr>
+          <p:nvPr>
+            <p:ph type="body" idx="1"/>
+          </p:nvPr>
+        </p:nvSpPr>
+        <p:spPr/>
+        <p:txBody>
+          <a:bodyPr/>
+          <a:lstStyle/>
+          <a:p>
+            <a:endParaRPr lang="es-ES_tradnl"/>
+          </a:p>
+        </p:txBody>
+      </p:sp>
+      <p:sp>
+        <p:nvSpPr>
+          <p:cNvPr id="4" name="Slide Number Placeholder 3"/>
+          <p:cNvSpPr>
+            <a:spLocks noGrp="1"/>
+          </p:cNvSpPr>
+          <p:nvPr>
+            <p:ph type="sldNum" sz="quarter" idx="5"/>
+          </p:nvPr>
+        </p:nvSpPr>
+        <p:spPr/>
+        <p:txBody>
+          <a:bodyPr/>
+          <a:lstStyle/>
+          <a:p>
+            <a:fld id="{486CD419-2AC2-0C44-AAD7-69EAB9D87D10}" type="slidenum">
+              <a:rPr lang="es-ES_tradnl" smtClean="0"/>
+              <a:t>1</a:t>
+            </a:fld>
+            <a:endParaRPr lang="es-ES_tradnl"/>
+          </a:p>
+        </p:txBody>
+      </p:sp>
+    </p:spTree>
+    <p:extLst>
+      <p:ext uri="{BB962C8B-B14F-4D97-AF65-F5344CB8AC3E}">
+        <p14:creationId xmlns:p14="http://schemas.microsoft.com/office/powerpoint/2010/main" val="2605003253"/>
+      </p:ext>
+    </p:extLst>
+  </p:cSld>
+  <p:clrMapOvr>
+    <a:masterClrMapping/>
+  </p:clrMapOvr>
+</p:notes>
 </file>
 
 <file path=ppt/slideLayouts/slideLayout1.xml><?xml version="1.0" encoding="utf-8"?>
@@ -147,7 +1242,7 @@
         </p:nvSpPr>
         <p:spPr>
           <a:xfrm>
-            <a:off x="1524000" y="1122363"/>
+            <a:off x="1706880" y="1825303"/>
             <a:ext cx="9144000" cy="2012828"/>
           </a:xfrm>
           <a:noFill/>
@@ -199,7 +1294,7 @@
         </p:nvSpPr>
         <p:spPr>
           <a:xfrm>
-            <a:off x="1524000" y="3602038"/>
+            <a:off x="1706880" y="4022662"/>
             <a:ext cx="9144000" cy="977673"/>
           </a:xfrm>
           <a:noFill/>
@@ -241,28 +1336,73 @@
       </p:sp>
       <p:sp>
         <p:nvSpPr>
-          <p:cNvPr id="4" name="Date Placeholder 3">
-            <a:extLst>
-              <a:ext uri="{FF2B5EF4-FFF2-40B4-BE49-F238E27FC236}">
-                <a16:creationId xmlns:a16="http://schemas.microsoft.com/office/drawing/2014/main" id="{3951F4BD-3073-722F-7555-406DCDAB64B4}"/>
-              </a:ext>
-            </a:extLst>
-          </p:cNvPr>
-          <p:cNvSpPr>
-            <a:spLocks noGrp="1"/>
-          </p:cNvSpPr>
-          <p:nvPr>
-            <p:ph type="dt" sz="half" idx="10"/>
+          <p:cNvPr id="8" name="Footer Placeholder 7">
+            <a:extLst>
+              <a:ext uri="{FF2B5EF4-FFF2-40B4-BE49-F238E27FC236}">
+                <a16:creationId xmlns:a16="http://schemas.microsoft.com/office/drawing/2014/main" id="{CB524822-CB7B-FC7E-2404-82996A22850D}"/>
+              </a:ext>
+            </a:extLst>
+          </p:cNvPr>
+          <p:cNvSpPr>
+            <a:spLocks noGrp="1"/>
+          </p:cNvSpPr>
+          <p:nvPr>
+            <p:ph type="ftr" sz="quarter" idx="11"/>
           </p:nvPr>
         </p:nvSpPr>
         <p:spPr/>
         <p:txBody>
           <a:bodyPr/>
-          <a:lstStyle/>
-          <a:p>
-            <a:fld id="{78F871EA-4628-6F49-B2C4-1BB08EE8A530}" type="datetimeFigureOut">
+          <a:lstStyle>
+            <a:lvl1pPr>
+              <a:defRPr>
+                <a:solidFill>
+                  <a:schemeClr val="bg2"/>
+                </a:solidFill>
+              </a:defRPr>
+            </a:lvl1pPr>
+          </a:lstStyle>
+          <a:p>
+            <a:r>
+              <a:rPr lang="es-ES_tradnl"/>
+              <a:t>Ingenium</a:t>
+            </a:r>
+          </a:p>
+        </p:txBody>
+      </p:sp>
+      <p:sp>
+        <p:nvSpPr>
+          <p:cNvPr id="9" name="Slide Number Placeholder 8">
+            <a:extLst>
+              <a:ext uri="{FF2B5EF4-FFF2-40B4-BE49-F238E27FC236}">
+                <a16:creationId xmlns:a16="http://schemas.microsoft.com/office/drawing/2014/main" id="{608217A0-397B-107A-9CCE-651AC46B3160}"/>
+              </a:ext>
+            </a:extLst>
+          </p:cNvPr>
+          <p:cNvSpPr>
+            <a:spLocks noGrp="1"/>
+          </p:cNvSpPr>
+          <p:nvPr>
+            <p:ph type="sldNum" sz="quarter" idx="12"/>
+          </p:nvPr>
+        </p:nvSpPr>
+        <p:spPr/>
+        <p:txBody>
+          <a:bodyPr/>
+          <a:lstStyle>
+            <a:lvl1pPr>
+              <a:defRPr>
+                <a:solidFill>
+                  <a:schemeClr val="bg2"/>
+                </a:solidFill>
+              </a:defRPr>
+            </a:lvl1pPr>
+          </a:lstStyle>
+          <a:p>
+            <a:fld id="{6BB51704-6A52-C541-97EE-403D3BD20477}" type="slidenum">
               <a:rPr lang="es-ES_tradnl" smtClean="0"/>
-              <a:t>14/7/25</a:t>
+              <a:pPr/>
+              <a:t>‹#›</a:t>
             </a:fld>
             <a:endParaRPr lang="es-ES_tradnl"/>
           </a:p>
@@ -270,53 +1410,37 @@
       </p:sp>
       <p:sp>
         <p:nvSpPr>
-          <p:cNvPr id="5" name="Footer Placeholder 4">
-            <a:extLst>
-              <a:ext uri="{FF2B5EF4-FFF2-40B4-BE49-F238E27FC236}">
-                <a16:creationId xmlns:a16="http://schemas.microsoft.com/office/drawing/2014/main" id="{A04809B3-AC15-5574-1A77-3FB70953012B}"/>
-              </a:ext>
-            </a:extLst>
-          </p:cNvPr>
-          <p:cNvSpPr>
-            <a:spLocks noGrp="1"/>
-          </p:cNvSpPr>
-          <p:nvPr>
-            <p:ph type="ftr" sz="quarter" idx="11"/>
+          <p:cNvPr id="7" name="Date Placeholder 6">
+            <a:extLst>
+              <a:ext uri="{FF2B5EF4-FFF2-40B4-BE49-F238E27FC236}">
+                <a16:creationId xmlns:a16="http://schemas.microsoft.com/office/drawing/2014/main" id="{9F898758-5BC9-6838-2E0B-887AA6CB820D}"/>
+              </a:ext>
+            </a:extLst>
+          </p:cNvPr>
+          <p:cNvSpPr>
+            <a:spLocks noGrp="1"/>
+          </p:cNvSpPr>
+          <p:nvPr>
+            <p:ph type="dt" sz="half" idx="10"/>
           </p:nvPr>
         </p:nvSpPr>
         <p:spPr/>
         <p:txBody>
           <a:bodyPr/>
-          <a:lstStyle/>
-          <a:p>
-            <a:endParaRPr lang="es-ES_tradnl"/>
-          </a:p>
-        </p:txBody>
-      </p:sp>
-      <p:sp>
-        <p:nvSpPr>
-          <p:cNvPr id="6" name="Slide Number Placeholder 5">
-            <a:extLst>
-              <a:ext uri="{FF2B5EF4-FFF2-40B4-BE49-F238E27FC236}">
-                <a16:creationId xmlns:a16="http://schemas.microsoft.com/office/drawing/2014/main" id="{3285F335-6627-18A7-78E6-E3B3D2C21AD5}"/>
-              </a:ext>
-            </a:extLst>
-          </p:cNvPr>
-          <p:cNvSpPr>
-            <a:spLocks noGrp="1"/>
-          </p:cNvSpPr>
-          <p:nvPr>
-            <p:ph type="sldNum" sz="quarter" idx="12"/>
-          </p:nvPr>
-        </p:nvSpPr>
-        <p:spPr/>
-        <p:txBody>
-          <a:bodyPr/>
-          <a:lstStyle/>
-          <a:p>
-            <a:fld id="{6BB51704-6A52-C541-97EE-403D3BD20477}" type="slidenum">
-              <a:rPr lang="es-ES_tradnl" smtClean="0"/>
-              <a:t>‹#›</a:t>
+          <a:lstStyle>
+            <a:lvl1pPr>
+              <a:defRPr>
+                <a:solidFill>
+                  <a:schemeClr val="bg2"/>
+                </a:solidFill>
+              </a:defRPr>
+            </a:lvl1pPr>
+          </a:lstStyle>
+          <a:p>
+            <a:fld id="{73C353E2-1D1E-3C44-9059-74339D5B6573}" type="datetime1">
+              <a:rPr lang="en-US" smtClean="0"/>
+              <a:pPr/>
+              <a:t>7/15/25</a:t>
             </a:fld>
             <a:endParaRPr lang="es-ES_tradnl"/>
           </a:p>
@@ -460,9 +1584,9 @@
           <a:bodyPr/>
           <a:lstStyle/>
           <a:p>
-            <a:fld id="{78F871EA-4628-6F49-B2C4-1BB08EE8A530}" type="datetimeFigureOut">
-              <a:rPr lang="es-ES_tradnl" smtClean="0"/>
-              <a:t>14/7/25</a:t>
+            <a:fld id="{6311FD5F-8220-484F-8FE1-97EF4D1D9BCF}" type="datetime1">
+              <a:rPr lang="en-US" smtClean="0"/>
+              <a:t>7/15/25</a:t>
             </a:fld>
             <a:endParaRPr lang="es-ES_tradnl"/>
           </a:p>
@@ -489,7 +1613,10 @@
           <a:bodyPr/>
           <a:lstStyle/>
           <a:p>
-            <a:endParaRPr lang="es-ES_tradnl"/>
+            <a:r>
+              <a:rPr lang="es-ES_tradnl"/>
+              <a:t>Ingenium</a:t>
+            </a:r>
           </a:p>
         </p:txBody>
       </p:sp>
@@ -670,9 +1797,9 @@
           <a:bodyPr/>
           <a:lstStyle/>
           <a:p>
-            <a:fld id="{78F871EA-4628-6F49-B2C4-1BB08EE8A530}" type="datetimeFigureOut">
-              <a:rPr lang="es-ES_tradnl" smtClean="0"/>
-              <a:t>14/7/25</a:t>
+            <a:fld id="{489BEBC9-FEB9-504E-B566-1357E4CD628F}" type="datetime1">
+              <a:rPr lang="en-US" smtClean="0"/>
+              <a:t>7/15/25</a:t>
             </a:fld>
             <a:endParaRPr lang="es-ES_tradnl"/>
           </a:p>
@@ -699,7 +1826,10 @@
           <a:bodyPr/>
           <a:lstStyle/>
           <a:p>
-            <a:endParaRPr lang="es-ES_tradnl"/>
+            <a:r>
+              <a:rPr lang="es-ES_tradnl"/>
+              <a:t>Ingenium</a:t>
+            </a:r>
           </a:p>
         </p:txBody>
       </p:sp>
@@ -1039,7 +2169,7 @@
         </p:nvSpPr>
         <p:spPr>
           <a:xfrm>
-            <a:off x="214023" y="133006"/>
+            <a:off x="252000" y="252000"/>
             <a:ext cx="10515600" cy="974083"/>
           </a:xfrm>
           <a:noFill/>
@@ -1212,35 +2342,10 @@
           <a:bodyPr/>
           <a:lstStyle/>
           <a:p>
-            <a:fld id="{78F871EA-4628-6F49-B2C4-1BB08EE8A530}" type="datetimeFigureOut">
-              <a:rPr lang="es-ES_tradnl" smtClean="0"/>
-              <a:t>14/7/25</a:t>
+            <a:fld id="{9FCC52B0-1CA0-CC49-8AA2-0791B411A50A}" type="datetime1">
+              <a:rPr lang="en-US" smtClean="0"/>
+              <a:t>7/15/25</a:t>
             </a:fld>
-            <a:endParaRPr lang="es-ES_tradnl"/>
-          </a:p>
-        </p:txBody>
-      </p:sp>
-      <p:sp>
-        <p:nvSpPr>
-          <p:cNvPr id="5" name="Footer Placeholder 4">
-            <a:extLst>
-              <a:ext uri="{FF2B5EF4-FFF2-40B4-BE49-F238E27FC236}">
-                <a16:creationId xmlns:a16="http://schemas.microsoft.com/office/drawing/2014/main" id="{1B937E3B-D5AC-8C48-14A0-D4F79AE50388}"/>
-              </a:ext>
-            </a:extLst>
-          </p:cNvPr>
-          <p:cNvSpPr>
-            <a:spLocks noGrp="1"/>
-          </p:cNvSpPr>
-          <p:nvPr>
-            <p:ph type="ftr" sz="quarter" idx="11"/>
-          </p:nvPr>
-        </p:nvSpPr>
-        <p:spPr/>
-        <p:txBody>
-          <a:bodyPr/>
-          <a:lstStyle/>
-          <a:p>
             <a:endParaRPr lang="es-ES_tradnl"/>
           </a:p>
         </p:txBody>
@@ -1274,6 +2379,36 @@
           </a:p>
         </p:txBody>
       </p:sp>
+      <p:pic>
+        <p:nvPicPr>
+          <p:cNvPr id="13" name="Imagen 23">
+            <a:extLst>
+              <a:ext uri="{FF2B5EF4-FFF2-40B4-BE49-F238E27FC236}">
+                <a16:creationId xmlns:a16="http://schemas.microsoft.com/office/drawing/2014/main" id="{CDECAD2C-9B1C-3133-CA75-E50BAD194820}"/>
+              </a:ext>
+            </a:extLst>
+          </p:cNvPr>
+          <p:cNvPicPr>
+            <a:picLocks noChangeAspect="1"/>
+          </p:cNvPicPr>
+          <p:nvPr userDrawn="1"/>
+        </p:nvPicPr>
+        <p:blipFill>
+          <a:blip r:embed="rId4"/>
+          <a:stretch>
+            <a:fillRect/>
+          </a:stretch>
+        </p:blipFill>
+        <p:spPr>
+          <a:xfrm>
+            <a:off x="5433900" y="6291140"/>
+            <a:ext cx="1289138" cy="507480"/>
+          </a:xfrm>
+          <a:prstGeom prst="rect">
+            <a:avLst/>
+          </a:prstGeom>
+        </p:spPr>
+      </p:pic>
     </p:spTree>
     <p:extLst>
       <p:ext uri="{BB962C8B-B14F-4D97-AF65-F5344CB8AC3E}">
@@ -1488,9 +2623,9 @@
           <a:bodyPr/>
           <a:lstStyle/>
           <a:p>
-            <a:fld id="{78F871EA-4628-6F49-B2C4-1BB08EE8A530}" type="datetimeFigureOut">
-              <a:rPr lang="es-ES_tradnl" smtClean="0"/>
-              <a:t>14/7/25</a:t>
+            <a:fld id="{7DE9EE8B-7C09-8C47-892B-975968B0F5B5}" type="datetime1">
+              <a:rPr lang="en-US" smtClean="0"/>
+              <a:t>7/15/25</a:t>
             </a:fld>
             <a:endParaRPr lang="es-ES_tradnl"/>
           </a:p>
@@ -1517,7 +2652,10 @@
           <a:bodyPr/>
           <a:lstStyle/>
           <a:p>
-            <a:endParaRPr lang="es-ES_tradnl"/>
+            <a:r>
+              <a:rPr lang="es-ES_tradnl"/>
+              <a:t>Ingenium</a:t>
+            </a:r>
           </a:p>
         </p:txBody>
       </p:sp>
@@ -1756,9 +2894,9 @@
           <a:bodyPr/>
           <a:lstStyle/>
           <a:p>
-            <a:fld id="{78F871EA-4628-6F49-B2C4-1BB08EE8A530}" type="datetimeFigureOut">
-              <a:rPr lang="es-ES_tradnl" smtClean="0"/>
-              <a:t>14/7/25</a:t>
+            <a:fld id="{55B35E63-3BB5-6340-B652-8FF2B862E200}" type="datetime1">
+              <a:rPr lang="en-US" smtClean="0"/>
+              <a:t>7/15/25</a:t>
             </a:fld>
             <a:endParaRPr lang="es-ES_tradnl"/>
           </a:p>
@@ -1785,7 +2923,10 @@
           <a:bodyPr/>
           <a:lstStyle/>
           <a:p>
-            <a:endParaRPr lang="es-ES_tradnl"/>
+            <a:r>
+              <a:rPr lang="es-ES_tradnl"/>
+              <a:t>Ingenium</a:t>
+            </a:r>
           </a:p>
         </p:txBody>
       </p:sp>
@@ -2171,9 +3312,9 @@
           <a:bodyPr/>
           <a:lstStyle/>
           <a:p>
-            <a:fld id="{78F871EA-4628-6F49-B2C4-1BB08EE8A530}" type="datetimeFigureOut">
-              <a:rPr lang="es-ES_tradnl" smtClean="0"/>
-              <a:t>14/7/25</a:t>
+            <a:fld id="{7C2C25E1-83D0-E44F-8B77-CFA20DBDB1F0}" type="datetime1">
+              <a:rPr lang="en-US" smtClean="0"/>
+              <a:t>7/15/25</a:t>
             </a:fld>
             <a:endParaRPr lang="es-ES_tradnl"/>
           </a:p>
@@ -2200,7 +3341,10 @@
           <a:bodyPr/>
           <a:lstStyle/>
           <a:p>
-            <a:endParaRPr lang="es-ES_tradnl"/>
+            <a:r>
+              <a:rPr lang="es-ES_tradnl"/>
+              <a:t>Ingenium</a:t>
+            </a:r>
           </a:p>
         </p:txBody>
       </p:sp>
@@ -2313,9 +3457,9 @@
           <a:bodyPr/>
           <a:lstStyle/>
           <a:p>
-            <a:fld id="{78F871EA-4628-6F49-B2C4-1BB08EE8A530}" type="datetimeFigureOut">
-              <a:rPr lang="es-ES_tradnl" smtClean="0"/>
-              <a:t>14/7/25</a:t>
+            <a:fld id="{B13B741B-CC31-8B4B-87CF-C0232A8C809B}" type="datetime1">
+              <a:rPr lang="en-US" smtClean="0"/>
+              <a:t>7/15/25</a:t>
             </a:fld>
             <a:endParaRPr lang="es-ES_tradnl"/>
           </a:p>
@@ -2342,7 +3486,10 @@
           <a:bodyPr/>
           <a:lstStyle/>
           <a:p>
-            <a:endParaRPr lang="es-ES_tradnl"/>
+            <a:r>
+              <a:rPr lang="es-ES_tradnl"/>
+              <a:t>Ingenium</a:t>
+            </a:r>
           </a:p>
         </p:txBody>
       </p:sp>
@@ -2426,9 +3573,9 @@
           <a:bodyPr/>
           <a:lstStyle/>
           <a:p>
-            <a:fld id="{78F871EA-4628-6F49-B2C4-1BB08EE8A530}" type="datetimeFigureOut">
-              <a:rPr lang="es-ES_tradnl" smtClean="0"/>
-              <a:t>14/7/25</a:t>
+            <a:fld id="{328FC45B-9B0C-C741-BCEB-14BFB2F0F7DF}" type="datetime1">
+              <a:rPr lang="en-US" smtClean="0"/>
+              <a:t>7/15/25</a:t>
             </a:fld>
             <a:endParaRPr lang="es-ES_tradnl"/>
           </a:p>
@@ -2455,7 +3602,10 @@
           <a:bodyPr/>
           <a:lstStyle/>
           <a:p>
-            <a:endParaRPr lang="es-ES_tradnl"/>
+            <a:r>
+              <a:rPr lang="es-ES_tradnl"/>
+              <a:t>Ingenium</a:t>
+            </a:r>
           </a:p>
         </p:txBody>
       </p:sp>
@@ -2795,7 +3945,7 @@
         </p:nvSpPr>
         <p:spPr>
           <a:xfrm>
-            <a:off x="839788" y="986368"/>
+            <a:off x="252000" y="252000"/>
             <a:ext cx="3932237" cy="1071032"/>
           </a:xfrm>
         </p:spPr>
@@ -2844,10 +3994,10 @@
         <p:txBody>
           <a:bodyPr/>
           <a:lstStyle>
-            <a:lvl1pPr>
+            <a:lvl1pPr marL="180000" indent="-180000">
               <a:defRPr sz="3200"/>
             </a:lvl1pPr>
-            <a:lvl2pPr>
+            <a:lvl2pPr indent="-180000">
               <a:defRPr sz="2800"/>
             </a:lvl2pPr>
             <a:lvl3pPr>
@@ -2875,36 +4025,265 @@
           <a:p>
             <a:pPr lvl="0"/>
             <a:r>
+              <a:rPr lang="en-US" dirty="0"/>
+              <a:t>Click to edit Master text styles</a:t>
+            </a:r>
+          </a:p>
+          <a:p>
+            <a:pPr lvl="1"/>
+            <a:r>
+              <a:rPr lang="en-US" dirty="0"/>
+              <a:t>Second level</a:t>
+            </a:r>
+          </a:p>
+          <a:p>
+            <a:pPr lvl="2"/>
+            <a:r>
+              <a:rPr lang="en-US" dirty="0"/>
+              <a:t>Third level</a:t>
+            </a:r>
+          </a:p>
+          <a:p>
+            <a:pPr lvl="3"/>
+            <a:r>
+              <a:rPr lang="en-US" dirty="0"/>
+              <a:t>Fourth level</a:t>
+            </a:r>
+          </a:p>
+          <a:p>
+            <a:pPr lvl="4"/>
+            <a:r>
+              <a:rPr lang="en-US" dirty="0"/>
+              <a:t>Fifth level</a:t>
+            </a:r>
+            <a:endParaRPr lang="es-ES_tradnl" dirty="0"/>
+          </a:p>
+        </p:txBody>
+      </p:sp>
+      <p:sp>
+        <p:nvSpPr>
+          <p:cNvPr id="4" name="Text Placeholder 3">
+            <a:extLst>
+              <a:ext uri="{FF2B5EF4-FFF2-40B4-BE49-F238E27FC236}">
+                <a16:creationId xmlns:a16="http://schemas.microsoft.com/office/drawing/2014/main" id="{A0EFBCDC-7E46-621F-9F5A-2A69DFAE8852}"/>
+              </a:ext>
+            </a:extLst>
+          </p:cNvPr>
+          <p:cNvSpPr>
+            <a:spLocks noGrp="1"/>
+          </p:cNvSpPr>
+          <p:nvPr>
+            <p:ph type="body" sz="half" idx="2"/>
+          </p:nvPr>
+        </p:nvSpPr>
+        <p:spPr>
+          <a:xfrm>
+            <a:off x="839788" y="2057400"/>
+            <a:ext cx="3932237" cy="3811588"/>
+          </a:xfrm>
+        </p:spPr>
+        <p:txBody>
+          <a:bodyPr>
+            <a:normAutofit/>
+          </a:bodyPr>
+          <a:lstStyle>
+            <a:lvl1pPr marL="0" indent="0">
+              <a:buNone/>
+              <a:defRPr sz="2400"/>
+            </a:lvl1pPr>
+            <a:lvl2pPr marL="457200" indent="0">
+              <a:buNone/>
+              <a:defRPr sz="1400"/>
+            </a:lvl2pPr>
+            <a:lvl3pPr marL="914400" indent="0">
+              <a:buNone/>
+              <a:defRPr sz="1200"/>
+            </a:lvl3pPr>
+            <a:lvl4pPr marL="1371600" indent="0">
+              <a:buNone/>
+              <a:defRPr sz="1000"/>
+            </a:lvl4pPr>
+            <a:lvl5pPr marL="1828800" indent="0">
+              <a:buNone/>
+              <a:defRPr sz="1000"/>
+            </a:lvl5pPr>
+            <a:lvl6pPr marL="2286000" indent="0">
+              <a:buNone/>
+              <a:defRPr sz="1000"/>
+            </a:lvl6pPr>
+            <a:lvl7pPr marL="2743200" indent="0">
+              <a:buNone/>
+              <a:defRPr sz="1000"/>
+            </a:lvl7pPr>
+            <a:lvl8pPr marL="3200400" indent="0">
+              <a:buNone/>
+              <a:defRPr sz="1000"/>
+            </a:lvl8pPr>
+            <a:lvl9pPr marL="3657600" indent="0">
+              <a:buNone/>
+              <a:defRPr sz="1000"/>
+            </a:lvl9pPr>
+          </a:lstStyle>
+          <a:p>
+            <a:pPr lvl="0"/>
+            <a:r>
+              <a:rPr lang="en-US" dirty="0"/>
+              <a:t>Click to edit Master text styles</a:t>
+            </a:r>
+          </a:p>
+        </p:txBody>
+      </p:sp>
+      <p:pic>
+        <p:nvPicPr>
+          <p:cNvPr id="14" name="Imagen 23">
+            <a:extLst>
+              <a:ext uri="{FF2B5EF4-FFF2-40B4-BE49-F238E27FC236}">
+                <a16:creationId xmlns:a16="http://schemas.microsoft.com/office/drawing/2014/main" id="{E20550B4-0769-0D89-3F88-3A767EAC599E}"/>
+              </a:ext>
+            </a:extLst>
+          </p:cNvPr>
+          <p:cNvPicPr>
+            <a:picLocks noChangeAspect="1"/>
+          </p:cNvPicPr>
+          <p:nvPr userDrawn="1"/>
+        </p:nvPicPr>
+        <p:blipFill>
+          <a:blip r:embed="rId4"/>
+          <a:stretch>
+            <a:fillRect/>
+          </a:stretch>
+        </p:blipFill>
+        <p:spPr>
+          <a:xfrm>
+            <a:off x="5433900" y="6291140"/>
+            <a:ext cx="1289138" cy="507480"/>
+          </a:xfrm>
+          <a:prstGeom prst="rect">
+            <a:avLst/>
+          </a:prstGeom>
+        </p:spPr>
+      </p:pic>
+      <p:sp>
+        <p:nvSpPr>
+          <p:cNvPr id="15" name="Date Placeholder 14">
+            <a:extLst>
+              <a:ext uri="{FF2B5EF4-FFF2-40B4-BE49-F238E27FC236}">
+                <a16:creationId xmlns:a16="http://schemas.microsoft.com/office/drawing/2014/main" id="{3B354B9C-3CAE-C62A-599D-822460398899}"/>
+              </a:ext>
+            </a:extLst>
+          </p:cNvPr>
+          <p:cNvSpPr>
+            <a:spLocks noGrp="1"/>
+          </p:cNvSpPr>
+          <p:nvPr>
+            <p:ph type="dt" sz="half" idx="10"/>
+          </p:nvPr>
+        </p:nvSpPr>
+        <p:spPr/>
+        <p:txBody>
+          <a:bodyPr/>
+          <a:lstStyle/>
+          <a:p>
+            <a:fld id="{952BCF4F-7298-CE4F-9A29-326243368105}" type="datetime1">
+              <a:rPr lang="en-US" smtClean="0"/>
+              <a:t>7/15/25</a:t>
+            </a:fld>
+            <a:endParaRPr lang="es-ES_tradnl"/>
+          </a:p>
+        </p:txBody>
+      </p:sp>
+      <p:sp>
+        <p:nvSpPr>
+          <p:cNvPr id="17" name="Slide Number Placeholder 16">
+            <a:extLst>
+              <a:ext uri="{FF2B5EF4-FFF2-40B4-BE49-F238E27FC236}">
+                <a16:creationId xmlns:a16="http://schemas.microsoft.com/office/drawing/2014/main" id="{E501D1DD-1FF5-FD76-E030-4C75B8BA53EE}"/>
+              </a:ext>
+            </a:extLst>
+          </p:cNvPr>
+          <p:cNvSpPr>
+            <a:spLocks noGrp="1"/>
+          </p:cNvSpPr>
+          <p:nvPr>
+            <p:ph type="sldNum" sz="quarter" idx="12"/>
+          </p:nvPr>
+        </p:nvSpPr>
+        <p:spPr/>
+        <p:txBody>
+          <a:bodyPr/>
+          <a:lstStyle/>
+          <a:p>
+            <a:fld id="{6BB51704-6A52-C541-97EE-403D3BD20477}" type="slidenum">
+              <a:rPr lang="es-ES_tradnl" smtClean="0"/>
+              <a:t>‹#›</a:t>
+            </a:fld>
+            <a:endParaRPr lang="es-ES_tradnl"/>
+          </a:p>
+        </p:txBody>
+      </p:sp>
+    </p:spTree>
+    <p:extLst>
+      <p:ext uri="{BB962C8B-B14F-4D97-AF65-F5344CB8AC3E}">
+        <p14:creationId xmlns:p14="http://schemas.microsoft.com/office/powerpoint/2010/main" val="1051143862"/>
+      </p:ext>
+    </p:extLst>
+  </p:cSld>
+  <p:clrMapOvr>
+    <a:masterClrMapping/>
+  </p:clrMapOvr>
+</p:sldLayout>
+</file>
+
+<file path=ppt/slideLayouts/slideLayout9.xml><?xml version="1.0" encoding="utf-8"?>
+<p:sldLayout xmlns:a="http://schemas.openxmlformats.org/drawingml/2006/main" xmlns:r="http://schemas.openxmlformats.org/officeDocument/2006/relationships" xmlns:p="http://schemas.openxmlformats.org/presentationml/2006/main" type="picTx" preserve="1">
+  <p:cSld name="Picture with Caption">
+    <p:spTree>
+      <p:nvGrpSpPr>
+        <p:cNvPr id="1" name=""/>
+        <p:cNvGrpSpPr/>
+        <p:nvPr/>
+      </p:nvGrpSpPr>
+      <p:grpSpPr>
+        <a:xfrm>
+          <a:off x="0" y="0"/>
+          <a:ext cx="0" cy="0"/>
+          <a:chOff x="0" y="0"/>
+          <a:chExt cx="0" cy="0"/>
+        </a:xfrm>
+      </p:grpSpPr>
+      <p:sp>
+        <p:nvSpPr>
+          <p:cNvPr id="2" name="Title 1">
+            <a:extLst>
+              <a:ext uri="{FF2B5EF4-FFF2-40B4-BE49-F238E27FC236}">
+                <a16:creationId xmlns:a16="http://schemas.microsoft.com/office/drawing/2014/main" id="{F51CFB06-1590-EABA-346D-C19B7022F192}"/>
+              </a:ext>
+            </a:extLst>
+          </p:cNvPr>
+          <p:cNvSpPr>
+            <a:spLocks noGrp="1"/>
+          </p:cNvSpPr>
+          <p:nvPr>
+            <p:ph type="title"/>
+          </p:nvPr>
+        </p:nvSpPr>
+        <p:spPr>
+          <a:xfrm>
+            <a:off x="839788" y="457200"/>
+            <a:ext cx="3932237" cy="1600200"/>
+          </a:xfrm>
+        </p:spPr>
+        <p:txBody>
+          <a:bodyPr anchor="b"/>
+          <a:lstStyle>
+            <a:lvl1pPr>
+              <a:defRPr sz="3200"/>
+            </a:lvl1pPr>
+          </a:lstStyle>
+          <a:p>
+            <a:r>
               <a:rPr lang="en-US"/>
-              <a:t>Click to edit Master text styles</a:t>
-            </a:r>
-          </a:p>
-          <a:p>
-            <a:pPr lvl="1"/>
-            <a:r>
-              <a:rPr lang="en-US"/>
-              <a:t>Second level</a:t>
-            </a:r>
-          </a:p>
-          <a:p>
-            <a:pPr lvl="2"/>
-            <a:r>
-              <a:rPr lang="en-US"/>
-              <a:t>Third level</a:t>
-            </a:r>
-          </a:p>
-          <a:p>
-            <a:pPr lvl="3"/>
-            <a:r>
-              <a:rPr lang="en-US"/>
-              <a:t>Fourth level</a:t>
-            </a:r>
-          </a:p>
-          <a:p>
-            <a:pPr lvl="4"/>
-            <a:r>
-              <a:rPr lang="en-US"/>
-              <a:t>Fifth level</a:t>
+              <a:t>Click to edit Master title style</a:t>
             </a:r>
             <a:endParaRPr lang="es-ES_tradnl"/>
           </a:p>
@@ -2912,10 +4291,77 @@
       </p:sp>
       <p:sp>
         <p:nvSpPr>
+          <p:cNvPr id="3" name="Picture Placeholder 2">
+            <a:extLst>
+              <a:ext uri="{FF2B5EF4-FFF2-40B4-BE49-F238E27FC236}">
+                <a16:creationId xmlns:a16="http://schemas.microsoft.com/office/drawing/2014/main" id="{CF57DD5E-86A0-8334-4084-EE8FAE57C554}"/>
+              </a:ext>
+            </a:extLst>
+          </p:cNvPr>
+          <p:cNvSpPr>
+            <a:spLocks noGrp="1"/>
+          </p:cNvSpPr>
+          <p:nvPr>
+            <p:ph type="pic" idx="1"/>
+          </p:nvPr>
+        </p:nvSpPr>
+        <p:spPr>
+          <a:xfrm>
+            <a:off x="5183188" y="987425"/>
+            <a:ext cx="6172200" cy="4873625"/>
+          </a:xfrm>
+        </p:spPr>
+        <p:txBody>
+          <a:bodyPr/>
+          <a:lstStyle>
+            <a:lvl1pPr marL="0" indent="0">
+              <a:buNone/>
+              <a:defRPr sz="3200"/>
+            </a:lvl1pPr>
+            <a:lvl2pPr marL="457200" indent="0">
+              <a:buNone/>
+              <a:defRPr sz="2800"/>
+            </a:lvl2pPr>
+            <a:lvl3pPr marL="914400" indent="0">
+              <a:buNone/>
+              <a:defRPr sz="2400"/>
+            </a:lvl3pPr>
+            <a:lvl4pPr marL="1371600" indent="0">
+              <a:buNone/>
+              <a:defRPr sz="2000"/>
+            </a:lvl4pPr>
+            <a:lvl5pPr marL="1828800" indent="0">
+              <a:buNone/>
+              <a:defRPr sz="2000"/>
+            </a:lvl5pPr>
+            <a:lvl6pPr marL="2286000" indent="0">
+              <a:buNone/>
+              <a:defRPr sz="2000"/>
+            </a:lvl6pPr>
+            <a:lvl7pPr marL="2743200" indent="0">
+              <a:buNone/>
+              <a:defRPr sz="2000"/>
+            </a:lvl7pPr>
+            <a:lvl8pPr marL="3200400" indent="0">
+              <a:buNone/>
+              <a:defRPr sz="2000"/>
+            </a:lvl8pPr>
+            <a:lvl9pPr marL="3657600" indent="0">
+              <a:buNone/>
+              <a:defRPr sz="2000"/>
+            </a:lvl9pPr>
+          </a:lstStyle>
+          <a:p>
+            <a:endParaRPr lang="es-ES_tradnl"/>
+          </a:p>
+        </p:txBody>
+      </p:sp>
+      <p:sp>
+        <p:nvSpPr>
           <p:cNvPr id="4" name="Text Placeholder 3">
             <a:extLst>
               <a:ext uri="{FF2B5EF4-FFF2-40B4-BE49-F238E27FC236}">
-                <a16:creationId xmlns:a16="http://schemas.microsoft.com/office/drawing/2014/main" id="{A0EFBCDC-7E46-621F-9F5A-2A69DFAE8852}"/>
+                <a16:creationId xmlns:a16="http://schemas.microsoft.com/office/drawing/2014/main" id="{9F4C0217-54FB-50B9-4DFA-BBAB0F5BE1FB}"/>
               </a:ext>
             </a:extLst>
           </p:cNvPr>
@@ -2986,7 +4432,7 @@
           <p:cNvPr id="5" name="Date Placeholder 4">
             <a:extLst>
               <a:ext uri="{FF2B5EF4-FFF2-40B4-BE49-F238E27FC236}">
-                <a16:creationId xmlns:a16="http://schemas.microsoft.com/office/drawing/2014/main" id="{A4A7EABD-2894-EDD0-1582-FFB5CE9E1174}"/>
+                <a16:creationId xmlns:a16="http://schemas.microsoft.com/office/drawing/2014/main" id="{C0524B1F-5A68-DD21-F100-929234EB7E31}"/>
               </a:ext>
             </a:extLst>
           </p:cNvPr>
@@ -3002,9 +4448,9 @@
           <a:bodyPr/>
           <a:lstStyle/>
           <a:p>
-            <a:fld id="{78F871EA-4628-6F49-B2C4-1BB08EE8A530}" type="datetimeFigureOut">
-              <a:rPr lang="es-ES_tradnl" smtClean="0"/>
-              <a:t>14/7/25</a:t>
+            <a:fld id="{05CBDC18-5EBE-234A-8DA8-10A3C0217C06}" type="datetime1">
+              <a:rPr lang="en-US" smtClean="0"/>
+              <a:t>7/15/25</a:t>
             </a:fld>
             <a:endParaRPr lang="es-ES_tradnl"/>
           </a:p>
@@ -3015,7 +4461,7 @@
           <p:cNvPr id="6" name="Footer Placeholder 5">
             <a:extLst>
               <a:ext uri="{FF2B5EF4-FFF2-40B4-BE49-F238E27FC236}">
-                <a16:creationId xmlns:a16="http://schemas.microsoft.com/office/drawing/2014/main" id="{8182BCA0-0CCB-7785-4554-6E5DE20D6B0C}"/>
+                <a16:creationId xmlns:a16="http://schemas.microsoft.com/office/drawing/2014/main" id="{B819EEE5-E5F1-ADCF-39E5-03412A9E62FA}"/>
               </a:ext>
             </a:extLst>
           </p:cNvPr>
@@ -3031,296 +4477,10 @@
           <a:bodyPr/>
           <a:lstStyle/>
           <a:p>
-            <a:endParaRPr lang="es-ES_tradnl"/>
-          </a:p>
-        </p:txBody>
-      </p:sp>
-      <p:sp>
-        <p:nvSpPr>
-          <p:cNvPr id="7" name="Slide Number Placeholder 6">
-            <a:extLst>
-              <a:ext uri="{FF2B5EF4-FFF2-40B4-BE49-F238E27FC236}">
-                <a16:creationId xmlns:a16="http://schemas.microsoft.com/office/drawing/2014/main" id="{A33EBBDC-188D-4C5F-1B7B-7724CF7359FE}"/>
-              </a:ext>
-            </a:extLst>
-          </p:cNvPr>
-          <p:cNvSpPr>
-            <a:spLocks noGrp="1"/>
-          </p:cNvSpPr>
-          <p:nvPr>
-            <p:ph type="sldNum" sz="quarter" idx="12"/>
-          </p:nvPr>
-        </p:nvSpPr>
-        <p:spPr/>
-        <p:txBody>
-          <a:bodyPr/>
-          <a:lstStyle/>
-          <a:p>
-            <a:fld id="{6BB51704-6A52-C541-97EE-403D3BD20477}" type="slidenum">
-              <a:rPr lang="es-ES_tradnl" smtClean="0"/>
-              <a:t>‹#›</a:t>
-            </a:fld>
-            <a:endParaRPr lang="es-ES_tradnl"/>
-          </a:p>
-        </p:txBody>
-      </p:sp>
-    </p:spTree>
-    <p:extLst>
-      <p:ext uri="{BB962C8B-B14F-4D97-AF65-F5344CB8AC3E}">
-        <p14:creationId xmlns:p14="http://schemas.microsoft.com/office/powerpoint/2010/main" val="1051143862"/>
-      </p:ext>
-    </p:extLst>
-  </p:cSld>
-  <p:clrMapOvr>
-    <a:masterClrMapping/>
-  </p:clrMapOvr>
-</p:sldLayout>
-</file>
-
-<file path=ppt/slideLayouts/slideLayout9.xml><?xml version="1.0" encoding="utf-8"?>
-<p:sldLayout xmlns:a="http://schemas.openxmlformats.org/drawingml/2006/main" xmlns:r="http://schemas.openxmlformats.org/officeDocument/2006/relationships" xmlns:p="http://schemas.openxmlformats.org/presentationml/2006/main" type="picTx" preserve="1">
-  <p:cSld name="Picture with Caption">
-    <p:spTree>
-      <p:nvGrpSpPr>
-        <p:cNvPr id="1" name=""/>
-        <p:cNvGrpSpPr/>
-        <p:nvPr/>
-      </p:nvGrpSpPr>
-      <p:grpSpPr>
-        <a:xfrm>
-          <a:off x="0" y="0"/>
-          <a:ext cx="0" cy="0"/>
-          <a:chOff x="0" y="0"/>
-          <a:chExt cx="0" cy="0"/>
-        </a:xfrm>
-      </p:grpSpPr>
-      <p:sp>
-        <p:nvSpPr>
-          <p:cNvPr id="2" name="Title 1">
-            <a:extLst>
-              <a:ext uri="{FF2B5EF4-FFF2-40B4-BE49-F238E27FC236}">
-                <a16:creationId xmlns:a16="http://schemas.microsoft.com/office/drawing/2014/main" id="{F51CFB06-1590-EABA-346D-C19B7022F192}"/>
-              </a:ext>
-            </a:extLst>
-          </p:cNvPr>
-          <p:cNvSpPr>
-            <a:spLocks noGrp="1"/>
-          </p:cNvSpPr>
-          <p:nvPr>
-            <p:ph type="title"/>
-          </p:nvPr>
-        </p:nvSpPr>
-        <p:spPr>
-          <a:xfrm>
-            <a:off x="839788" y="457200"/>
-            <a:ext cx="3932237" cy="1600200"/>
-          </a:xfrm>
-        </p:spPr>
-        <p:txBody>
-          <a:bodyPr anchor="b"/>
-          <a:lstStyle>
-            <a:lvl1pPr>
-              <a:defRPr sz="3200"/>
-            </a:lvl1pPr>
-          </a:lstStyle>
-          <a:p>
-            <a:r>
-              <a:rPr lang="en-US"/>
-              <a:t>Click to edit Master title style</a:t>
-            </a:r>
-            <a:endParaRPr lang="es-ES_tradnl"/>
-          </a:p>
-        </p:txBody>
-      </p:sp>
-      <p:sp>
-        <p:nvSpPr>
-          <p:cNvPr id="3" name="Picture Placeholder 2">
-            <a:extLst>
-              <a:ext uri="{FF2B5EF4-FFF2-40B4-BE49-F238E27FC236}">
-                <a16:creationId xmlns:a16="http://schemas.microsoft.com/office/drawing/2014/main" id="{CF57DD5E-86A0-8334-4084-EE8FAE57C554}"/>
-              </a:ext>
-            </a:extLst>
-          </p:cNvPr>
-          <p:cNvSpPr>
-            <a:spLocks noGrp="1"/>
-          </p:cNvSpPr>
-          <p:nvPr>
-            <p:ph type="pic" idx="1"/>
-          </p:nvPr>
-        </p:nvSpPr>
-        <p:spPr>
-          <a:xfrm>
-            <a:off x="5183188" y="987425"/>
-            <a:ext cx="6172200" cy="4873625"/>
-          </a:xfrm>
-        </p:spPr>
-        <p:txBody>
-          <a:bodyPr/>
-          <a:lstStyle>
-            <a:lvl1pPr marL="0" indent="0">
-              <a:buNone/>
-              <a:defRPr sz="3200"/>
-            </a:lvl1pPr>
-            <a:lvl2pPr marL="457200" indent="0">
-              <a:buNone/>
-              <a:defRPr sz="2800"/>
-            </a:lvl2pPr>
-            <a:lvl3pPr marL="914400" indent="0">
-              <a:buNone/>
-              <a:defRPr sz="2400"/>
-            </a:lvl3pPr>
-            <a:lvl4pPr marL="1371600" indent="0">
-              <a:buNone/>
-              <a:defRPr sz="2000"/>
-            </a:lvl4pPr>
-            <a:lvl5pPr marL="1828800" indent="0">
-              <a:buNone/>
-              <a:defRPr sz="2000"/>
-            </a:lvl5pPr>
-            <a:lvl6pPr marL="2286000" indent="0">
-              <a:buNone/>
-              <a:defRPr sz="2000"/>
-            </a:lvl6pPr>
-            <a:lvl7pPr marL="2743200" indent="0">
-              <a:buNone/>
-              <a:defRPr sz="2000"/>
-            </a:lvl7pPr>
-            <a:lvl8pPr marL="3200400" indent="0">
-              <a:buNone/>
-              <a:defRPr sz="2000"/>
-            </a:lvl8pPr>
-            <a:lvl9pPr marL="3657600" indent="0">
-              <a:buNone/>
-              <a:defRPr sz="2000"/>
-            </a:lvl9pPr>
-          </a:lstStyle>
-          <a:p>
-            <a:endParaRPr lang="es-ES_tradnl"/>
-          </a:p>
-        </p:txBody>
-      </p:sp>
-      <p:sp>
-        <p:nvSpPr>
-          <p:cNvPr id="4" name="Text Placeholder 3">
-            <a:extLst>
-              <a:ext uri="{FF2B5EF4-FFF2-40B4-BE49-F238E27FC236}">
-                <a16:creationId xmlns:a16="http://schemas.microsoft.com/office/drawing/2014/main" id="{9F4C0217-54FB-50B9-4DFA-BBAB0F5BE1FB}"/>
-              </a:ext>
-            </a:extLst>
-          </p:cNvPr>
-          <p:cNvSpPr>
-            <a:spLocks noGrp="1"/>
-          </p:cNvSpPr>
-          <p:nvPr>
-            <p:ph type="body" sz="half" idx="2"/>
-          </p:nvPr>
-        </p:nvSpPr>
-        <p:spPr>
-          <a:xfrm>
-            <a:off x="839788" y="2057400"/>
-            <a:ext cx="3932237" cy="3811588"/>
-          </a:xfrm>
-        </p:spPr>
-        <p:txBody>
-          <a:bodyPr/>
-          <a:lstStyle>
-            <a:lvl1pPr marL="0" indent="0">
-              <a:buNone/>
-              <a:defRPr sz="1600"/>
-            </a:lvl1pPr>
-            <a:lvl2pPr marL="457200" indent="0">
-              <a:buNone/>
-              <a:defRPr sz="1400"/>
-            </a:lvl2pPr>
-            <a:lvl3pPr marL="914400" indent="0">
-              <a:buNone/>
-              <a:defRPr sz="1200"/>
-            </a:lvl3pPr>
-            <a:lvl4pPr marL="1371600" indent="0">
-              <a:buNone/>
-              <a:defRPr sz="1000"/>
-            </a:lvl4pPr>
-            <a:lvl5pPr marL="1828800" indent="0">
-              <a:buNone/>
-              <a:defRPr sz="1000"/>
-            </a:lvl5pPr>
-            <a:lvl6pPr marL="2286000" indent="0">
-              <a:buNone/>
-              <a:defRPr sz="1000"/>
-            </a:lvl6pPr>
-            <a:lvl7pPr marL="2743200" indent="0">
-              <a:buNone/>
-              <a:defRPr sz="1000"/>
-            </a:lvl7pPr>
-            <a:lvl8pPr marL="3200400" indent="0">
-              <a:buNone/>
-              <a:defRPr sz="1000"/>
-            </a:lvl8pPr>
-            <a:lvl9pPr marL="3657600" indent="0">
-              <a:buNone/>
-              <a:defRPr sz="1000"/>
-            </a:lvl9pPr>
-          </a:lstStyle>
-          <a:p>
-            <a:pPr lvl="0"/>
-            <a:r>
-              <a:rPr lang="en-US"/>
-              <a:t>Click to edit Master text styles</a:t>
-            </a:r>
-          </a:p>
-        </p:txBody>
-      </p:sp>
-      <p:sp>
-        <p:nvSpPr>
-          <p:cNvPr id="5" name="Date Placeholder 4">
-            <a:extLst>
-              <a:ext uri="{FF2B5EF4-FFF2-40B4-BE49-F238E27FC236}">
-                <a16:creationId xmlns:a16="http://schemas.microsoft.com/office/drawing/2014/main" id="{C0524B1F-5A68-DD21-F100-929234EB7E31}"/>
-              </a:ext>
-            </a:extLst>
-          </p:cNvPr>
-          <p:cNvSpPr>
-            <a:spLocks noGrp="1"/>
-          </p:cNvSpPr>
-          <p:nvPr>
-            <p:ph type="dt" sz="half" idx="10"/>
-          </p:nvPr>
-        </p:nvSpPr>
-        <p:spPr/>
-        <p:txBody>
-          <a:bodyPr/>
-          <a:lstStyle/>
-          <a:p>
-            <a:fld id="{78F871EA-4628-6F49-B2C4-1BB08EE8A530}" type="datetimeFigureOut">
-              <a:rPr lang="es-ES_tradnl" smtClean="0"/>
-              <a:t>14/7/25</a:t>
-            </a:fld>
-            <a:endParaRPr lang="es-ES_tradnl"/>
-          </a:p>
-        </p:txBody>
-      </p:sp>
-      <p:sp>
-        <p:nvSpPr>
-          <p:cNvPr id="6" name="Footer Placeholder 5">
-            <a:extLst>
-              <a:ext uri="{FF2B5EF4-FFF2-40B4-BE49-F238E27FC236}">
-                <a16:creationId xmlns:a16="http://schemas.microsoft.com/office/drawing/2014/main" id="{B819EEE5-E5F1-ADCF-39E5-03412A9E62FA}"/>
-              </a:ext>
-            </a:extLst>
-          </p:cNvPr>
-          <p:cNvSpPr>
-            <a:spLocks noGrp="1"/>
-          </p:cNvSpPr>
-          <p:nvPr>
-            <p:ph type="ftr" sz="quarter" idx="11"/>
-          </p:nvPr>
-        </p:nvSpPr>
-        <p:spPr/>
-        <p:txBody>
-          <a:bodyPr/>
-          <a:lstStyle/>
-          <a:p>
-            <a:endParaRPr lang="es-ES_tradnl"/>
+            <a:r>
+              <a:rPr lang="es-ES_tradnl"/>
+              <a:t>Ingenium</a:t>
+            </a:r>
           </a:p>
         </p:txBody>
       </p:sp>
@@ -3821,9 +4981,9 @@
             </a:lvl1pPr>
           </a:lstStyle>
           <a:p>
-            <a:fld id="{78F871EA-4628-6F49-B2C4-1BB08EE8A530}" type="datetimeFigureOut">
-              <a:rPr lang="es-ES_tradnl" smtClean="0"/>
-              <a:t>14/7/25</a:t>
+            <a:fld id="{952BCF4F-7298-CE4F-9A29-326243368105}" type="datetime1">
+              <a:rPr lang="en-US" smtClean="0"/>
+              <a:t>7/15/25</a:t>
             </a:fld>
             <a:endParaRPr lang="es-ES_tradnl"/>
           </a:p>
@@ -3868,7 +5028,10 @@
             </a:lvl1pPr>
           </a:lstStyle>
           <a:p>
-            <a:endParaRPr lang="es-ES_tradnl"/>
+            <a:r>
+              <a:rPr lang="es-ES_tradnl"/>
+              <a:t>Ingenium</a:t>
+            </a:r>
           </a:p>
         </p:txBody>
       </p:sp>
@@ -3940,6 +5103,7 @@
     <p:sldLayoutId id="2147483658" r:id="rId10"/>
     <p:sldLayoutId id="2147483659" r:id="rId11"/>
   </p:sldLayoutIdLst>
+  <p:hf sldNum="0" hdr="0"/>
   <p:txStyles>
     <p:titleStyle>
       <a:lvl1pPr algn="l" defTabSz="914400" rtl="0" eaLnBrk="1" latinLnBrk="0" hangingPunct="1">
@@ -4271,12 +5435,20 @@
             <p:ph type="ctrTitle"/>
           </p:nvPr>
         </p:nvSpPr>
-        <p:spPr/>
+        <p:spPr>
+          <a:xfrm>
+            <a:off x="1524000" y="2503306"/>
+            <a:ext cx="9144000" cy="1098732"/>
+          </a:xfrm>
+        </p:spPr>
         <p:txBody>
           <a:bodyPr/>
           <a:lstStyle/>
           <a:p>
-            <a:endParaRPr lang="es-ES_tradnl" dirty="0"/>
+            <a:r>
+              <a:rPr lang="es-ES_tradnl" dirty="0"/>
+              <a:t>Levantamiento SG</a:t>
+            </a:r>
           </a:p>
         </p:txBody>
       </p:sp>
@@ -4296,12 +5468,77 @@
             <p:ph type="subTitle" idx="1"/>
           </p:nvPr>
         </p:nvSpPr>
-        <p:spPr/>
+        <p:spPr>
+          <a:xfrm>
+            <a:off x="1524000" y="3602038"/>
+            <a:ext cx="9144000" cy="922273"/>
+          </a:xfrm>
+        </p:spPr>
         <p:txBody>
           <a:bodyPr/>
           <a:lstStyle/>
           <a:p>
-            <a:endParaRPr lang="es-ES_tradnl" dirty="0"/>
+            <a:r>
+              <a:rPr lang="es-ES_tradnl" sz="4400" dirty="0"/>
+              <a:t>Dominio de Sistemas de Información</a:t>
+            </a:r>
+          </a:p>
+        </p:txBody>
+      </p:sp>
+      <p:sp>
+        <p:nvSpPr>
+          <p:cNvPr id="4" name="Date Placeholder 3">
+            <a:extLst>
+              <a:ext uri="{FF2B5EF4-FFF2-40B4-BE49-F238E27FC236}">
+                <a16:creationId xmlns:a16="http://schemas.microsoft.com/office/drawing/2014/main" id="{8F3A4911-0D67-6BFB-3A7A-0522EA0A76A3}"/>
+              </a:ext>
+            </a:extLst>
+          </p:cNvPr>
+          <p:cNvSpPr>
+            <a:spLocks noGrp="1"/>
+          </p:cNvSpPr>
+          <p:nvPr>
+            <p:ph type="dt" sz="half" idx="10"/>
+          </p:nvPr>
+        </p:nvSpPr>
+        <p:spPr/>
+        <p:txBody>
+          <a:bodyPr/>
+          <a:lstStyle/>
+          <a:p>
+            <a:fld id="{80E6FDC8-B188-0C45-AC93-6C49928B777B}" type="datetime1">
+              <a:rPr lang="en-US" smtClean="0"/>
+              <a:t>7/15/25</a:t>
+            </a:fld>
+            <a:endParaRPr lang="es-ES_tradnl"/>
+          </a:p>
+        </p:txBody>
+      </p:sp>
+      <p:sp>
+        <p:nvSpPr>
+          <p:cNvPr id="5" name="Footer Placeholder 4">
+            <a:extLst>
+              <a:ext uri="{FF2B5EF4-FFF2-40B4-BE49-F238E27FC236}">
+                <a16:creationId xmlns:a16="http://schemas.microsoft.com/office/drawing/2014/main" id="{82A0E06C-A614-C810-5F9E-FF113E04EAD7}"/>
+              </a:ext>
+            </a:extLst>
+          </p:cNvPr>
+          <p:cNvSpPr>
+            <a:spLocks noGrp="1"/>
+          </p:cNvSpPr>
+          <p:nvPr>
+            <p:ph type="ftr" sz="quarter" idx="11"/>
+          </p:nvPr>
+        </p:nvSpPr>
+        <p:spPr/>
+        <p:txBody>
+          <a:bodyPr/>
+          <a:lstStyle/>
+          <a:p>
+            <a:r>
+              <a:rPr lang="es-ES_tradnl"/>
+              <a:t>Ingenium</a:t>
+            </a:r>
           </a:p>
         </p:txBody>
       </p:sp>
@@ -4309,6 +5546,454 @@
     <p:extLst>
       <p:ext uri="{BB962C8B-B14F-4D97-AF65-F5344CB8AC3E}">
         <p14:creationId xmlns:p14="http://schemas.microsoft.com/office/powerpoint/2010/main" val="113550211"/>
+      </p:ext>
+    </p:extLst>
+  </p:cSld>
+  <p:clrMapOvr>
+    <a:masterClrMapping/>
+  </p:clrMapOvr>
+</p:sld>
+</file>
+
+<file path=ppt/slides/slide2.xml><?xml version="1.0" encoding="utf-8"?>
+<p:sld xmlns:a="http://schemas.openxmlformats.org/drawingml/2006/main" xmlns:r="http://schemas.openxmlformats.org/officeDocument/2006/relationships" xmlns:p="http://schemas.openxmlformats.org/presentationml/2006/main">
+  <p:cSld>
+    <p:spTree>
+      <p:nvGrpSpPr>
+        <p:cNvPr id="1" name=""/>
+        <p:cNvGrpSpPr/>
+        <p:nvPr/>
+      </p:nvGrpSpPr>
+      <p:grpSpPr>
+        <a:xfrm>
+          <a:off x="0" y="0"/>
+          <a:ext cx="0" cy="0"/>
+          <a:chOff x="0" y="0"/>
+          <a:chExt cx="0" cy="0"/>
+        </a:xfrm>
+      </p:grpSpPr>
+      <p:sp>
+        <p:nvSpPr>
+          <p:cNvPr id="2" name="Title 1">
+            <a:extLst>
+              <a:ext uri="{FF2B5EF4-FFF2-40B4-BE49-F238E27FC236}">
+                <a16:creationId xmlns:a16="http://schemas.microsoft.com/office/drawing/2014/main" id="{F0C4D3B0-13D6-6525-4D1A-9FF2AA59E986}"/>
+              </a:ext>
+            </a:extLst>
+          </p:cNvPr>
+          <p:cNvSpPr>
+            <a:spLocks noGrp="1"/>
+          </p:cNvSpPr>
+          <p:nvPr>
+            <p:ph type="title"/>
+          </p:nvPr>
+        </p:nvSpPr>
+        <p:spPr>
+          <a:xfrm>
+            <a:off x="252000" y="361178"/>
+            <a:ext cx="10488487" cy="627834"/>
+          </a:xfrm>
+        </p:spPr>
+        <p:txBody>
+          <a:bodyPr/>
+          <a:lstStyle/>
+          <a:p>
+            <a:r>
+              <a:rPr lang="es-ES_tradnl" dirty="0"/>
+              <a:t>Objetivo General de la Arquitectura Sistemas de Información</a:t>
+            </a:r>
+          </a:p>
+        </p:txBody>
+      </p:sp>
+      <p:sp>
+        <p:nvSpPr>
+          <p:cNvPr id="4" name="Text Placeholder 3">
+            <a:extLst>
+              <a:ext uri="{FF2B5EF4-FFF2-40B4-BE49-F238E27FC236}">
+                <a16:creationId xmlns:a16="http://schemas.microsoft.com/office/drawing/2014/main" id="{F180901F-12C6-F0A3-34EE-28F6D0F3EEF1}"/>
+              </a:ext>
+            </a:extLst>
+          </p:cNvPr>
+          <p:cNvSpPr>
+            <a:spLocks noGrp="1"/>
+          </p:cNvSpPr>
+          <p:nvPr>
+            <p:ph type="body" sz="half" idx="2"/>
+          </p:nvPr>
+        </p:nvSpPr>
+        <p:spPr/>
+        <p:txBody>
+          <a:bodyPr>
+            <a:normAutofit fontScale="92500" lnSpcReduction="10000"/>
+          </a:bodyPr>
+          <a:lstStyle/>
+          <a:p>
+            <a:pPr algn="just"/>
+            <a:r>
+              <a:rPr lang="es-ES_tradnl" dirty="0"/>
+              <a:t>El objetivo principal del dominio de aplicaciones SG es desarrollar las Arquitecturas de Sistemas de Información objetivo,</a:t>
+            </a:r>
+          </a:p>
+          <a:p>
+            <a:pPr algn="just"/>
+            <a:endParaRPr lang="es-ES_tradnl" dirty="0"/>
+          </a:p>
+          <a:p>
+            <a:pPr marL="342900" indent="-342900">
+              <a:buFont typeface="Arial" panose="020B0604020202020204" pitchFamily="34" charset="0"/>
+              <a:buChar char="•"/>
+            </a:pPr>
+            <a:r>
+              <a:rPr lang="es-ES_tradnl" dirty="0"/>
+              <a:t>Que soporten la arquitectura de negocio de SG (desarrollada en la Fase 3) </a:t>
+            </a:r>
+          </a:p>
+          <a:p>
+            <a:pPr marL="342900" indent="-342900">
+              <a:buFont typeface="Arial" panose="020B0604020202020204" pitchFamily="34" charset="0"/>
+              <a:buChar char="•"/>
+            </a:pPr>
+            <a:r>
+              <a:rPr lang="es-ES_tradnl" dirty="0"/>
+              <a:t>Que implementen la visión de arquitectura inicial de SG (establecida en la Fase 1) de este ejercicio de AE.</a:t>
+            </a:r>
+          </a:p>
+        </p:txBody>
+      </p:sp>
+      <p:sp>
+        <p:nvSpPr>
+          <p:cNvPr id="5" name="Date Placeholder 4">
+            <a:extLst>
+              <a:ext uri="{FF2B5EF4-FFF2-40B4-BE49-F238E27FC236}">
+                <a16:creationId xmlns:a16="http://schemas.microsoft.com/office/drawing/2014/main" id="{92CDF565-F4F7-3723-A2E2-89B34FAD3786}"/>
+              </a:ext>
+            </a:extLst>
+          </p:cNvPr>
+          <p:cNvSpPr>
+            <a:spLocks noGrp="1"/>
+          </p:cNvSpPr>
+          <p:nvPr>
+            <p:ph type="dt" sz="half" idx="10"/>
+          </p:nvPr>
+        </p:nvSpPr>
+        <p:spPr>
+          <a:xfrm>
+            <a:off x="838200" y="6356350"/>
+            <a:ext cx="2743200" cy="365125"/>
+          </a:xfrm>
+        </p:spPr>
+        <p:txBody>
+          <a:bodyPr/>
+          <a:lstStyle/>
+          <a:p>
+            <a:fld id="{54C826EA-052C-ED44-8280-55294C865FD1}" type="datetime1">
+              <a:rPr lang="en-US" smtClean="0"/>
+              <a:t>7/15/25</a:t>
+            </a:fld>
+            <a:endParaRPr lang="es-ES_tradnl"/>
+          </a:p>
+        </p:txBody>
+      </p:sp>
+    </p:spTree>
+    <p:extLst>
+      <p:ext uri="{BB962C8B-B14F-4D97-AF65-F5344CB8AC3E}">
+        <p14:creationId xmlns:p14="http://schemas.microsoft.com/office/powerpoint/2010/main" val="2354214095"/>
+      </p:ext>
+    </p:extLst>
+  </p:cSld>
+  <p:clrMapOvr>
+    <a:masterClrMapping/>
+  </p:clrMapOvr>
+</p:sld>
+</file>
+
+<file path=ppt/slides/slide3.xml><?xml version="1.0" encoding="utf-8"?>
+<p:sld xmlns:a="http://schemas.openxmlformats.org/drawingml/2006/main" xmlns:r="http://schemas.openxmlformats.org/officeDocument/2006/relationships" xmlns:p="http://schemas.openxmlformats.org/presentationml/2006/main">
+  <p:cSld>
+    <p:spTree>
+      <p:nvGrpSpPr>
+        <p:cNvPr id="1" name=""/>
+        <p:cNvGrpSpPr/>
+        <p:nvPr/>
+      </p:nvGrpSpPr>
+      <p:grpSpPr>
+        <a:xfrm>
+          <a:off x="0" y="0"/>
+          <a:ext cx="0" cy="0"/>
+          <a:chOff x="0" y="0"/>
+          <a:chExt cx="0" cy="0"/>
+        </a:xfrm>
+      </p:grpSpPr>
+      <p:sp>
+        <p:nvSpPr>
+          <p:cNvPr id="4" name="Text Placeholder 3">
+            <a:extLst>
+              <a:ext uri="{FF2B5EF4-FFF2-40B4-BE49-F238E27FC236}">
+                <a16:creationId xmlns:a16="http://schemas.microsoft.com/office/drawing/2014/main" id="{79950ACC-0F5A-CAB9-2829-2F29FEA2FEB3}"/>
+              </a:ext>
+            </a:extLst>
+          </p:cNvPr>
+          <p:cNvSpPr>
+            <a:spLocks noGrp="1"/>
+          </p:cNvSpPr>
+          <p:nvPr>
+            <p:ph type="body" sz="half" idx="2"/>
+          </p:nvPr>
+        </p:nvSpPr>
+        <p:spPr>
+          <a:xfrm>
+            <a:off x="720000" y="1260000"/>
+            <a:ext cx="4719764" cy="5082116"/>
+          </a:xfrm>
+        </p:spPr>
+        <p:txBody>
+          <a:bodyPr>
+            <a:normAutofit fontScale="92500" lnSpcReduction="20000"/>
+          </a:bodyPr>
+          <a:lstStyle/>
+          <a:p>
+            <a:pPr>
+              <a:spcBef>
+                <a:spcPts val="0"/>
+              </a:spcBef>
+              <a:spcAft>
+                <a:spcPts val="600"/>
+              </a:spcAft>
+            </a:pPr>
+            <a:r>
+              <a:rPr lang="es-ES_tradnl" sz="1100" dirty="0"/>
+              <a:t>De estudios de AE anteriores (Resumen Ejecutivo FASE, Anexo Técnica, Análisis de Entorno SG)</a:t>
+            </a:r>
+          </a:p>
+          <a:p>
+            <a:pPr marL="180000" indent="-180000">
+              <a:spcBef>
+                <a:spcPts val="600"/>
+              </a:spcBef>
+              <a:buFont typeface="+mj-lt"/>
+              <a:buAutoNum type="arabicPeriod"/>
+            </a:pPr>
+            <a:r>
+              <a:rPr lang="es-ES_tradnl" sz="1500" dirty="0"/>
+              <a:t>Deficiente apropiación del conocimiento en procesos TI [2].</a:t>
+            </a:r>
+          </a:p>
+          <a:p>
+            <a:pPr marL="180000" indent="-180000">
+              <a:spcBef>
+                <a:spcPts val="600"/>
+              </a:spcBef>
+              <a:buFont typeface="+mj-lt"/>
+              <a:buAutoNum type="arabicPeriod"/>
+            </a:pPr>
+            <a:r>
+              <a:rPr lang="es-ES_tradnl" sz="1500" dirty="0"/>
+              <a:t>Equipos tecnológicos obsoletos que generan dificultad… [3].</a:t>
+            </a:r>
+          </a:p>
+          <a:p>
+            <a:pPr marL="180000" indent="-180000">
+              <a:spcBef>
+                <a:spcPts val="600"/>
+              </a:spcBef>
+              <a:buFont typeface="+mj-lt"/>
+              <a:buAutoNum type="arabicPeriod"/>
+            </a:pPr>
+            <a:r>
+              <a:rPr lang="es-ES_tradnl" sz="1500" dirty="0"/>
+              <a:t>Fallas recurrentes en el funcionamiento de los SI y plataformas tecnológicas de SG [4].</a:t>
+            </a:r>
+          </a:p>
+          <a:p>
+            <a:pPr marL="180000" indent="-180000">
+              <a:spcBef>
+                <a:spcPts val="600"/>
+              </a:spcBef>
+              <a:buFont typeface="+mj-lt"/>
+              <a:buAutoNum type="arabicPeriod"/>
+            </a:pPr>
+            <a:r>
+              <a:rPr lang="es-ES_tradnl" sz="1500" dirty="0"/>
+              <a:t>Insuficiencia en la capacidad de las herramientas tecnológicas de SG obstaculizan obtención material probatorio… [5].</a:t>
+            </a:r>
+          </a:p>
+          <a:p>
+            <a:pPr marL="180000" indent="-180000">
+              <a:spcBef>
+                <a:spcPts val="600"/>
+              </a:spcBef>
+              <a:buFont typeface="+mj-lt"/>
+              <a:buAutoNum type="arabicPeriod"/>
+            </a:pPr>
+            <a:r>
+              <a:rPr lang="es-ES_tradnl" sz="1500" dirty="0"/>
+              <a:t>Falta de software que permita a SG extraer información dinámica para la toma de decisiones [6].</a:t>
+            </a:r>
+          </a:p>
+          <a:p>
+            <a:pPr marL="180000" indent="-180000">
+              <a:spcBef>
+                <a:spcPts val="600"/>
+              </a:spcBef>
+              <a:buFont typeface="+mj-lt"/>
+              <a:buAutoNum type="arabicPeriod"/>
+            </a:pPr>
+            <a:r>
+              <a:rPr lang="es-ES_tradnl" sz="1500" dirty="0"/>
+              <a:t>Se realizan análisis descriptivos, pero no predictivos y prospectivos de los resultados de la gestión…[7].</a:t>
+            </a:r>
+          </a:p>
+          <a:p>
+            <a:pPr marL="180000" indent="-180000">
+              <a:spcBef>
+                <a:spcPts val="600"/>
+              </a:spcBef>
+              <a:buFont typeface="+mj-lt"/>
+              <a:buAutoNum type="arabicPeriod"/>
+            </a:pPr>
+            <a:r>
+              <a:rPr lang="es-ES_tradnl" sz="1500" dirty="0"/>
+              <a:t>Falta personal para actualizar plataformas tecnológicas… [8].</a:t>
+            </a:r>
+          </a:p>
+          <a:p>
+            <a:pPr marL="180000" indent="-180000">
+              <a:spcBef>
+                <a:spcPts val="600"/>
+              </a:spcBef>
+              <a:buFont typeface="+mj-lt"/>
+              <a:buAutoNum type="arabicPeriod"/>
+            </a:pPr>
+            <a:r>
+              <a:rPr lang="es-ES_tradnl" sz="1500" dirty="0"/>
+              <a:t>Deficiente conectividad y falta de interoperabilidad entre plataformas tecnológicas [8].</a:t>
+            </a:r>
+          </a:p>
+          <a:p>
+            <a:pPr marL="180000" indent="-180000">
+              <a:spcBef>
+                <a:spcPts val="600"/>
+              </a:spcBef>
+              <a:buFont typeface="+mj-lt"/>
+              <a:buAutoNum type="arabicPeriod"/>
+            </a:pPr>
+            <a:r>
+              <a:rPr lang="es-ES_tradnl" sz="1500" dirty="0"/>
+              <a:t>Cambios en las plataformas tecnológicas no interactúan con anteriores [9].</a:t>
+            </a:r>
+          </a:p>
+          <a:p>
+            <a:pPr marL="180000" indent="-180000">
+              <a:spcBef>
+                <a:spcPts val="600"/>
+              </a:spcBef>
+              <a:buFont typeface="+mj-lt"/>
+              <a:buAutoNum type="arabicPeriod"/>
+            </a:pPr>
+            <a:r>
+              <a:rPr lang="es-ES_tradnl" sz="1500" dirty="0"/>
+              <a:t>Inestabilidad de la conectividad, indisponibilidad servidores y vulnerabilidad en la seguridad [10].</a:t>
+            </a:r>
+          </a:p>
+          <a:p>
+            <a:pPr marL="180000" indent="-180000">
+              <a:spcBef>
+                <a:spcPts val="600"/>
+              </a:spcBef>
+              <a:buFont typeface="+mj-lt"/>
+              <a:buAutoNum type="arabicPeriod"/>
+            </a:pPr>
+            <a:r>
+              <a:rPr lang="es-ES_tradnl" sz="1500" dirty="0"/>
+              <a:t>Obsolescencia tecnológica… [11].</a:t>
+            </a:r>
+          </a:p>
+          <a:p>
+            <a:pPr marL="180000" indent="-180000">
+              <a:spcBef>
+                <a:spcPts val="600"/>
+              </a:spcBef>
+              <a:buFont typeface="+mj-lt"/>
+              <a:buAutoNum type="arabicPeriod"/>
+            </a:pPr>
+            <a:r>
+              <a:rPr lang="es-ES_tradnl" sz="1500" dirty="0"/>
+              <a:t>Altos costos de la tecnología limitan capacidad de SG para implementar y mantener sistemas [11].</a:t>
+            </a:r>
+          </a:p>
+        </p:txBody>
+      </p:sp>
+      <p:sp>
+        <p:nvSpPr>
+          <p:cNvPr id="5" name="Date Placeholder 4">
+            <a:extLst>
+              <a:ext uri="{FF2B5EF4-FFF2-40B4-BE49-F238E27FC236}">
+                <a16:creationId xmlns:a16="http://schemas.microsoft.com/office/drawing/2014/main" id="{9672301E-EF48-B60F-DB34-37D2994E90DD}"/>
+              </a:ext>
+            </a:extLst>
+          </p:cNvPr>
+          <p:cNvSpPr>
+            <a:spLocks noGrp="1"/>
+          </p:cNvSpPr>
+          <p:nvPr>
+            <p:ph type="dt" sz="half" idx="10"/>
+          </p:nvPr>
+        </p:nvSpPr>
+        <p:spPr>
+          <a:xfrm>
+            <a:off x="838200" y="6356350"/>
+            <a:ext cx="2743200" cy="365125"/>
+          </a:xfrm>
+        </p:spPr>
+        <p:txBody>
+          <a:bodyPr/>
+          <a:lstStyle/>
+          <a:p>
+            <a:fld id="{54C826EA-052C-ED44-8280-55294C865FD1}" type="datetime1">
+              <a:rPr lang="en-US" smtClean="0"/>
+              <a:t>7/15/25</a:t>
+            </a:fld>
+            <a:endParaRPr lang="es-ES_tradnl"/>
+          </a:p>
+        </p:txBody>
+      </p:sp>
+      <p:sp>
+        <p:nvSpPr>
+          <p:cNvPr id="2" name="Title 1">
+            <a:extLst>
+              <a:ext uri="{FF2B5EF4-FFF2-40B4-BE49-F238E27FC236}">
+                <a16:creationId xmlns:a16="http://schemas.microsoft.com/office/drawing/2014/main" id="{FE8D94D5-D614-2153-2D17-D952DF34F04F}"/>
+              </a:ext>
+            </a:extLst>
+          </p:cNvPr>
+          <p:cNvSpPr>
+            <a:spLocks noGrp="1"/>
+          </p:cNvSpPr>
+          <p:nvPr>
+            <p:ph type="title"/>
+          </p:nvPr>
+        </p:nvSpPr>
+        <p:spPr>
+          <a:xfrm>
+            <a:off x="252000" y="360000"/>
+            <a:ext cx="7215898" cy="627834"/>
+          </a:xfrm>
+        </p:spPr>
+        <p:txBody>
+          <a:bodyPr/>
+          <a:lstStyle/>
+          <a:p>
+            <a:r>
+              <a:rPr lang="es-ES_tradnl" dirty="0"/>
+              <a:t>Panorama del Dominio SI de Secretaría</a:t>
+            </a:r>
+          </a:p>
+        </p:txBody>
+      </p:sp>
+    </p:spTree>
+    <p:extLst>
+      <p:ext uri="{BB962C8B-B14F-4D97-AF65-F5344CB8AC3E}">
+        <p14:creationId xmlns:p14="http://schemas.microsoft.com/office/powerpoint/2010/main" val="4273810623"/>
       </p:ext>
     </p:extLst>
   </p:cSld>
@@ -4611,4 +6296,594 @@
     </a:ext>
   </a:extLst>
 </a:theme>
+</file>
+
+<file path=ppt/theme/theme2.xml><?xml version="1.0" encoding="utf-8"?>
+<a:theme xmlns:a="http://schemas.openxmlformats.org/drawingml/2006/main" name="Office Theme">
+  <a:themeElements>
+    <a:clrScheme name="Office">
+      <a:dk1>
+        <a:sysClr val="windowText" lastClr="000000"/>
+      </a:dk1>
+      <a:lt1>
+        <a:sysClr val="window" lastClr="FFFFFF"/>
+      </a:lt1>
+      <a:dk2>
+        <a:srgbClr val="44546A"/>
+      </a:dk2>
+      <a:lt2>
+        <a:srgbClr val="E7E6E6"/>
+      </a:lt2>
+      <a:accent1>
+        <a:srgbClr val="4472C4"/>
+      </a:accent1>
+      <a:accent2>
+        <a:srgbClr val="ED7D31"/>
+      </a:accent2>
+      <a:accent3>
+        <a:srgbClr val="A5A5A5"/>
+      </a:accent3>
+      <a:accent4>
+        <a:srgbClr val="FFC000"/>
+      </a:accent4>
+      <a:accent5>
+        <a:srgbClr val="5B9BD5"/>
+      </a:accent5>
+      <a:accent6>
+        <a:srgbClr val="70AD47"/>
+      </a:accent6>
+      <a:hlink>
+        <a:srgbClr val="0563C1"/>
+      </a:hlink>
+      <a:folHlink>
+        <a:srgbClr val="954F72"/>
+      </a:folHlink>
+    </a:clrScheme>
+    <a:fontScheme name="Office">
+      <a:majorFont>
+        <a:latin typeface="Calibri Light" panose="020F0302020204030204"/>
+        <a:ea typeface=""/>
+        <a:cs typeface=""/>
+        <a:font script="Jpan" typeface="游ゴシック Light"/>
+        <a:font script="Hang" typeface="맑은 고딕"/>
+        <a:font script="Hans" typeface="等线 Light"/>
+        <a:font script="Hant" typeface="新細明體"/>
+        <a:font script="Arab" typeface="Times New Roman"/>
+        <a:font script="Hebr" typeface="Times New Roman"/>
+        <a:font script="Thai" typeface="Angsana New"/>
+        <a:font script="Ethi" typeface="Nyala"/>
+        <a:font script="Beng" typeface="Vrinda"/>
+        <a:font script="Gujr" typeface="Shruti"/>
+        <a:font script="Khmr" typeface="MoolBoran"/>
+        <a:font script="Knda" typeface="Tunga"/>
+        <a:font script="Guru" typeface="Raavi"/>
+        <a:font script="Cans" typeface="Euphemia"/>
+        <a:font script="Cher" typeface="Plantagenet Cherokee"/>
+        <a:font script="Yiii" typeface="Microsoft Yi Baiti"/>
+        <a:font script="Tibt" typeface="Microsoft Himalaya"/>
+        <a:font script="Thaa" typeface="MV Boli"/>
+        <a:font script="Deva" typeface="Mangal"/>
+        <a:font script="Telu" typeface="Gautami"/>
+        <a:font script="Taml" typeface="Latha"/>
+        <a:font script="Syrc" typeface="Estrangelo Edessa"/>
+        <a:font script="Orya" typeface="Kalinga"/>
+        <a:font script="Mlym" typeface="Kartika"/>
+        <a:font script="Laoo" typeface="DokChampa"/>
+        <a:font script="Sinh" typeface="Iskoola Pota"/>
+        <a:font script="Mong" typeface="Mongolian Baiti"/>
+        <a:font script="Viet" typeface="Times New Roman"/>
+        <a:font script="Uigh" typeface="Microsoft Uighur"/>
+        <a:font script="Geor" typeface="Sylfaen"/>
+        <a:font script="Armn" typeface="Arial"/>
+        <a:font script="Bugi" typeface="Leelawadee UI"/>
+        <a:font script="Bopo" typeface="Microsoft JhengHei"/>
+        <a:font script="Java" typeface="Javanese Text"/>
+        <a:font script="Lisu" typeface="Segoe UI"/>
+        <a:font script="Mymr" typeface="Myanmar Text"/>
+        <a:font script="Nkoo" typeface="Ebrima"/>
+        <a:font script="Olck" typeface="Nirmala UI"/>
+        <a:font script="Osma" typeface="Ebrima"/>
+        <a:font script="Phag" typeface="Phagspa"/>
+        <a:font script="Syrn" typeface="Estrangelo Edessa"/>
+        <a:font script="Syrj" typeface="Estrangelo Edessa"/>
+        <a:font script="Syre" typeface="Estrangelo Edessa"/>
+        <a:font script="Sora" typeface="Nirmala UI"/>
+        <a:font script="Tale" typeface="Microsoft Tai Le"/>
+        <a:font script="Talu" typeface="Microsoft New Tai Lue"/>
+        <a:font script="Tfng" typeface="Ebrima"/>
+      </a:majorFont>
+      <a:minorFont>
+        <a:latin typeface="Calibri" panose="020F0502020204030204"/>
+        <a:ea typeface=""/>
+        <a:cs typeface=""/>
+        <a:font script="Jpan" typeface="游ゴシック"/>
+        <a:font script="Hang" typeface="맑은 고딕"/>
+        <a:font script="Hans" typeface="等线"/>
+        <a:font script="Hant" typeface="新細明體"/>
+        <a:font script="Arab" typeface="Arial"/>
+        <a:font script="Hebr" typeface="Arial"/>
+        <a:font script="Thai" typeface="Cordia New"/>
+        <a:font script="Ethi" typeface="Nyala"/>
+        <a:font script="Beng" typeface="Vrinda"/>
+        <a:font script="Gujr" typeface="Shruti"/>
+        <a:font script="Khmr" typeface="DaunPenh"/>
+        <a:font script="Knda" typeface="Tunga"/>
+        <a:font script="Guru" typeface="Raavi"/>
+        <a:font script="Cans" typeface="Euphemia"/>
+        <a:font script="Cher" typeface="Plantagenet Cherokee"/>
+        <a:font script="Yiii" typeface="Microsoft Yi Baiti"/>
+        <a:font script="Tibt" typeface="Microsoft Himalaya"/>
+        <a:font script="Thaa" typeface="MV Boli"/>
+        <a:font script="Deva" typeface="Mangal"/>
+        <a:font script="Telu" typeface="Gautami"/>
+        <a:font script="Taml" typeface="Latha"/>
+        <a:font script="Syrc" typeface="Estrangelo Edessa"/>
+        <a:font script="Orya" typeface="Kalinga"/>
+        <a:font script="Mlym" typeface="Kartika"/>
+        <a:font script="Laoo" typeface="DokChampa"/>
+        <a:font script="Sinh" typeface="Iskoola Pota"/>
+        <a:font script="Mong" typeface="Mongolian Baiti"/>
+        <a:font script="Viet" typeface="Arial"/>
+        <a:font script="Uigh" typeface="Microsoft Uighur"/>
+        <a:font script="Geor" typeface="Sylfaen"/>
+        <a:font script="Armn" typeface="Arial"/>
+        <a:font script="Bugi" typeface="Leelawadee UI"/>
+        <a:font script="Bopo" typeface="Microsoft JhengHei"/>
+        <a:font script="Java" typeface="Javanese Text"/>
+        <a:font script="Lisu" typeface="Segoe UI"/>
+        <a:font script="Mymr" typeface="Myanmar Text"/>
+        <a:font script="Nkoo" typeface="Ebrima"/>
+        <a:font script="Olck" typeface="Nirmala UI"/>
+        <a:font script="Osma" typeface="Ebrima"/>
+        <a:font script="Phag" typeface="Phagspa"/>
+        <a:font script="Syrn" typeface="Estrangelo Edessa"/>
+        <a:font script="Syrj" typeface="Estrangelo Edessa"/>
+        <a:font script="Syre" typeface="Estrangelo Edessa"/>
+        <a:font script="Sora" typeface="Nirmala UI"/>
+        <a:font script="Tale" typeface="Microsoft Tai Le"/>
+        <a:font script="Talu" typeface="Microsoft New Tai Lue"/>
+        <a:font script="Tfng" typeface="Ebrima"/>
+      </a:minorFont>
+    </a:fontScheme>
+    <a:fmtScheme name="Office">
+      <a:fillStyleLst>
+        <a:solidFill>
+          <a:schemeClr val="phClr"/>
+        </a:solidFill>
+        <a:gradFill rotWithShape="1">
+          <a:gsLst>
+            <a:gs pos="0">
+              <a:schemeClr val="phClr">
+                <a:lumMod val="110000"/>
+                <a:satMod val="105000"/>
+                <a:tint val="67000"/>
+              </a:schemeClr>
+            </a:gs>
+            <a:gs pos="50000">
+              <a:schemeClr val="phClr">
+                <a:lumMod val="105000"/>
+                <a:satMod val="103000"/>
+                <a:tint val="73000"/>
+              </a:schemeClr>
+            </a:gs>
+            <a:gs pos="100000">
+              <a:schemeClr val="phClr">
+                <a:lumMod val="105000"/>
+                <a:satMod val="109000"/>
+                <a:tint val="81000"/>
+              </a:schemeClr>
+            </a:gs>
+          </a:gsLst>
+          <a:lin ang="5400000" scaled="0"/>
+        </a:gradFill>
+        <a:gradFill rotWithShape="1">
+          <a:gsLst>
+            <a:gs pos="0">
+              <a:schemeClr val="phClr">
+                <a:satMod val="103000"/>
+                <a:lumMod val="102000"/>
+                <a:tint val="94000"/>
+              </a:schemeClr>
+            </a:gs>
+            <a:gs pos="50000">
+              <a:schemeClr val="phClr">
+                <a:satMod val="110000"/>
+                <a:lumMod val="100000"/>
+                <a:shade val="100000"/>
+              </a:schemeClr>
+            </a:gs>
+            <a:gs pos="100000">
+              <a:schemeClr val="phClr">
+                <a:lumMod val="99000"/>
+                <a:satMod val="120000"/>
+                <a:shade val="78000"/>
+              </a:schemeClr>
+            </a:gs>
+          </a:gsLst>
+          <a:lin ang="5400000" scaled="0"/>
+        </a:gradFill>
+      </a:fillStyleLst>
+      <a:lnStyleLst>
+        <a:ln w="6350" cap="flat" cmpd="sng" algn="ctr">
+          <a:solidFill>
+            <a:schemeClr val="phClr"/>
+          </a:solidFill>
+          <a:prstDash val="solid"/>
+          <a:miter lim="800000"/>
+        </a:ln>
+        <a:ln w="12700" cap="flat" cmpd="sng" algn="ctr">
+          <a:solidFill>
+            <a:schemeClr val="phClr"/>
+          </a:solidFill>
+          <a:prstDash val="solid"/>
+          <a:miter lim="800000"/>
+        </a:ln>
+        <a:ln w="19050" cap="flat" cmpd="sng" algn="ctr">
+          <a:solidFill>
+            <a:schemeClr val="phClr"/>
+          </a:solidFill>
+          <a:prstDash val="solid"/>
+          <a:miter lim="800000"/>
+        </a:ln>
+      </a:lnStyleLst>
+      <a:effectStyleLst>
+        <a:effectStyle>
+          <a:effectLst/>
+        </a:effectStyle>
+        <a:effectStyle>
+          <a:effectLst/>
+        </a:effectStyle>
+        <a:effectStyle>
+          <a:effectLst>
+            <a:outerShdw blurRad="57150" dist="19050" dir="5400000" algn="ctr" rotWithShape="0">
+              <a:srgbClr val="000000">
+                <a:alpha val="63000"/>
+              </a:srgbClr>
+            </a:outerShdw>
+          </a:effectLst>
+        </a:effectStyle>
+      </a:effectStyleLst>
+      <a:bgFillStyleLst>
+        <a:solidFill>
+          <a:schemeClr val="phClr"/>
+        </a:solidFill>
+        <a:solidFill>
+          <a:schemeClr val="phClr">
+            <a:tint val="95000"/>
+            <a:satMod val="170000"/>
+          </a:schemeClr>
+        </a:solidFill>
+        <a:gradFill rotWithShape="1">
+          <a:gsLst>
+            <a:gs pos="0">
+              <a:schemeClr val="phClr">
+                <a:tint val="93000"/>
+                <a:satMod val="150000"/>
+                <a:shade val="98000"/>
+                <a:lumMod val="102000"/>
+              </a:schemeClr>
+            </a:gs>
+            <a:gs pos="50000">
+              <a:schemeClr val="phClr">
+                <a:tint val="98000"/>
+                <a:satMod val="130000"/>
+                <a:shade val="90000"/>
+                <a:lumMod val="103000"/>
+              </a:schemeClr>
+            </a:gs>
+            <a:gs pos="100000">
+              <a:schemeClr val="phClr">
+                <a:shade val="63000"/>
+                <a:satMod val="120000"/>
+              </a:schemeClr>
+            </a:gs>
+          </a:gsLst>
+          <a:lin ang="5400000" scaled="0"/>
+        </a:gradFill>
+      </a:bgFillStyleLst>
+    </a:fmtScheme>
+  </a:themeElements>
+  <a:objectDefaults/>
+  <a:extraClrSchemeLst/>
+  <a:extLst>
+    <a:ext uri="{05A4C25C-085E-4340-85A3-A5531E510DB2}">
+      <thm15:themeFamily xmlns:thm15="http://schemas.microsoft.com/office/thememl/2012/main" name="Office Theme" id="{62F939B6-93AF-4DB8-9C6B-D6C7DFDC589F}" vid="{4A3C46E8-61CC-4603-A589-7422A47A8E4A}"/>
+    </a:ext>
+  </a:extLst>
+</a:theme>
+</file>
+
+<file path=ppt/theme/theme3.xml><?xml version="1.0" encoding="utf-8"?>
+<a:theme xmlns:a="http://schemas.openxmlformats.org/drawingml/2006/main" name="Office Theme">
+  <a:themeElements>
+    <a:clrScheme name="Office">
+      <a:dk1>
+        <a:sysClr val="windowText" lastClr="000000"/>
+      </a:dk1>
+      <a:lt1>
+        <a:sysClr val="window" lastClr="FFFFFF"/>
+      </a:lt1>
+      <a:dk2>
+        <a:srgbClr val="44546A"/>
+      </a:dk2>
+      <a:lt2>
+        <a:srgbClr val="E7E6E6"/>
+      </a:lt2>
+      <a:accent1>
+        <a:srgbClr val="4472C4"/>
+      </a:accent1>
+      <a:accent2>
+        <a:srgbClr val="ED7D31"/>
+      </a:accent2>
+      <a:accent3>
+        <a:srgbClr val="A5A5A5"/>
+      </a:accent3>
+      <a:accent4>
+        <a:srgbClr val="FFC000"/>
+      </a:accent4>
+      <a:accent5>
+        <a:srgbClr val="5B9BD5"/>
+      </a:accent5>
+      <a:accent6>
+        <a:srgbClr val="70AD47"/>
+      </a:accent6>
+      <a:hlink>
+        <a:srgbClr val="0563C1"/>
+      </a:hlink>
+      <a:folHlink>
+        <a:srgbClr val="954F72"/>
+      </a:folHlink>
+    </a:clrScheme>
+    <a:fontScheme name="Office">
+      <a:majorFont>
+        <a:latin typeface="Calibri Light" panose="020F0302020204030204"/>
+        <a:ea typeface=""/>
+        <a:cs typeface=""/>
+        <a:font script="Jpan" typeface="游ゴシック Light"/>
+        <a:font script="Hang" typeface="맑은 고딕"/>
+        <a:font script="Hans" typeface="等线 Light"/>
+        <a:font script="Hant" typeface="新細明體"/>
+        <a:font script="Arab" typeface="Times New Roman"/>
+        <a:font script="Hebr" typeface="Times New Roman"/>
+        <a:font script="Thai" typeface="Angsana New"/>
+        <a:font script="Ethi" typeface="Nyala"/>
+        <a:font script="Beng" typeface="Vrinda"/>
+        <a:font script="Gujr" typeface="Shruti"/>
+        <a:font script="Khmr" typeface="MoolBoran"/>
+        <a:font script="Knda" typeface="Tunga"/>
+        <a:font script="Guru" typeface="Raavi"/>
+        <a:font script="Cans" typeface="Euphemia"/>
+        <a:font script="Cher" typeface="Plantagenet Cherokee"/>
+        <a:font script="Yiii" typeface="Microsoft Yi Baiti"/>
+        <a:font script="Tibt" typeface="Microsoft Himalaya"/>
+        <a:font script="Thaa" typeface="MV Boli"/>
+        <a:font script="Deva" typeface="Mangal"/>
+        <a:font script="Telu" typeface="Gautami"/>
+        <a:font script="Taml" typeface="Latha"/>
+        <a:font script="Syrc" typeface="Estrangelo Edessa"/>
+        <a:font script="Orya" typeface="Kalinga"/>
+        <a:font script="Mlym" typeface="Kartika"/>
+        <a:font script="Laoo" typeface="DokChampa"/>
+        <a:font script="Sinh" typeface="Iskoola Pota"/>
+        <a:font script="Mong" typeface="Mongolian Baiti"/>
+        <a:font script="Viet" typeface="Times New Roman"/>
+        <a:font script="Uigh" typeface="Microsoft Uighur"/>
+        <a:font script="Geor" typeface="Sylfaen"/>
+        <a:font script="Armn" typeface="Arial"/>
+        <a:font script="Bugi" typeface="Leelawadee UI"/>
+        <a:font script="Bopo" typeface="Microsoft JhengHei"/>
+        <a:font script="Java" typeface="Javanese Text"/>
+        <a:font script="Lisu" typeface="Segoe UI"/>
+        <a:font script="Mymr" typeface="Myanmar Text"/>
+        <a:font script="Nkoo" typeface="Ebrima"/>
+        <a:font script="Olck" typeface="Nirmala UI"/>
+        <a:font script="Osma" typeface="Ebrima"/>
+        <a:font script="Phag" typeface="Phagspa"/>
+        <a:font script="Syrn" typeface="Estrangelo Edessa"/>
+        <a:font script="Syrj" typeface="Estrangelo Edessa"/>
+        <a:font script="Syre" typeface="Estrangelo Edessa"/>
+        <a:font script="Sora" typeface="Nirmala UI"/>
+        <a:font script="Tale" typeface="Microsoft Tai Le"/>
+        <a:font script="Talu" typeface="Microsoft New Tai Lue"/>
+        <a:font script="Tfng" typeface="Ebrima"/>
+      </a:majorFont>
+      <a:minorFont>
+        <a:latin typeface="Calibri" panose="020F0502020204030204"/>
+        <a:ea typeface=""/>
+        <a:cs typeface=""/>
+        <a:font script="Jpan" typeface="游ゴシック"/>
+        <a:font script="Hang" typeface="맑은 고딕"/>
+        <a:font script="Hans" typeface="等线"/>
+        <a:font script="Hant" typeface="新細明體"/>
+        <a:font script="Arab" typeface="Arial"/>
+        <a:font script="Hebr" typeface="Arial"/>
+        <a:font script="Thai" typeface="Cordia New"/>
+        <a:font script="Ethi" typeface="Nyala"/>
+        <a:font script="Beng" typeface="Vrinda"/>
+        <a:font script="Gujr" typeface="Shruti"/>
+        <a:font script="Khmr" typeface="DaunPenh"/>
+        <a:font script="Knda" typeface="Tunga"/>
+        <a:font script="Guru" typeface="Raavi"/>
+        <a:font script="Cans" typeface="Euphemia"/>
+        <a:font script="Cher" typeface="Plantagenet Cherokee"/>
+        <a:font script="Yiii" typeface="Microsoft Yi Baiti"/>
+        <a:font script="Tibt" typeface="Microsoft Himalaya"/>
+        <a:font script="Thaa" typeface="MV Boli"/>
+        <a:font script="Deva" typeface="Mangal"/>
+        <a:font script="Telu" typeface="Gautami"/>
+        <a:font script="Taml" typeface="Latha"/>
+        <a:font script="Syrc" typeface="Estrangelo Edessa"/>
+        <a:font script="Orya" typeface="Kalinga"/>
+        <a:font script="Mlym" typeface="Kartika"/>
+        <a:font script="Laoo" typeface="DokChampa"/>
+        <a:font script="Sinh" typeface="Iskoola Pota"/>
+        <a:font script="Mong" typeface="Mongolian Baiti"/>
+        <a:font script="Viet" typeface="Arial"/>
+        <a:font script="Uigh" typeface="Microsoft Uighur"/>
+        <a:font script="Geor" typeface="Sylfaen"/>
+        <a:font script="Armn" typeface="Arial"/>
+        <a:font script="Bugi" typeface="Leelawadee UI"/>
+        <a:font script="Bopo" typeface="Microsoft JhengHei"/>
+        <a:font script="Java" typeface="Javanese Text"/>
+        <a:font script="Lisu" typeface="Segoe UI"/>
+        <a:font script="Mymr" typeface="Myanmar Text"/>
+        <a:font script="Nkoo" typeface="Ebrima"/>
+        <a:font script="Olck" typeface="Nirmala UI"/>
+        <a:font script="Osma" typeface="Ebrima"/>
+        <a:font script="Phag" typeface="Phagspa"/>
+        <a:font script="Syrn" typeface="Estrangelo Edessa"/>
+        <a:font script="Syrj" typeface="Estrangelo Edessa"/>
+        <a:font script="Syre" typeface="Estrangelo Edessa"/>
+        <a:font script="Sora" typeface="Nirmala UI"/>
+        <a:font script="Tale" typeface="Microsoft Tai Le"/>
+        <a:font script="Talu" typeface="Microsoft New Tai Lue"/>
+        <a:font script="Tfng" typeface="Ebrima"/>
+      </a:minorFont>
+    </a:fontScheme>
+    <a:fmtScheme name="Office">
+      <a:fillStyleLst>
+        <a:solidFill>
+          <a:schemeClr val="phClr"/>
+        </a:solidFill>
+        <a:gradFill rotWithShape="1">
+          <a:gsLst>
+            <a:gs pos="0">
+              <a:schemeClr val="phClr">
+                <a:lumMod val="110000"/>
+                <a:satMod val="105000"/>
+                <a:tint val="67000"/>
+              </a:schemeClr>
+            </a:gs>
+            <a:gs pos="50000">
+              <a:schemeClr val="phClr">
+                <a:lumMod val="105000"/>
+                <a:satMod val="103000"/>
+                <a:tint val="73000"/>
+              </a:schemeClr>
+            </a:gs>
+            <a:gs pos="100000">
+              <a:schemeClr val="phClr">
+                <a:lumMod val="105000"/>
+                <a:satMod val="109000"/>
+                <a:tint val="81000"/>
+              </a:schemeClr>
+            </a:gs>
+          </a:gsLst>
+          <a:lin ang="5400000" scaled="0"/>
+        </a:gradFill>
+        <a:gradFill rotWithShape="1">
+          <a:gsLst>
+            <a:gs pos="0">
+              <a:schemeClr val="phClr">
+                <a:satMod val="103000"/>
+                <a:lumMod val="102000"/>
+                <a:tint val="94000"/>
+              </a:schemeClr>
+            </a:gs>
+            <a:gs pos="50000">
+              <a:schemeClr val="phClr">
+                <a:satMod val="110000"/>
+                <a:lumMod val="100000"/>
+                <a:shade val="100000"/>
+              </a:schemeClr>
+            </a:gs>
+            <a:gs pos="100000">
+              <a:schemeClr val="phClr">
+                <a:lumMod val="99000"/>
+                <a:satMod val="120000"/>
+                <a:shade val="78000"/>
+              </a:schemeClr>
+            </a:gs>
+          </a:gsLst>
+          <a:lin ang="5400000" scaled="0"/>
+        </a:gradFill>
+      </a:fillStyleLst>
+      <a:lnStyleLst>
+        <a:ln w="6350" cap="flat" cmpd="sng" algn="ctr">
+          <a:solidFill>
+            <a:schemeClr val="phClr"/>
+          </a:solidFill>
+          <a:prstDash val="solid"/>
+          <a:miter lim="800000"/>
+        </a:ln>
+        <a:ln w="12700" cap="flat" cmpd="sng" algn="ctr">
+          <a:solidFill>
+            <a:schemeClr val="phClr"/>
+          </a:solidFill>
+          <a:prstDash val="solid"/>
+          <a:miter lim="800000"/>
+        </a:ln>
+        <a:ln w="19050" cap="flat" cmpd="sng" algn="ctr">
+          <a:solidFill>
+            <a:schemeClr val="phClr"/>
+          </a:solidFill>
+          <a:prstDash val="solid"/>
+          <a:miter lim="800000"/>
+        </a:ln>
+      </a:lnStyleLst>
+      <a:effectStyleLst>
+        <a:effectStyle>
+          <a:effectLst/>
+        </a:effectStyle>
+        <a:effectStyle>
+          <a:effectLst/>
+        </a:effectStyle>
+        <a:effectStyle>
+          <a:effectLst>
+            <a:outerShdw blurRad="57150" dist="19050" dir="5400000" algn="ctr" rotWithShape="0">
+              <a:srgbClr val="000000">
+                <a:alpha val="63000"/>
+              </a:srgbClr>
+            </a:outerShdw>
+          </a:effectLst>
+        </a:effectStyle>
+      </a:effectStyleLst>
+      <a:bgFillStyleLst>
+        <a:solidFill>
+          <a:schemeClr val="phClr"/>
+        </a:solidFill>
+        <a:solidFill>
+          <a:schemeClr val="phClr">
+            <a:tint val="95000"/>
+            <a:satMod val="170000"/>
+          </a:schemeClr>
+        </a:solidFill>
+        <a:gradFill rotWithShape="1">
+          <a:gsLst>
+            <a:gs pos="0">
+              <a:schemeClr val="phClr">
+                <a:tint val="93000"/>
+                <a:satMod val="150000"/>
+                <a:shade val="98000"/>
+                <a:lumMod val="102000"/>
+              </a:schemeClr>
+            </a:gs>
+            <a:gs pos="50000">
+              <a:schemeClr val="phClr">
+                <a:tint val="98000"/>
+                <a:satMod val="130000"/>
+                <a:shade val="90000"/>
+                <a:lumMod val="103000"/>
+              </a:schemeClr>
+            </a:gs>
+            <a:gs pos="100000">
+              <a:schemeClr val="phClr">
+                <a:shade val="63000"/>
+                <a:satMod val="120000"/>
+              </a:schemeClr>
+            </a:gs>
+          </a:gsLst>
+          <a:lin ang="5400000" scaled="0"/>
+        </a:gradFill>
+      </a:bgFillStyleLst>
+    </a:fmtScheme>
+  </a:themeElements>
+  <a:objectDefaults/>
+  <a:extraClrSchemeLst/>
+  <a:extLst>
+    <a:ext uri="{05A4C25C-085E-4340-85A3-A5531E510DB2}">
+      <thm15:themeFamily xmlns:thm15="http://schemas.microsoft.com/office/thememl/2012/main" name="Office Theme" id="{62F939B6-93AF-4DB8-9C6B-D6C7DFDC589F}" vid="{4A3C46E8-61CC-4603-A589-7422A47A8E4A}"/>
+    </a:ext>
+  </a:extLst>
+</a:theme>
 </file>
--- a/templates/PlantillaSG.pptx
+++ b/templates/PlantillaSG.pptx
@@ -5,15 +5,10 @@
     <p:sldMasterId id="2147483648" r:id="rId1"/>
   </p:sldMasterIdLst>
   <p:notesMasterIdLst>
-    <p:notesMasterId r:id="rId5"/>
+    <p:notesMasterId r:id="rId3"/>
   </p:notesMasterIdLst>
-  <p:handoutMasterIdLst>
-    <p:handoutMasterId r:id="rId6"/>
-  </p:handoutMasterIdLst>
   <p:sldIdLst>
     <p:sldId id="256" r:id="rId2"/>
-    <p:sldId id="259" r:id="rId3"/>
-    <p:sldId id="261" r:id="rId4"/>
   </p:sldIdLst>
   <p:sldSz cx="12192000" cy="6858000"/>
   <p:notesSz cx="6858000" cy="9144000"/>
@@ -116,661 +111,8 @@
     <p:ext uri="{EFAFB233-063F-42B5-8137-9DF3F51BA10A}">
       <p15:sldGuideLst xmlns:p15="http://schemas.microsoft.com/office/powerpoint/2012/main"/>
     </p:ext>
-    <p:ext uri="{2D200454-40CA-4A62-9FC3-DE9A4176ACB9}">
-      <p15:notesGuideLst xmlns:p15="http://schemas.microsoft.com/office/powerpoint/2012/main"/>
-    </p:ext>
   </p:extLst>
 </p:presentation>
-</file>
-
-<file path=ppt/revisionInfo.xml><?xml version="1.0" encoding="utf-8"?>
-<p1510:revInfo xmlns:a="http://schemas.openxmlformats.org/drawingml/2006/main" xmlns:r="http://schemas.openxmlformats.org/officeDocument/2006/relationships" xmlns:p1510="http://schemas.microsoft.com/office/powerpoint/2015/10/main">
-  <p1510:revLst>
-    <p1510:client id="{123CDF9E-882E-3B44-9B07-04379EF3E374}" v="19" dt="2025-07-15T14:37:00.966"/>
-  </p1510:revLst>
-</p1510:revInfo>
-</file>
-
-<file path=ppt/changesInfos/changesInfo1.xml><?xml version="1.0" encoding="utf-8"?>
-<pc:chgInfo xmlns:a="http://schemas.openxmlformats.org/drawingml/2006/main" xmlns:r="http://schemas.openxmlformats.org/officeDocument/2006/relationships" xmlns:ac="http://schemas.microsoft.com/office/drawing/2013/main/command" xmlns:pc="http://schemas.microsoft.com/office/powerpoint/2013/main/command">
-  <pc:docChgLst>
-    <pc:chgData name="Harry Wong" userId="2e681b20-ff61-411d-b970-54b741321bcd" providerId="ADAL" clId="{123CDF9E-882E-3B44-9B07-04379EF3E374}"/>
-    <pc:docChg chg="undo custSel addSld delSld modSld modMainMaster">
-      <pc:chgData name="Harry Wong" userId="2e681b20-ff61-411d-b970-54b741321bcd" providerId="ADAL" clId="{123CDF9E-882E-3B44-9B07-04379EF3E374}" dt="2025-07-15T14:39:04.596" v="478" actId="20577"/>
-      <pc:docMkLst>
-        <pc:docMk/>
-      </pc:docMkLst>
-      <pc:sldChg chg="delSp modSp mod">
-        <pc:chgData name="Harry Wong" userId="2e681b20-ff61-411d-b970-54b741321bcd" providerId="ADAL" clId="{123CDF9E-882E-3B44-9B07-04379EF3E374}" dt="2025-07-15T14:28:06.573" v="381" actId="478"/>
-        <pc:sldMkLst>
-          <pc:docMk/>
-          <pc:sldMk cId="2354214095" sldId="259"/>
-        </pc:sldMkLst>
-        <pc:spChg chg="mod">
-          <ac:chgData name="Harry Wong" userId="2e681b20-ff61-411d-b970-54b741321bcd" providerId="ADAL" clId="{123CDF9E-882E-3B44-9B07-04379EF3E374}" dt="2025-07-15T14:27:45.765" v="378"/>
-          <ac:spMkLst>
-            <pc:docMk/>
-            <pc:sldMk cId="2354214095" sldId="259"/>
-            <ac:spMk id="5" creationId="{92CDF565-F4F7-3723-A2E2-89B34FAD3786}"/>
-          </ac:spMkLst>
-        </pc:spChg>
-        <pc:spChg chg="del mod">
-          <ac:chgData name="Harry Wong" userId="2e681b20-ff61-411d-b970-54b741321bcd" providerId="ADAL" clId="{123CDF9E-882E-3B44-9B07-04379EF3E374}" dt="2025-07-15T14:28:06.573" v="381" actId="478"/>
-          <ac:spMkLst>
-            <pc:docMk/>
-            <pc:sldMk cId="2354214095" sldId="259"/>
-            <ac:spMk id="6" creationId="{CAA967E3-284E-9047-43D7-423D29CBFE9B}"/>
-          </ac:spMkLst>
-        </pc:spChg>
-      </pc:sldChg>
-      <pc:sldChg chg="delSp modSp mod">
-        <pc:chgData name="Harry Wong" userId="2e681b20-ff61-411d-b970-54b741321bcd" providerId="ADAL" clId="{123CDF9E-882E-3B44-9B07-04379EF3E374}" dt="2025-07-15T14:30:07.614" v="405" actId="12"/>
-        <pc:sldMkLst>
-          <pc:docMk/>
-          <pc:sldMk cId="4273810623" sldId="261"/>
-        </pc:sldMkLst>
-        <pc:spChg chg="mod">
-          <ac:chgData name="Harry Wong" userId="2e681b20-ff61-411d-b970-54b741321bcd" providerId="ADAL" clId="{123CDF9E-882E-3B44-9B07-04379EF3E374}" dt="2025-07-15T14:30:07.614" v="405" actId="12"/>
-          <ac:spMkLst>
-            <pc:docMk/>
-            <pc:sldMk cId="4273810623" sldId="261"/>
-            <ac:spMk id="4" creationId="{79950ACC-0F5A-CAB9-2829-2F29FEA2FEB3}"/>
-          </ac:spMkLst>
-        </pc:spChg>
-        <pc:spChg chg="mod">
-          <ac:chgData name="Harry Wong" userId="2e681b20-ff61-411d-b970-54b741321bcd" providerId="ADAL" clId="{123CDF9E-882E-3B44-9B07-04379EF3E374}" dt="2025-07-15T14:27:45.765" v="378"/>
-          <ac:spMkLst>
-            <pc:docMk/>
-            <pc:sldMk cId="4273810623" sldId="261"/>
-            <ac:spMk id="5" creationId="{9672301E-EF48-B60F-DB34-37D2994E90DD}"/>
-          </ac:spMkLst>
-        </pc:spChg>
-        <pc:spChg chg="del mod">
-          <ac:chgData name="Harry Wong" userId="2e681b20-ff61-411d-b970-54b741321bcd" providerId="ADAL" clId="{123CDF9E-882E-3B44-9B07-04379EF3E374}" dt="2025-07-15T14:28:15.956" v="383" actId="478"/>
-          <ac:spMkLst>
-            <pc:docMk/>
-            <pc:sldMk cId="4273810623" sldId="261"/>
-            <ac:spMk id="6" creationId="{D78388EA-CB70-8F00-61F6-CE1811B51CBF}"/>
-          </ac:spMkLst>
-        </pc:spChg>
-      </pc:sldChg>
-      <pc:sldChg chg="addSp delSp modSp mod">
-        <pc:chgData name="Harry Wong" userId="2e681b20-ff61-411d-b970-54b741321bcd" providerId="ADAL" clId="{123CDF9E-882E-3B44-9B07-04379EF3E374}" dt="2025-07-15T14:39:04.596" v="478" actId="20577"/>
-        <pc:sldMkLst>
-          <pc:docMk/>
-          <pc:sldMk cId="2756963476" sldId="265"/>
-        </pc:sldMkLst>
-        <pc:spChg chg="mod">
-          <ac:chgData name="Harry Wong" userId="2e681b20-ff61-411d-b970-54b741321bcd" providerId="ADAL" clId="{123CDF9E-882E-3B44-9B07-04379EF3E374}" dt="2025-07-15T14:37:42.485" v="446" actId="26606"/>
-          <ac:spMkLst>
-            <pc:docMk/>
-            <pc:sldMk cId="2756963476" sldId="265"/>
-            <ac:spMk id="2" creationId="{FE8D94D5-D614-2153-2D17-D952DF34F04F}"/>
-          </ac:spMkLst>
-        </pc:spChg>
-        <pc:spChg chg="mod ord">
-          <ac:chgData name="Harry Wong" userId="2e681b20-ff61-411d-b970-54b741321bcd" providerId="ADAL" clId="{123CDF9E-882E-3B44-9B07-04379EF3E374}" dt="2025-07-15T14:39:04.596" v="478" actId="20577"/>
-          <ac:spMkLst>
-            <pc:docMk/>
-            <pc:sldMk cId="2756963476" sldId="265"/>
-            <ac:spMk id="4" creationId="{79950ACC-0F5A-CAB9-2829-2F29FEA2FEB3}"/>
-          </ac:spMkLst>
-        </pc:spChg>
-        <pc:spChg chg="mod ord">
-          <ac:chgData name="Harry Wong" userId="2e681b20-ff61-411d-b970-54b741321bcd" providerId="ADAL" clId="{123CDF9E-882E-3B44-9B07-04379EF3E374}" dt="2025-07-15T14:37:42.485" v="446" actId="26606"/>
-          <ac:spMkLst>
-            <pc:docMk/>
-            <pc:sldMk cId="2756963476" sldId="265"/>
-            <ac:spMk id="5" creationId="{9672301E-EF48-B60F-DB34-37D2994E90DD}"/>
-          </ac:spMkLst>
-        </pc:spChg>
-        <pc:spChg chg="del mod">
-          <ac:chgData name="Harry Wong" userId="2e681b20-ff61-411d-b970-54b741321bcd" providerId="ADAL" clId="{123CDF9E-882E-3B44-9B07-04379EF3E374}" dt="2025-07-15T14:28:12.149" v="382" actId="478"/>
-          <ac:spMkLst>
-            <pc:docMk/>
-            <pc:sldMk cId="2756963476" sldId="265"/>
-            <ac:spMk id="6" creationId="{D78388EA-CB70-8F00-61F6-CE1811B51CBF}"/>
-          </ac:spMkLst>
-        </pc:spChg>
-        <pc:picChg chg="add mod modCrop">
-          <ac:chgData name="Harry Wong" userId="2e681b20-ff61-411d-b970-54b741321bcd" providerId="ADAL" clId="{123CDF9E-882E-3B44-9B07-04379EF3E374}" dt="2025-07-15T14:37:55.046" v="447" actId="27614"/>
-          <ac:picMkLst>
-            <pc:docMk/>
-            <pc:sldMk cId="2756963476" sldId="265"/>
-            <ac:picMk id="3" creationId="{D617ACA3-8275-5777-0F14-786E33E1B124}"/>
-          </ac:picMkLst>
-        </pc:picChg>
-        <pc:picChg chg="del">
-          <ac:chgData name="Harry Wong" userId="2e681b20-ff61-411d-b970-54b741321bcd" providerId="ADAL" clId="{123CDF9E-882E-3B44-9B07-04379EF3E374}" dt="2025-07-15T14:36:59.544" v="442" actId="478"/>
-          <ac:picMkLst>
-            <pc:docMk/>
-            <pc:sldMk cId="2756963476" sldId="265"/>
-            <ac:picMk id="8" creationId="{13C7A039-91F6-A683-0C96-B98435A1CED3}"/>
-          </ac:picMkLst>
-        </pc:picChg>
-      </pc:sldChg>
-      <pc:sldChg chg="delSp modSp mod">
-        <pc:chgData name="Harry Wong" userId="2e681b20-ff61-411d-b970-54b741321bcd" providerId="ADAL" clId="{123CDF9E-882E-3B44-9B07-04379EF3E374}" dt="2025-07-15T14:28:21.870" v="384" actId="478"/>
-        <pc:sldMkLst>
-          <pc:docMk/>
-          <pc:sldMk cId="1753733377" sldId="267"/>
-        </pc:sldMkLst>
-        <pc:spChg chg="mod">
-          <ac:chgData name="Harry Wong" userId="2e681b20-ff61-411d-b970-54b741321bcd" providerId="ADAL" clId="{123CDF9E-882E-3B44-9B07-04379EF3E374}" dt="2025-07-15T14:21:52.336" v="327" actId="27636"/>
-          <ac:spMkLst>
-            <pc:docMk/>
-            <pc:sldMk cId="1753733377" sldId="267"/>
-            <ac:spMk id="4" creationId="{79950ACC-0F5A-CAB9-2829-2F29FEA2FEB3}"/>
-          </ac:spMkLst>
-        </pc:spChg>
-        <pc:spChg chg="mod">
-          <ac:chgData name="Harry Wong" userId="2e681b20-ff61-411d-b970-54b741321bcd" providerId="ADAL" clId="{123CDF9E-882E-3B44-9B07-04379EF3E374}" dt="2025-07-15T14:27:45.765" v="378"/>
-          <ac:spMkLst>
-            <pc:docMk/>
-            <pc:sldMk cId="1753733377" sldId="267"/>
-            <ac:spMk id="5" creationId="{9672301E-EF48-B60F-DB34-37D2994E90DD}"/>
-          </ac:spMkLst>
-        </pc:spChg>
-        <pc:spChg chg="del mod">
-          <ac:chgData name="Harry Wong" userId="2e681b20-ff61-411d-b970-54b741321bcd" providerId="ADAL" clId="{123CDF9E-882E-3B44-9B07-04379EF3E374}" dt="2025-07-15T14:28:21.870" v="384" actId="478"/>
-          <ac:spMkLst>
-            <pc:docMk/>
-            <pc:sldMk cId="1753733377" sldId="267"/>
-            <ac:spMk id="6" creationId="{D78388EA-CB70-8F00-61F6-CE1811B51CBF}"/>
-          </ac:spMkLst>
-        </pc:spChg>
-      </pc:sldChg>
-      <pc:sldChg chg="delSp modSp mod">
-        <pc:chgData name="Harry Wong" userId="2e681b20-ff61-411d-b970-54b741321bcd" providerId="ADAL" clId="{123CDF9E-882E-3B44-9B07-04379EF3E374}" dt="2025-07-15T14:28:25.797" v="385" actId="478"/>
-        <pc:sldMkLst>
-          <pc:docMk/>
-          <pc:sldMk cId="3602494886" sldId="268"/>
-        </pc:sldMkLst>
-        <pc:spChg chg="mod">
-          <ac:chgData name="Harry Wong" userId="2e681b20-ff61-411d-b970-54b741321bcd" providerId="ADAL" clId="{123CDF9E-882E-3B44-9B07-04379EF3E374}" dt="2025-07-15T14:20:16.387" v="317" actId="948"/>
-          <ac:spMkLst>
-            <pc:docMk/>
-            <pc:sldMk cId="3602494886" sldId="268"/>
-            <ac:spMk id="4" creationId="{79950ACC-0F5A-CAB9-2829-2F29FEA2FEB3}"/>
-          </ac:spMkLst>
-        </pc:spChg>
-        <pc:spChg chg="mod">
-          <ac:chgData name="Harry Wong" userId="2e681b20-ff61-411d-b970-54b741321bcd" providerId="ADAL" clId="{123CDF9E-882E-3B44-9B07-04379EF3E374}" dt="2025-07-15T14:27:45.765" v="378"/>
-          <ac:spMkLst>
-            <pc:docMk/>
-            <pc:sldMk cId="3602494886" sldId="268"/>
-            <ac:spMk id="5" creationId="{9672301E-EF48-B60F-DB34-37D2994E90DD}"/>
-          </ac:spMkLst>
-        </pc:spChg>
-        <pc:spChg chg="del mod">
-          <ac:chgData name="Harry Wong" userId="2e681b20-ff61-411d-b970-54b741321bcd" providerId="ADAL" clId="{123CDF9E-882E-3B44-9B07-04379EF3E374}" dt="2025-07-15T14:28:25.797" v="385" actId="478"/>
-          <ac:spMkLst>
-            <pc:docMk/>
-            <pc:sldMk cId="3602494886" sldId="268"/>
-            <ac:spMk id="6" creationId="{D78388EA-CB70-8F00-61F6-CE1811B51CBF}"/>
-          </ac:spMkLst>
-        </pc:spChg>
-      </pc:sldChg>
-      <pc:sldChg chg="delSp modSp add mod">
-        <pc:chgData name="Harry Wong" userId="2e681b20-ff61-411d-b970-54b741321bcd" providerId="ADAL" clId="{123CDF9E-882E-3B44-9B07-04379EF3E374}" dt="2025-07-15T14:28:30.965" v="386" actId="478"/>
-        <pc:sldMkLst>
-          <pc:docMk/>
-          <pc:sldMk cId="2417461542" sldId="269"/>
-        </pc:sldMkLst>
-        <pc:spChg chg="mod">
-          <ac:chgData name="Harry Wong" userId="2e681b20-ff61-411d-b970-54b741321bcd" providerId="ADAL" clId="{123CDF9E-882E-3B44-9B07-04379EF3E374}" dt="2025-07-15T14:13:12.679" v="80"/>
-          <ac:spMkLst>
-            <pc:docMk/>
-            <pc:sldMk cId="2417461542" sldId="269"/>
-            <ac:spMk id="2" creationId="{FE8D94D5-D614-2153-2D17-D952DF34F04F}"/>
-          </ac:spMkLst>
-        </pc:spChg>
-        <pc:spChg chg="mod">
-          <ac:chgData name="Harry Wong" userId="2e681b20-ff61-411d-b970-54b741321bcd" providerId="ADAL" clId="{123CDF9E-882E-3B44-9B07-04379EF3E374}" dt="2025-07-15T14:22:11.344" v="328" actId="948"/>
-          <ac:spMkLst>
-            <pc:docMk/>
-            <pc:sldMk cId="2417461542" sldId="269"/>
-            <ac:spMk id="4" creationId="{79950ACC-0F5A-CAB9-2829-2F29FEA2FEB3}"/>
-          </ac:spMkLst>
-        </pc:spChg>
-        <pc:spChg chg="mod">
-          <ac:chgData name="Harry Wong" userId="2e681b20-ff61-411d-b970-54b741321bcd" providerId="ADAL" clId="{123CDF9E-882E-3B44-9B07-04379EF3E374}" dt="2025-07-15T14:27:45.765" v="378"/>
-          <ac:spMkLst>
-            <pc:docMk/>
-            <pc:sldMk cId="2417461542" sldId="269"/>
-            <ac:spMk id="5" creationId="{9672301E-EF48-B60F-DB34-37D2994E90DD}"/>
-          </ac:spMkLst>
-        </pc:spChg>
-        <pc:spChg chg="del mod">
-          <ac:chgData name="Harry Wong" userId="2e681b20-ff61-411d-b970-54b741321bcd" providerId="ADAL" clId="{123CDF9E-882E-3B44-9B07-04379EF3E374}" dt="2025-07-15T14:28:30.965" v="386" actId="478"/>
-          <ac:spMkLst>
-            <pc:docMk/>
-            <pc:sldMk cId="2417461542" sldId="269"/>
-            <ac:spMk id="6" creationId="{D78388EA-CB70-8F00-61F6-CE1811B51CBF}"/>
-          </ac:spMkLst>
-        </pc:spChg>
-      </pc:sldChg>
-      <pc:sldChg chg="delSp modSp add mod">
-        <pc:chgData name="Harry Wong" userId="2e681b20-ff61-411d-b970-54b741321bcd" providerId="ADAL" clId="{123CDF9E-882E-3B44-9B07-04379EF3E374}" dt="2025-07-15T14:28:34.588" v="387" actId="478"/>
-        <pc:sldMkLst>
-          <pc:docMk/>
-          <pc:sldMk cId="3643409903" sldId="270"/>
-        </pc:sldMkLst>
-        <pc:spChg chg="mod">
-          <ac:chgData name="Harry Wong" userId="2e681b20-ff61-411d-b970-54b741321bcd" providerId="ADAL" clId="{123CDF9E-882E-3B44-9B07-04379EF3E374}" dt="2025-07-15T14:13:55.595" v="111" actId="20577"/>
-          <ac:spMkLst>
-            <pc:docMk/>
-            <pc:sldMk cId="3643409903" sldId="270"/>
-            <ac:spMk id="2" creationId="{FE8D94D5-D614-2153-2D17-D952DF34F04F}"/>
-          </ac:spMkLst>
-        </pc:spChg>
-        <pc:spChg chg="mod">
-          <ac:chgData name="Harry Wong" userId="2e681b20-ff61-411d-b970-54b741321bcd" providerId="ADAL" clId="{123CDF9E-882E-3B44-9B07-04379EF3E374}" dt="2025-07-15T14:22:55.610" v="354" actId="20577"/>
-          <ac:spMkLst>
-            <pc:docMk/>
-            <pc:sldMk cId="3643409903" sldId="270"/>
-            <ac:spMk id="4" creationId="{79950ACC-0F5A-CAB9-2829-2F29FEA2FEB3}"/>
-          </ac:spMkLst>
-        </pc:spChg>
-        <pc:spChg chg="mod">
-          <ac:chgData name="Harry Wong" userId="2e681b20-ff61-411d-b970-54b741321bcd" providerId="ADAL" clId="{123CDF9E-882E-3B44-9B07-04379EF3E374}" dt="2025-07-15T14:27:45.765" v="378"/>
-          <ac:spMkLst>
-            <pc:docMk/>
-            <pc:sldMk cId="3643409903" sldId="270"/>
-            <ac:spMk id="5" creationId="{9672301E-EF48-B60F-DB34-37D2994E90DD}"/>
-          </ac:spMkLst>
-        </pc:spChg>
-        <pc:spChg chg="del mod">
-          <ac:chgData name="Harry Wong" userId="2e681b20-ff61-411d-b970-54b741321bcd" providerId="ADAL" clId="{123CDF9E-882E-3B44-9B07-04379EF3E374}" dt="2025-07-15T14:28:34.588" v="387" actId="478"/>
-          <ac:spMkLst>
-            <pc:docMk/>
-            <pc:sldMk cId="3643409903" sldId="270"/>
-            <ac:spMk id="6" creationId="{D78388EA-CB70-8F00-61F6-CE1811B51CBF}"/>
-          </ac:spMkLst>
-        </pc:spChg>
-      </pc:sldChg>
-      <pc:sldChg chg="modSp new mod">
-        <pc:chgData name="Harry Wong" userId="2e681b20-ff61-411d-b970-54b741321bcd" providerId="ADAL" clId="{123CDF9E-882E-3B44-9B07-04379EF3E374}" dt="2025-07-15T14:23:55.977" v="363" actId="14100"/>
-        <pc:sldMkLst>
-          <pc:docMk/>
-          <pc:sldMk cId="2525084368" sldId="271"/>
-        </pc:sldMkLst>
-        <pc:spChg chg="mod">
-          <ac:chgData name="Harry Wong" userId="2e681b20-ff61-411d-b970-54b741321bcd" providerId="ADAL" clId="{123CDF9E-882E-3B44-9B07-04379EF3E374}" dt="2025-07-15T14:23:55.977" v="363" actId="14100"/>
-          <ac:spMkLst>
-            <pc:docMk/>
-            <pc:sldMk cId="2525084368" sldId="271"/>
-            <ac:spMk id="2" creationId="{D668C321-C2BD-0FAA-C48D-597D7738277F}"/>
-          </ac:spMkLst>
-        </pc:spChg>
-        <pc:spChg chg="mod">
-          <ac:chgData name="Harry Wong" userId="2e681b20-ff61-411d-b970-54b741321bcd" providerId="ADAL" clId="{123CDF9E-882E-3B44-9B07-04379EF3E374}" dt="2025-07-15T14:23:55.977" v="363" actId="14100"/>
-          <ac:spMkLst>
-            <pc:docMk/>
-            <pc:sldMk cId="2525084368" sldId="271"/>
-            <ac:spMk id="3" creationId="{85B6471F-7977-7A65-F5C2-2885469D4EF1}"/>
-          </ac:spMkLst>
-        </pc:spChg>
-      </pc:sldChg>
-      <pc:sldChg chg="new del">
-        <pc:chgData name="Harry Wong" userId="2e681b20-ff61-411d-b970-54b741321bcd" providerId="ADAL" clId="{123CDF9E-882E-3B44-9B07-04379EF3E374}" dt="2025-07-15T14:29:30.809" v="394" actId="2696"/>
-        <pc:sldMkLst>
-          <pc:docMk/>
-          <pc:sldMk cId="1807619364" sldId="272"/>
-        </pc:sldMkLst>
-      </pc:sldChg>
-      <pc:sldChg chg="delSp new del mod">
-        <pc:chgData name="Harry Wong" userId="2e681b20-ff61-411d-b970-54b741321bcd" providerId="ADAL" clId="{123CDF9E-882E-3B44-9B07-04379EF3E374}" dt="2025-07-15T14:29:24.808" v="392" actId="2696"/>
-        <pc:sldMkLst>
-          <pc:docMk/>
-          <pc:sldMk cId="2312042129" sldId="272"/>
-        </pc:sldMkLst>
-        <pc:spChg chg="del">
-          <ac:chgData name="Harry Wong" userId="2e681b20-ff61-411d-b970-54b741321bcd" providerId="ADAL" clId="{123CDF9E-882E-3B44-9B07-04379EF3E374}" dt="2025-07-15T14:29:22.980" v="391" actId="478"/>
-          <ac:spMkLst>
-            <pc:docMk/>
-            <pc:sldMk cId="2312042129" sldId="272"/>
-            <ac:spMk id="5" creationId="{4419252D-241B-4A04-B55B-4350CEA8D5D7}"/>
-          </ac:spMkLst>
-        </pc:spChg>
-      </pc:sldChg>
-      <pc:sldChg chg="modSp new del mod">
-        <pc:chgData name="Harry Wong" userId="2e681b20-ff61-411d-b970-54b741321bcd" providerId="ADAL" clId="{123CDF9E-882E-3B44-9B07-04379EF3E374}" dt="2025-07-15T14:31:23.742" v="441" actId="2696"/>
-        <pc:sldMkLst>
-          <pc:docMk/>
-          <pc:sldMk cId="2931135694" sldId="272"/>
-        </pc:sldMkLst>
-        <pc:spChg chg="mod">
-          <ac:chgData name="Harry Wong" userId="2e681b20-ff61-411d-b970-54b741321bcd" providerId="ADAL" clId="{123CDF9E-882E-3B44-9B07-04379EF3E374}" dt="2025-07-15T14:31:19.629" v="440" actId="5793"/>
-          <ac:spMkLst>
-            <pc:docMk/>
-            <pc:sldMk cId="2931135694" sldId="272"/>
-            <ac:spMk id="3" creationId="{F07010A5-4681-E45B-7577-176D876F7DA6}"/>
-          </ac:spMkLst>
-        </pc:spChg>
-      </pc:sldChg>
-      <pc:sldMasterChg chg="modSp mod modSldLayout">
-        <pc:chgData name="Harry Wong" userId="2e681b20-ff61-411d-b970-54b741321bcd" providerId="ADAL" clId="{123CDF9E-882E-3B44-9B07-04379EF3E374}" dt="2025-07-15T14:29:14.619" v="390"/>
-        <pc:sldMasterMkLst>
-          <pc:docMk/>
-          <pc:sldMasterMk cId="2089907493" sldId="2147483648"/>
-        </pc:sldMasterMkLst>
-        <pc:spChg chg="mod">
-          <ac:chgData name="Harry Wong" userId="2e681b20-ff61-411d-b970-54b741321bcd" providerId="ADAL" clId="{123CDF9E-882E-3B44-9B07-04379EF3E374}" dt="2025-07-15T14:17:00.926" v="302" actId="20577"/>
-          <ac:spMkLst>
-            <pc:docMk/>
-            <pc:sldMasterMk cId="2089907493" sldId="2147483648"/>
-            <ac:spMk id="3" creationId="{FB9EDDE8-1334-2126-E7DE-0E8F07211418}"/>
-          </ac:spMkLst>
-        </pc:spChg>
-        <pc:sldLayoutChg chg="addSp delSp modSp mod">
-          <pc:chgData name="Harry Wong" userId="2e681b20-ff61-411d-b970-54b741321bcd" providerId="ADAL" clId="{123CDF9E-882E-3B44-9B07-04379EF3E374}" dt="2025-07-15T14:29:14.619" v="390"/>
-          <pc:sldLayoutMkLst>
-            <pc:docMk/>
-            <pc:sldMasterMk cId="2089907493" sldId="2147483648"/>
-            <pc:sldLayoutMk cId="1320421244" sldId="2147483650"/>
-          </pc:sldLayoutMkLst>
-          <pc:spChg chg="mod">
-            <ac:chgData name="Harry Wong" userId="2e681b20-ff61-411d-b970-54b741321bcd" providerId="ADAL" clId="{123CDF9E-882E-3B44-9B07-04379EF3E374}" dt="2025-07-15T14:16:56.377" v="296" actId="20577"/>
-            <ac:spMkLst>
-              <pc:docMk/>
-              <pc:sldMasterMk cId="2089907493" sldId="2147483648"/>
-              <pc:sldLayoutMk cId="1320421244" sldId="2147483650"/>
-              <ac:spMk id="3" creationId="{E32F9BB0-EA3E-BD17-BAFE-A4343D3BF292}"/>
-            </ac:spMkLst>
-          </pc:spChg>
-          <pc:spChg chg="del">
-            <ac:chgData name="Harry Wong" userId="2e681b20-ff61-411d-b970-54b741321bcd" providerId="ADAL" clId="{123CDF9E-882E-3B44-9B07-04379EF3E374}" dt="2025-07-15T14:29:14.165" v="389" actId="478"/>
-            <ac:spMkLst>
-              <pc:docMk/>
-              <pc:sldMasterMk cId="2089907493" sldId="2147483648"/>
-              <pc:sldLayoutMk cId="1320421244" sldId="2147483650"/>
-              <ac:spMk id="5" creationId="{1B937E3B-D5AC-8C48-14A0-D4F79AE50388}"/>
-            </ac:spMkLst>
-          </pc:spChg>
-          <pc:picChg chg="add mod">
-            <ac:chgData name="Harry Wong" userId="2e681b20-ff61-411d-b970-54b741321bcd" providerId="ADAL" clId="{123CDF9E-882E-3B44-9B07-04379EF3E374}" dt="2025-07-15T14:29:14.619" v="390"/>
-            <ac:picMkLst>
-              <pc:docMk/>
-              <pc:sldMasterMk cId="2089907493" sldId="2147483648"/>
-              <pc:sldLayoutMk cId="1320421244" sldId="2147483650"/>
-              <ac:picMk id="13" creationId="{CDECAD2C-9B1C-3133-CA75-E50BAD194820}"/>
-            </ac:picMkLst>
-          </pc:picChg>
-        </pc:sldLayoutChg>
-        <pc:sldLayoutChg chg="addSp delSp modSp mod">
-          <pc:chgData name="Harry Wong" userId="2e681b20-ff61-411d-b970-54b741321bcd" providerId="ADAL" clId="{123CDF9E-882E-3B44-9B07-04379EF3E374}" dt="2025-07-15T14:27:54.975" v="380" actId="478"/>
-          <pc:sldLayoutMkLst>
-            <pc:docMk/>
-            <pc:sldMasterMk cId="2089907493" sldId="2147483648"/>
-            <pc:sldLayoutMk cId="1051143862" sldId="2147483656"/>
-          </pc:sldLayoutMkLst>
-          <pc:spChg chg="mod">
-            <ac:chgData name="Harry Wong" userId="2e681b20-ff61-411d-b970-54b741321bcd" providerId="ADAL" clId="{123CDF9E-882E-3B44-9B07-04379EF3E374}" dt="2025-07-15T14:21:27.930" v="323" actId="948"/>
-            <ac:spMkLst>
-              <pc:docMk/>
-              <pc:sldMasterMk cId="2089907493" sldId="2147483648"/>
-              <pc:sldLayoutMk cId="1051143862" sldId="2147483656"/>
-              <ac:spMk id="3" creationId="{01149384-F35F-5270-79AC-A8F5DCD56C27}"/>
-            </ac:spMkLst>
-          </pc:spChg>
-          <pc:spChg chg="del">
-            <ac:chgData name="Harry Wong" userId="2e681b20-ff61-411d-b970-54b741321bcd" providerId="ADAL" clId="{123CDF9E-882E-3B44-9B07-04379EF3E374}" dt="2025-07-15T14:27:45.765" v="378"/>
-            <ac:spMkLst>
-              <pc:docMk/>
-              <pc:sldMasterMk cId="2089907493" sldId="2147483648"/>
-              <pc:sldLayoutMk cId="1051143862" sldId="2147483656"/>
-              <ac:spMk id="5" creationId="{A4A7EABD-2894-EDD0-1582-FFB5CE9E1174}"/>
-            </ac:spMkLst>
-          </pc:spChg>
-          <pc:spChg chg="del mod">
-            <ac:chgData name="Harry Wong" userId="2e681b20-ff61-411d-b970-54b741321bcd" providerId="ADAL" clId="{123CDF9E-882E-3B44-9B07-04379EF3E374}" dt="2025-07-15T14:27:45.765" v="378"/>
-            <ac:spMkLst>
-              <pc:docMk/>
-              <pc:sldMasterMk cId="2089907493" sldId="2147483648"/>
-              <pc:sldLayoutMk cId="1051143862" sldId="2147483656"/>
-              <ac:spMk id="6" creationId="{8182BCA0-0CCB-7785-4554-6E5DE20D6B0C}"/>
-            </ac:spMkLst>
-          </pc:spChg>
-          <pc:spChg chg="del">
-            <ac:chgData name="Harry Wong" userId="2e681b20-ff61-411d-b970-54b741321bcd" providerId="ADAL" clId="{123CDF9E-882E-3B44-9B07-04379EF3E374}" dt="2025-07-15T14:27:45.765" v="378"/>
-            <ac:spMkLst>
-              <pc:docMk/>
-              <pc:sldMasterMk cId="2089907493" sldId="2147483648"/>
-              <pc:sldLayoutMk cId="1051143862" sldId="2147483656"/>
-              <ac:spMk id="7" creationId="{A33EBBDC-188D-4C5F-1B7B-7724CF7359FE}"/>
-            </ac:spMkLst>
-          </pc:spChg>
-          <pc:spChg chg="add mod">
-            <ac:chgData name="Harry Wong" userId="2e681b20-ff61-411d-b970-54b741321bcd" providerId="ADAL" clId="{123CDF9E-882E-3B44-9B07-04379EF3E374}" dt="2025-07-15T14:27:49.698" v="379"/>
-            <ac:spMkLst>
-              <pc:docMk/>
-              <pc:sldMasterMk cId="2089907493" sldId="2147483648"/>
-              <pc:sldLayoutMk cId="1051143862" sldId="2147483656"/>
-              <ac:spMk id="15" creationId="{3B354B9C-3CAE-C62A-599D-822460398899}"/>
-            </ac:spMkLst>
-          </pc:spChg>
-          <pc:spChg chg="add del mod">
-            <ac:chgData name="Harry Wong" userId="2e681b20-ff61-411d-b970-54b741321bcd" providerId="ADAL" clId="{123CDF9E-882E-3B44-9B07-04379EF3E374}" dt="2025-07-15T14:27:54.975" v="380" actId="478"/>
-            <ac:spMkLst>
-              <pc:docMk/>
-              <pc:sldMasterMk cId="2089907493" sldId="2147483648"/>
-              <pc:sldLayoutMk cId="1051143862" sldId="2147483656"/>
-              <ac:spMk id="16" creationId="{F7966C9A-E159-5A57-03FE-A1FB626E2600}"/>
-            </ac:spMkLst>
-          </pc:spChg>
-          <pc:spChg chg="add mod">
-            <ac:chgData name="Harry Wong" userId="2e681b20-ff61-411d-b970-54b741321bcd" providerId="ADAL" clId="{123CDF9E-882E-3B44-9B07-04379EF3E374}" dt="2025-07-15T14:27:49.698" v="379"/>
-            <ac:spMkLst>
-              <pc:docMk/>
-              <pc:sldMasterMk cId="2089907493" sldId="2147483648"/>
-              <pc:sldLayoutMk cId="1051143862" sldId="2147483656"/>
-              <ac:spMk id="17" creationId="{E501D1DD-1FF5-FD76-E030-4C75B8BA53EE}"/>
-            </ac:spMkLst>
-          </pc:spChg>
-          <pc:picChg chg="add mod">
-            <ac:chgData name="Harry Wong" userId="2e681b20-ff61-411d-b970-54b741321bcd" providerId="ADAL" clId="{123CDF9E-882E-3B44-9B07-04379EF3E374}" dt="2025-07-15T14:26:56.227" v="377" actId="1076"/>
-            <ac:picMkLst>
-              <pc:docMk/>
-              <pc:sldMasterMk cId="2089907493" sldId="2147483648"/>
-              <pc:sldLayoutMk cId="1051143862" sldId="2147483656"/>
-              <ac:picMk id="14" creationId="{E20550B4-0769-0D89-3F88-3A767EAC599E}"/>
-            </ac:picMkLst>
-          </pc:picChg>
-        </pc:sldLayoutChg>
-      </pc:sldMasterChg>
-    </pc:docChg>
-  </pc:docChgLst>
-</pc:chgInfo>
-</file>
-
-<file path=ppt/handoutMasters/handoutMaster1.xml><?xml version="1.0" encoding="utf-8"?>
-<p:handoutMaster xmlns:a="http://schemas.openxmlformats.org/drawingml/2006/main" xmlns:r="http://schemas.openxmlformats.org/officeDocument/2006/relationships" xmlns:p="http://schemas.openxmlformats.org/presentationml/2006/main">
-  <p:cSld>
-    <p:bg>
-      <p:bgRef idx="1001">
-        <a:schemeClr val="bg1"/>
-      </p:bgRef>
-    </p:bg>
-    <p:spTree>
-      <p:nvGrpSpPr>
-        <p:cNvPr id="1" name=""/>
-        <p:cNvGrpSpPr/>
-        <p:nvPr/>
-      </p:nvGrpSpPr>
-      <p:grpSpPr>
-        <a:xfrm>
-          <a:off x="0" y="0"/>
-          <a:ext cx="0" cy="0"/>
-          <a:chOff x="0" y="0"/>
-          <a:chExt cx="0" cy="0"/>
-        </a:xfrm>
-      </p:grpSpPr>
-      <p:sp>
-        <p:nvSpPr>
-          <p:cNvPr id="2" name="Header Placeholder 1">
-            <a:extLst>
-              <a:ext uri="{FF2B5EF4-FFF2-40B4-BE49-F238E27FC236}">
-                <a16:creationId xmlns:a16="http://schemas.microsoft.com/office/drawing/2014/main" id="{108C673E-F4EF-4987-0665-52E84149E7CA}"/>
-              </a:ext>
-            </a:extLst>
-          </p:cNvPr>
-          <p:cNvSpPr>
-            <a:spLocks noGrp="1"/>
-          </p:cNvSpPr>
-          <p:nvPr>
-            <p:ph type="hdr" sz="quarter"/>
-          </p:nvPr>
-        </p:nvSpPr>
-        <p:spPr>
-          <a:xfrm>
-            <a:off x="0" y="0"/>
-            <a:ext cx="2971800" cy="458788"/>
-          </a:xfrm>
-          <a:prstGeom prst="rect">
-            <a:avLst/>
-          </a:prstGeom>
-        </p:spPr>
-        <p:txBody>
-          <a:bodyPr vert="horz" lIns="91440" tIns="45720" rIns="91440" bIns="45720" rtlCol="0"/>
-          <a:lstStyle>
-            <a:lvl1pPr algn="l">
-              <a:defRPr sz="1200"/>
-            </a:lvl1pPr>
-          </a:lstStyle>
-          <a:p>
-            <a:endParaRPr lang="es-ES_tradnl"/>
-          </a:p>
-        </p:txBody>
-      </p:sp>
-      <p:sp>
-        <p:nvSpPr>
-          <p:cNvPr id="3" name="Date Placeholder 2">
-            <a:extLst>
-              <a:ext uri="{FF2B5EF4-FFF2-40B4-BE49-F238E27FC236}">
-                <a16:creationId xmlns:a16="http://schemas.microsoft.com/office/drawing/2014/main" id="{427C6984-A549-84BC-E46A-DBD7DB693E1E}"/>
-              </a:ext>
-            </a:extLst>
-          </p:cNvPr>
-          <p:cNvSpPr>
-            <a:spLocks noGrp="1"/>
-          </p:cNvSpPr>
-          <p:nvPr>
-            <p:ph type="dt" sz="quarter" idx="1"/>
-          </p:nvPr>
-        </p:nvSpPr>
-        <p:spPr>
-          <a:xfrm>
-            <a:off x="3884613" y="0"/>
-            <a:ext cx="2971800" cy="458788"/>
-          </a:xfrm>
-          <a:prstGeom prst="rect">
-            <a:avLst/>
-          </a:prstGeom>
-        </p:spPr>
-        <p:txBody>
-          <a:bodyPr vert="horz" lIns="91440" tIns="45720" rIns="91440" bIns="45720" rtlCol="0"/>
-          <a:lstStyle>
-            <a:lvl1pPr algn="r">
-              <a:defRPr sz="1200"/>
-            </a:lvl1pPr>
-          </a:lstStyle>
-          <a:p>
-            <a:fld id="{A13ED924-FA48-FD45-A084-FE8A0F93E5F4}" type="datetimeFigureOut">
-              <a:rPr lang="es-ES_tradnl" smtClean="0"/>
-              <a:t>15/7/25</a:t>
-            </a:fld>
-            <a:endParaRPr lang="es-ES_tradnl"/>
-          </a:p>
-        </p:txBody>
-      </p:sp>
-      <p:sp>
-        <p:nvSpPr>
-          <p:cNvPr id="4" name="Footer Placeholder 3">
-            <a:extLst>
-              <a:ext uri="{FF2B5EF4-FFF2-40B4-BE49-F238E27FC236}">
-                <a16:creationId xmlns:a16="http://schemas.microsoft.com/office/drawing/2014/main" id="{1A1ECC92-9ADA-3086-37D2-766BEEA89C07}"/>
-              </a:ext>
-            </a:extLst>
-          </p:cNvPr>
-          <p:cNvSpPr>
-            <a:spLocks noGrp="1"/>
-          </p:cNvSpPr>
-          <p:nvPr>
-            <p:ph type="ftr" sz="quarter" idx="2"/>
-          </p:nvPr>
-        </p:nvSpPr>
-        <p:spPr>
-          <a:xfrm>
-            <a:off x="0" y="8685213"/>
-            <a:ext cx="2971800" cy="458787"/>
-          </a:xfrm>
-          <a:prstGeom prst="rect">
-            <a:avLst/>
-          </a:prstGeom>
-        </p:spPr>
-        <p:txBody>
-          <a:bodyPr vert="horz" lIns="91440" tIns="45720" rIns="91440" bIns="45720" rtlCol="0" anchor="b"/>
-          <a:lstStyle>
-            <a:lvl1pPr algn="l">
-              <a:defRPr sz="1200"/>
-            </a:lvl1pPr>
-          </a:lstStyle>
-          <a:p>
-            <a:endParaRPr lang="es-ES_tradnl"/>
-          </a:p>
-        </p:txBody>
-      </p:sp>
-      <p:sp>
-        <p:nvSpPr>
-          <p:cNvPr id="5" name="Slide Number Placeholder 4">
-            <a:extLst>
-              <a:ext uri="{FF2B5EF4-FFF2-40B4-BE49-F238E27FC236}">
-                <a16:creationId xmlns:a16="http://schemas.microsoft.com/office/drawing/2014/main" id="{3EDA593A-C0DF-B01B-0F63-F155F29B9A04}"/>
-              </a:ext>
-            </a:extLst>
-          </p:cNvPr>
-          <p:cNvSpPr>
-            <a:spLocks noGrp="1"/>
-          </p:cNvSpPr>
-          <p:nvPr>
-            <p:ph type="sldNum" sz="quarter" idx="3"/>
-          </p:nvPr>
-        </p:nvSpPr>
-        <p:spPr>
-          <a:xfrm>
-            <a:off x="3884613" y="8685213"/>
-            <a:ext cx="2971800" cy="458787"/>
-          </a:xfrm>
-          <a:prstGeom prst="rect">
-            <a:avLst/>
-          </a:prstGeom>
-        </p:spPr>
-        <p:txBody>
-          <a:bodyPr vert="horz" lIns="91440" tIns="45720" rIns="91440" bIns="45720" rtlCol="0" anchor="b"/>
-          <a:lstStyle>
-            <a:lvl1pPr algn="r">
-              <a:defRPr sz="1200"/>
-            </a:lvl1pPr>
-          </a:lstStyle>
-          <a:p>
-            <a:fld id="{9A0E5C3F-5CA7-5046-95D5-E2C6EBEE4CEF}" type="slidenum">
-              <a:rPr lang="es-ES_tradnl" smtClean="0"/>
-              <a:t>‹#›</a:t>
-            </a:fld>
-            <a:endParaRPr lang="es-ES_tradnl"/>
-          </a:p>
-        </p:txBody>
-      </p:sp>
-    </p:spTree>
-    <p:extLst>
-      <p:ext uri="{BB962C8B-B14F-4D97-AF65-F5344CB8AC3E}">
-        <p14:creationId xmlns:p14="http://schemas.microsoft.com/office/powerpoint/2010/main" val="224327709"/>
-      </p:ext>
-    </p:extLst>
-  </p:cSld>
-  <p:clrMap bg1="lt1" tx1="dk1" bg2="lt2" tx2="dk2" accent1="accent1" accent2="accent2" accent3="accent3" accent4="accent4" accent5="accent5" accent6="accent6" hlink="hlink" folHlink="folHlink"/>
-</p:handoutMaster>
 </file>
 
 <file path=ppt/notesMasters/notesMaster1.xml><?xml version="1.0" encoding="utf-8"?>
@@ -853,7 +195,7 @@
             </a:lvl1pPr>
           </a:lstStyle>
           <a:p>
-            <a:fld id="{CA5846D4-FBD3-D544-A1F2-7C824B734CCB}" type="datetimeFigureOut">
+            <a:fld id="{C8EFA971-E10A-0741-BD2D-2AB7CE1C478F}" type="datetimeFigureOut">
               <a:rPr lang="es-ES_tradnl" smtClean="0"/>
               <a:t>15/7/25</a:t>
             </a:fld>
@@ -1012,7 +354,7 @@
             </a:lvl1pPr>
           </a:lstStyle>
           <a:p>
-            <a:fld id="{486CD419-2AC2-0C44-AAD7-69EAB9D87D10}" type="slidenum">
+            <a:fld id="{4F9615BB-1E5B-A943-8493-18217B9CBEC2}" type="slidenum">
               <a:rPr lang="es-ES_tradnl" smtClean="0"/>
               <a:t>‹#›</a:t>
             </a:fld>
@@ -1023,7 +365,7 @@
     </p:spTree>
     <p:extLst>
       <p:ext uri="{BB962C8B-B14F-4D97-AF65-F5344CB8AC3E}">
-        <p14:creationId xmlns:p14="http://schemas.microsoft.com/office/powerpoint/2010/main" val="4072552346"/>
+        <p14:creationId xmlns:p14="http://schemas.microsoft.com/office/powerpoint/2010/main" val="469427383"/>
       </p:ext>
     </p:extLst>
   </p:cSld>
@@ -1123,90 +465,6 @@
 </p:notesMaster>
 </file>
 
-<file path=ppt/notesSlides/notesSlide1.xml><?xml version="1.0" encoding="utf-8"?>
-<p:notes xmlns:a="http://schemas.openxmlformats.org/drawingml/2006/main" xmlns:r="http://schemas.openxmlformats.org/officeDocument/2006/relationships" xmlns:p="http://schemas.openxmlformats.org/presentationml/2006/main">
-  <p:cSld>
-    <p:spTree>
-      <p:nvGrpSpPr>
-        <p:cNvPr id="1" name=""/>
-        <p:cNvGrpSpPr/>
-        <p:nvPr/>
-      </p:nvGrpSpPr>
-      <p:grpSpPr>
-        <a:xfrm>
-          <a:off x="0" y="0"/>
-          <a:ext cx="0" cy="0"/>
-          <a:chOff x="0" y="0"/>
-          <a:chExt cx="0" cy="0"/>
-        </a:xfrm>
-      </p:grpSpPr>
-      <p:sp>
-        <p:nvSpPr>
-          <p:cNvPr id="2" name="Slide Image Placeholder 1"/>
-          <p:cNvSpPr>
-            <a:spLocks noGrp="1" noRot="1" noChangeAspect="1"/>
-          </p:cNvSpPr>
-          <p:nvPr>
-            <p:ph type="sldImg"/>
-          </p:nvPr>
-        </p:nvSpPr>
-        <p:spPr/>
-      </p:sp>
-      <p:sp>
-        <p:nvSpPr>
-          <p:cNvPr id="3" name="Notes Placeholder 2"/>
-          <p:cNvSpPr>
-            <a:spLocks noGrp="1"/>
-          </p:cNvSpPr>
-          <p:nvPr>
-            <p:ph type="body" idx="1"/>
-          </p:nvPr>
-        </p:nvSpPr>
-        <p:spPr/>
-        <p:txBody>
-          <a:bodyPr/>
-          <a:lstStyle/>
-          <a:p>
-            <a:endParaRPr lang="es-ES_tradnl"/>
-          </a:p>
-        </p:txBody>
-      </p:sp>
-      <p:sp>
-        <p:nvSpPr>
-          <p:cNvPr id="4" name="Slide Number Placeholder 3"/>
-          <p:cNvSpPr>
-            <a:spLocks noGrp="1"/>
-          </p:cNvSpPr>
-          <p:nvPr>
-            <p:ph type="sldNum" sz="quarter" idx="5"/>
-          </p:nvPr>
-        </p:nvSpPr>
-        <p:spPr/>
-        <p:txBody>
-          <a:bodyPr/>
-          <a:lstStyle/>
-          <a:p>
-            <a:fld id="{486CD419-2AC2-0C44-AAD7-69EAB9D87D10}" type="slidenum">
-              <a:rPr lang="es-ES_tradnl" smtClean="0"/>
-              <a:t>1</a:t>
-            </a:fld>
-            <a:endParaRPr lang="es-ES_tradnl"/>
-          </a:p>
-        </p:txBody>
-      </p:sp>
-    </p:spTree>
-    <p:extLst>
-      <p:ext uri="{BB962C8B-B14F-4D97-AF65-F5344CB8AC3E}">
-        <p14:creationId xmlns:p14="http://schemas.microsoft.com/office/powerpoint/2010/main" val="2605003253"/>
-      </p:ext>
-    </p:extLst>
-  </p:cSld>
-  <p:clrMapOvr>
-    <a:masterClrMapping/>
-  </p:clrMapOvr>
-</p:notes>
-</file>
-
 <file path=ppt/slideLayouts/slideLayout1.xml><?xml version="1.0" encoding="utf-8"?>
 <p:sldLayout xmlns:a="http://schemas.openxmlformats.org/drawingml/2006/main" xmlns:r="http://schemas.openxmlformats.org/officeDocument/2006/relationships" xmlns:p="http://schemas.openxmlformats.org/presentationml/2006/main" type="title" preserve="1">
   <p:cSld name="Title Slide">
@@ -1242,7 +500,7 @@
         </p:nvSpPr>
         <p:spPr>
           <a:xfrm>
-            <a:off x="1706880" y="1825303"/>
+            <a:off x="1524000" y="1122363"/>
             <a:ext cx="9144000" cy="2012828"/>
           </a:xfrm>
           <a:noFill/>
@@ -1294,7 +552,7 @@
         </p:nvSpPr>
         <p:spPr>
           <a:xfrm>
-            <a:off x="1706880" y="4022662"/>
+            <a:off x="1524000" y="3602038"/>
             <a:ext cx="9144000" cy="977673"/>
           </a:xfrm>
           <a:noFill/>
@@ -1336,10 +594,39 @@
       </p:sp>
       <p:sp>
         <p:nvSpPr>
-          <p:cNvPr id="8" name="Footer Placeholder 7">
-            <a:extLst>
-              <a:ext uri="{FF2B5EF4-FFF2-40B4-BE49-F238E27FC236}">
-                <a16:creationId xmlns:a16="http://schemas.microsoft.com/office/drawing/2014/main" id="{CB524822-CB7B-FC7E-2404-82996A22850D}"/>
+          <p:cNvPr id="4" name="Date Placeholder 3">
+            <a:extLst>
+              <a:ext uri="{FF2B5EF4-FFF2-40B4-BE49-F238E27FC236}">
+                <a16:creationId xmlns:a16="http://schemas.microsoft.com/office/drawing/2014/main" id="{3951F4BD-3073-722F-7555-406DCDAB64B4}"/>
+              </a:ext>
+            </a:extLst>
+          </p:cNvPr>
+          <p:cNvSpPr>
+            <a:spLocks noGrp="1"/>
+          </p:cNvSpPr>
+          <p:nvPr>
+            <p:ph type="dt" sz="half" idx="10"/>
+          </p:nvPr>
+        </p:nvSpPr>
+        <p:spPr/>
+        <p:txBody>
+          <a:bodyPr/>
+          <a:lstStyle/>
+          <a:p>
+            <a:fld id="{C49094DD-B55B-7F4B-A5B2-E692F59DAF2C}" type="datetime1">
+              <a:rPr lang="en-US" smtClean="0"/>
+              <a:t>7/15/25</a:t>
+            </a:fld>
+            <a:endParaRPr lang="es-ES_tradnl"/>
+          </a:p>
+        </p:txBody>
+      </p:sp>
+      <p:sp>
+        <p:nvSpPr>
+          <p:cNvPr id="5" name="Footer Placeholder 4">
+            <a:extLst>
+              <a:ext uri="{FF2B5EF4-FFF2-40B4-BE49-F238E27FC236}">
+                <a16:creationId xmlns:a16="http://schemas.microsoft.com/office/drawing/2014/main" id="{A04809B3-AC15-5574-1A77-3FB70953012B}"/>
               </a:ext>
             </a:extLst>
           </p:cNvPr>
@@ -1353,29 +640,18 @@
         <p:spPr/>
         <p:txBody>
           <a:bodyPr/>
-          <a:lstStyle>
-            <a:lvl1pPr>
-              <a:defRPr>
-                <a:solidFill>
-                  <a:schemeClr val="bg2"/>
-                </a:solidFill>
-              </a:defRPr>
-            </a:lvl1pPr>
-          </a:lstStyle>
-          <a:p>
-            <a:r>
-              <a:rPr lang="es-ES_tradnl"/>
-              <a:t>Ingenium</a:t>
-            </a:r>
-          </a:p>
-        </p:txBody>
-      </p:sp>
-      <p:sp>
-        <p:nvSpPr>
-          <p:cNvPr id="9" name="Slide Number Placeholder 8">
-            <a:extLst>
-              <a:ext uri="{FF2B5EF4-FFF2-40B4-BE49-F238E27FC236}">
-                <a16:creationId xmlns:a16="http://schemas.microsoft.com/office/drawing/2014/main" id="{608217A0-397B-107A-9CCE-651AC46B3160}"/>
+          <a:lstStyle/>
+          <a:p>
+            <a:endParaRPr lang="es-ES_tradnl"/>
+          </a:p>
+        </p:txBody>
+      </p:sp>
+      <p:sp>
+        <p:nvSpPr>
+          <p:cNvPr id="6" name="Slide Number Placeholder 5">
+            <a:extLst>
+              <a:ext uri="{FF2B5EF4-FFF2-40B4-BE49-F238E27FC236}">
+                <a16:creationId xmlns:a16="http://schemas.microsoft.com/office/drawing/2014/main" id="{3285F335-6627-18A7-78E6-E3B3D2C21AD5}"/>
               </a:ext>
             </a:extLst>
           </p:cNvPr>
@@ -1389,58 +665,11 @@
         <p:spPr/>
         <p:txBody>
           <a:bodyPr/>
-          <a:lstStyle>
-            <a:lvl1pPr>
-              <a:defRPr>
-                <a:solidFill>
-                  <a:schemeClr val="bg2"/>
-                </a:solidFill>
-              </a:defRPr>
-            </a:lvl1pPr>
-          </a:lstStyle>
+          <a:lstStyle/>
           <a:p>
             <a:fld id="{6BB51704-6A52-C541-97EE-403D3BD20477}" type="slidenum">
               <a:rPr lang="es-ES_tradnl" smtClean="0"/>
-              <a:pPr/>
               <a:t>‹#›</a:t>
-            </a:fld>
-            <a:endParaRPr lang="es-ES_tradnl"/>
-          </a:p>
-        </p:txBody>
-      </p:sp>
-      <p:sp>
-        <p:nvSpPr>
-          <p:cNvPr id="7" name="Date Placeholder 6">
-            <a:extLst>
-              <a:ext uri="{FF2B5EF4-FFF2-40B4-BE49-F238E27FC236}">
-                <a16:creationId xmlns:a16="http://schemas.microsoft.com/office/drawing/2014/main" id="{9F898758-5BC9-6838-2E0B-887AA6CB820D}"/>
-              </a:ext>
-            </a:extLst>
-          </p:cNvPr>
-          <p:cNvSpPr>
-            <a:spLocks noGrp="1"/>
-          </p:cNvSpPr>
-          <p:nvPr>
-            <p:ph type="dt" sz="half" idx="10"/>
-          </p:nvPr>
-        </p:nvSpPr>
-        <p:spPr/>
-        <p:txBody>
-          <a:bodyPr/>
-          <a:lstStyle>
-            <a:lvl1pPr>
-              <a:defRPr>
-                <a:solidFill>
-                  <a:schemeClr val="bg2"/>
-                </a:solidFill>
-              </a:defRPr>
-            </a:lvl1pPr>
-          </a:lstStyle>
-          <a:p>
-            <a:fld id="{73C353E2-1D1E-3C44-9059-74339D5B6573}" type="datetime1">
-              <a:rPr lang="en-US" smtClean="0"/>
-              <a:pPr/>
-              <a:t>7/15/25</a:t>
             </a:fld>
             <a:endParaRPr lang="es-ES_tradnl"/>
           </a:p>
@@ -1584,7 +813,7 @@
           <a:bodyPr/>
           <a:lstStyle/>
           <a:p>
-            <a:fld id="{6311FD5F-8220-484F-8FE1-97EF4D1D9BCF}" type="datetime1">
+            <a:fld id="{F2E5A317-3188-074C-8563-59F08D746E4E}" type="datetime1">
               <a:rPr lang="en-US" smtClean="0"/>
               <a:t>7/15/25</a:t>
             </a:fld>
@@ -1613,10 +842,7 @@
           <a:bodyPr/>
           <a:lstStyle/>
           <a:p>
-            <a:r>
-              <a:rPr lang="es-ES_tradnl"/>
-              <a:t>Ingenium</a:t>
-            </a:r>
+            <a:endParaRPr lang="es-ES_tradnl"/>
           </a:p>
         </p:txBody>
       </p:sp>
@@ -1797,7 +1023,7 @@
           <a:bodyPr/>
           <a:lstStyle/>
           <a:p>
-            <a:fld id="{489BEBC9-FEB9-504E-B566-1357E4CD628F}" type="datetime1">
+            <a:fld id="{4923BAEB-6635-254F-BA1B-8812CDD260FC}" type="datetime1">
               <a:rPr lang="en-US" smtClean="0"/>
               <a:t>7/15/25</a:t>
             </a:fld>
@@ -1826,10 +1052,7 @@
           <a:bodyPr/>
           <a:lstStyle/>
           <a:p>
-            <a:r>
-              <a:rPr lang="es-ES_tradnl"/>
-              <a:t>Ingenium</a:t>
-            </a:r>
+            <a:endParaRPr lang="es-ES_tradnl"/>
           </a:p>
         </p:txBody>
       </p:sp>
@@ -2342,10 +1565,35 @@
           <a:bodyPr/>
           <a:lstStyle/>
           <a:p>
-            <a:fld id="{9FCC52B0-1CA0-CC49-8AA2-0791B411A50A}" type="datetime1">
+            <a:fld id="{2907CEA2-551B-A943-8B79-C7BB6DD06422}" type="datetime1">
               <a:rPr lang="en-US" smtClean="0"/>
               <a:t>7/15/25</a:t>
             </a:fld>
+            <a:endParaRPr lang="es-ES_tradnl"/>
+          </a:p>
+        </p:txBody>
+      </p:sp>
+      <p:sp>
+        <p:nvSpPr>
+          <p:cNvPr id="5" name="Footer Placeholder 4">
+            <a:extLst>
+              <a:ext uri="{FF2B5EF4-FFF2-40B4-BE49-F238E27FC236}">
+                <a16:creationId xmlns:a16="http://schemas.microsoft.com/office/drawing/2014/main" id="{1B937E3B-D5AC-8C48-14A0-D4F79AE50388}"/>
+              </a:ext>
+            </a:extLst>
+          </p:cNvPr>
+          <p:cNvSpPr>
+            <a:spLocks noGrp="1"/>
+          </p:cNvSpPr>
+          <p:nvPr>
+            <p:ph type="ftr" sz="quarter" idx="11"/>
+          </p:nvPr>
+        </p:nvSpPr>
+        <p:spPr/>
+        <p:txBody>
+          <a:bodyPr/>
+          <a:lstStyle/>
+          <a:p>
             <a:endParaRPr lang="es-ES_tradnl"/>
           </a:p>
         </p:txBody>
@@ -2384,7 +1632,7 @@
           <p:cNvPr id="13" name="Imagen 23">
             <a:extLst>
               <a:ext uri="{FF2B5EF4-FFF2-40B4-BE49-F238E27FC236}">
-                <a16:creationId xmlns:a16="http://schemas.microsoft.com/office/drawing/2014/main" id="{CDECAD2C-9B1C-3133-CA75-E50BAD194820}"/>
+                <a16:creationId xmlns:a16="http://schemas.microsoft.com/office/drawing/2014/main" id="{39F38E34-308F-C080-3D9C-F9EC60CE9CB7}"/>
               </a:ext>
             </a:extLst>
           </p:cNvPr>
@@ -2623,7 +1871,7 @@
           <a:bodyPr/>
           <a:lstStyle/>
           <a:p>
-            <a:fld id="{7DE9EE8B-7C09-8C47-892B-975968B0F5B5}" type="datetime1">
+            <a:fld id="{27948D28-D639-714A-AD66-9BEF7F4C6B2D}" type="datetime1">
               <a:rPr lang="en-US" smtClean="0"/>
               <a:t>7/15/25</a:t>
             </a:fld>
@@ -2652,10 +1900,7 @@
           <a:bodyPr/>
           <a:lstStyle/>
           <a:p>
-            <a:r>
-              <a:rPr lang="es-ES_tradnl"/>
-              <a:t>Ingenium</a:t>
-            </a:r>
+            <a:endParaRPr lang="es-ES_tradnl"/>
           </a:p>
         </p:txBody>
       </p:sp>
@@ -2894,7 +2139,7 @@
           <a:bodyPr/>
           <a:lstStyle/>
           <a:p>
-            <a:fld id="{55B35E63-3BB5-6340-B652-8FF2B862E200}" type="datetime1">
+            <a:fld id="{43A2B2D6-8C4E-DA4D-B946-DA987B92C9F4}" type="datetime1">
               <a:rPr lang="en-US" smtClean="0"/>
               <a:t>7/15/25</a:t>
             </a:fld>
@@ -2923,10 +2168,7 @@
           <a:bodyPr/>
           <a:lstStyle/>
           <a:p>
-            <a:r>
-              <a:rPr lang="es-ES_tradnl"/>
-              <a:t>Ingenium</a:t>
-            </a:r>
+            <a:endParaRPr lang="es-ES_tradnl"/>
           </a:p>
         </p:txBody>
       </p:sp>
@@ -3312,7 +2554,7 @@
           <a:bodyPr/>
           <a:lstStyle/>
           <a:p>
-            <a:fld id="{7C2C25E1-83D0-E44F-8B77-CFA20DBDB1F0}" type="datetime1">
+            <a:fld id="{21193340-94D0-2A4C-A8C2-B69603E89019}" type="datetime1">
               <a:rPr lang="en-US" smtClean="0"/>
               <a:t>7/15/25</a:t>
             </a:fld>
@@ -3341,10 +2583,7 @@
           <a:bodyPr/>
           <a:lstStyle/>
           <a:p>
-            <a:r>
-              <a:rPr lang="es-ES_tradnl"/>
-              <a:t>Ingenium</a:t>
-            </a:r>
+            <a:endParaRPr lang="es-ES_tradnl"/>
           </a:p>
         </p:txBody>
       </p:sp>
@@ -3457,7 +2696,7 @@
           <a:bodyPr/>
           <a:lstStyle/>
           <a:p>
-            <a:fld id="{B13B741B-CC31-8B4B-87CF-C0232A8C809B}" type="datetime1">
+            <a:fld id="{D9846A66-FF4A-7649-8505-EAC797D9ED2D}" type="datetime1">
               <a:rPr lang="en-US" smtClean="0"/>
               <a:t>7/15/25</a:t>
             </a:fld>
@@ -3486,10 +2725,7 @@
           <a:bodyPr/>
           <a:lstStyle/>
           <a:p>
-            <a:r>
-              <a:rPr lang="es-ES_tradnl"/>
-              <a:t>Ingenium</a:t>
-            </a:r>
+            <a:endParaRPr lang="es-ES_tradnl"/>
           </a:p>
         </p:txBody>
       </p:sp>
@@ -3573,7 +2809,7 @@
           <a:bodyPr/>
           <a:lstStyle/>
           <a:p>
-            <a:fld id="{328FC45B-9B0C-C741-BCEB-14BFB2F0F7DF}" type="datetime1">
+            <a:fld id="{8E65E497-63FA-514C-A5D7-17DA7B14C17A}" type="datetime1">
               <a:rPr lang="en-US" smtClean="0"/>
               <a:t>7/15/25</a:t>
             </a:fld>
@@ -3602,10 +2838,7 @@
           <a:bodyPr/>
           <a:lstStyle/>
           <a:p>
-            <a:r>
-              <a:rPr lang="es-ES_tradnl"/>
-              <a:t>Ingenium</a:t>
-            </a:r>
+            <a:endParaRPr lang="es-ES_tradnl"/>
           </a:p>
         </p:txBody>
       </p:sp>
@@ -3994,10 +3227,10 @@
         <p:txBody>
           <a:bodyPr/>
           <a:lstStyle>
-            <a:lvl1pPr marL="180000" indent="-180000">
+            <a:lvl1pPr>
               <a:defRPr sz="3200"/>
             </a:lvl1pPr>
-            <a:lvl2pPr indent="-180000">
+            <a:lvl2pPr>
               <a:defRPr sz="2800"/>
             </a:lvl2pPr>
             <a:lvl3pPr>
@@ -4025,38 +3258,38 @@
           <a:p>
             <a:pPr lvl="0"/>
             <a:r>
-              <a:rPr lang="en-US" dirty="0"/>
+              <a:rPr lang="en-US"/>
               <a:t>Click to edit Master text styles</a:t>
             </a:r>
           </a:p>
           <a:p>
             <a:pPr lvl="1"/>
             <a:r>
-              <a:rPr lang="en-US" dirty="0"/>
+              <a:rPr lang="en-US"/>
               <a:t>Second level</a:t>
             </a:r>
           </a:p>
           <a:p>
             <a:pPr lvl="2"/>
             <a:r>
-              <a:rPr lang="en-US" dirty="0"/>
+              <a:rPr lang="en-US"/>
               <a:t>Third level</a:t>
             </a:r>
           </a:p>
           <a:p>
             <a:pPr lvl="3"/>
             <a:r>
-              <a:rPr lang="en-US" dirty="0"/>
+              <a:rPr lang="en-US"/>
               <a:t>Fourth level</a:t>
             </a:r>
           </a:p>
           <a:p>
             <a:pPr lvl="4"/>
             <a:r>
-              <a:rPr lang="en-US" dirty="0"/>
+              <a:rPr lang="en-US"/>
               <a:t>Fifth level</a:t>
             </a:r>
-            <a:endParaRPr lang="es-ES_tradnl" dirty="0"/>
+            <a:endParaRPr lang="es-ES_tradnl"/>
           </a:p>
         </p:txBody>
       </p:sp>
@@ -4083,13 +3316,11 @@
           </a:xfrm>
         </p:spPr>
         <p:txBody>
-          <a:bodyPr>
-            <a:normAutofit/>
-          </a:bodyPr>
+          <a:bodyPr/>
           <a:lstStyle>
             <a:lvl1pPr marL="0" indent="0">
               <a:buNone/>
-              <a:defRPr sz="2400"/>
+              <a:defRPr sz="1600"/>
             </a:lvl1pPr>
             <a:lvl2pPr marL="457200" indent="0">
               <a:buNone/>
@@ -4127,48 +3358,18 @@
           <a:p>
             <a:pPr lvl="0"/>
             <a:r>
-              <a:rPr lang="en-US" dirty="0"/>
+              <a:rPr lang="en-US"/>
               <a:t>Click to edit Master text styles</a:t>
             </a:r>
           </a:p>
         </p:txBody>
       </p:sp>
-      <p:pic>
-        <p:nvPicPr>
-          <p:cNvPr id="14" name="Imagen 23">
-            <a:extLst>
-              <a:ext uri="{FF2B5EF4-FFF2-40B4-BE49-F238E27FC236}">
-                <a16:creationId xmlns:a16="http://schemas.microsoft.com/office/drawing/2014/main" id="{E20550B4-0769-0D89-3F88-3A767EAC599E}"/>
-              </a:ext>
-            </a:extLst>
-          </p:cNvPr>
-          <p:cNvPicPr>
-            <a:picLocks noChangeAspect="1"/>
-          </p:cNvPicPr>
-          <p:nvPr userDrawn="1"/>
-        </p:nvPicPr>
-        <p:blipFill>
-          <a:blip r:embed="rId4"/>
-          <a:stretch>
-            <a:fillRect/>
-          </a:stretch>
-        </p:blipFill>
-        <p:spPr>
-          <a:xfrm>
-            <a:off x="5433900" y="6291140"/>
-            <a:ext cx="1289138" cy="507480"/>
-          </a:xfrm>
-          <a:prstGeom prst="rect">
-            <a:avLst/>
-          </a:prstGeom>
-        </p:spPr>
-      </p:pic>
-      <p:sp>
-        <p:nvSpPr>
-          <p:cNvPr id="15" name="Date Placeholder 14">
-            <a:extLst>
-              <a:ext uri="{FF2B5EF4-FFF2-40B4-BE49-F238E27FC236}">
-                <a16:creationId xmlns:a16="http://schemas.microsoft.com/office/drawing/2014/main" id="{3B354B9C-3CAE-C62A-599D-822460398899}"/>
+      <p:sp>
+        <p:nvSpPr>
+          <p:cNvPr id="5" name="Date Placeholder 4">
+            <a:extLst>
+              <a:ext uri="{FF2B5EF4-FFF2-40B4-BE49-F238E27FC236}">
+                <a16:creationId xmlns:a16="http://schemas.microsoft.com/office/drawing/2014/main" id="{A4A7EABD-2894-EDD0-1582-FFB5CE9E1174}"/>
               </a:ext>
             </a:extLst>
           </p:cNvPr>
@@ -4184,7 +3385,7 @@
           <a:bodyPr/>
           <a:lstStyle/>
           <a:p>
-            <a:fld id="{952BCF4F-7298-CE4F-9A29-326243368105}" type="datetime1">
+            <a:fld id="{985C3D8D-1DCF-AC4C-BFF8-E2B3E870FD80}" type="datetime1">
               <a:rPr lang="en-US" smtClean="0"/>
               <a:t>7/15/25</a:t>
             </a:fld>
@@ -4194,10 +3395,35 @@
       </p:sp>
       <p:sp>
         <p:nvSpPr>
-          <p:cNvPr id="17" name="Slide Number Placeholder 16">
-            <a:extLst>
-              <a:ext uri="{FF2B5EF4-FFF2-40B4-BE49-F238E27FC236}">
-                <a16:creationId xmlns:a16="http://schemas.microsoft.com/office/drawing/2014/main" id="{E501D1DD-1FF5-FD76-E030-4C75B8BA53EE}"/>
+          <p:cNvPr id="6" name="Footer Placeholder 5">
+            <a:extLst>
+              <a:ext uri="{FF2B5EF4-FFF2-40B4-BE49-F238E27FC236}">
+                <a16:creationId xmlns:a16="http://schemas.microsoft.com/office/drawing/2014/main" id="{8182BCA0-0CCB-7785-4554-6E5DE20D6B0C}"/>
+              </a:ext>
+            </a:extLst>
+          </p:cNvPr>
+          <p:cNvSpPr>
+            <a:spLocks noGrp="1"/>
+          </p:cNvSpPr>
+          <p:nvPr>
+            <p:ph type="ftr" sz="quarter" idx="11"/>
+          </p:nvPr>
+        </p:nvSpPr>
+        <p:spPr/>
+        <p:txBody>
+          <a:bodyPr/>
+          <a:lstStyle/>
+          <a:p>
+            <a:endParaRPr lang="es-ES_tradnl"/>
+          </a:p>
+        </p:txBody>
+      </p:sp>
+      <p:sp>
+        <p:nvSpPr>
+          <p:cNvPr id="7" name="Slide Number Placeholder 6">
+            <a:extLst>
+              <a:ext uri="{FF2B5EF4-FFF2-40B4-BE49-F238E27FC236}">
+                <a16:creationId xmlns:a16="http://schemas.microsoft.com/office/drawing/2014/main" id="{A33EBBDC-188D-4C5F-1B7B-7724CF7359FE}"/>
               </a:ext>
             </a:extLst>
           </p:cNvPr>
@@ -4448,7 +3674,7 @@
           <a:bodyPr/>
           <a:lstStyle/>
           <a:p>
-            <a:fld id="{05CBDC18-5EBE-234A-8DA8-10A3C0217C06}" type="datetime1">
+            <a:fld id="{5705586B-AB3C-B54C-8910-46FF10E2A732}" type="datetime1">
               <a:rPr lang="en-US" smtClean="0"/>
               <a:t>7/15/25</a:t>
             </a:fld>
@@ -4477,10 +3703,7 @@
           <a:bodyPr/>
           <a:lstStyle/>
           <a:p>
-            <a:r>
-              <a:rPr lang="es-ES_tradnl"/>
-              <a:t>Ingenium</a:t>
-            </a:r>
+            <a:endParaRPr lang="es-ES_tradnl"/>
           </a:p>
         </p:txBody>
       </p:sp>
@@ -4981,7 +4204,7 @@
             </a:lvl1pPr>
           </a:lstStyle>
           <a:p>
-            <a:fld id="{952BCF4F-7298-CE4F-9A29-326243368105}" type="datetime1">
+            <a:fld id="{B0977A59-4BFE-6F43-BE3F-DE0D9B891BCE}" type="datetime1">
               <a:rPr lang="en-US" smtClean="0"/>
               <a:t>7/15/25</a:t>
             </a:fld>
@@ -5028,10 +4251,7 @@
             </a:lvl1pPr>
           </a:lstStyle>
           <a:p>
-            <a:r>
-              <a:rPr lang="es-ES_tradnl"/>
-              <a:t>Ingenium</a:t>
-            </a:r>
+            <a:endParaRPr lang="es-ES_tradnl"/>
           </a:p>
         </p:txBody>
       </p:sp>
@@ -5103,7 +4323,7 @@
     <p:sldLayoutId id="2147483658" r:id="rId10"/>
     <p:sldLayoutId id="2147483659" r:id="rId11"/>
   </p:sldLayoutIdLst>
-  <p:hf sldNum="0" hdr="0"/>
+  <p:hf sldNum="0" hdr="0" ftr="0"/>
   <p:txStyles>
     <p:titleStyle>
       <a:lvl1pPr algn="l" defTabSz="914400" rtl="0" eaLnBrk="1" latinLnBrk="0" hangingPunct="1">
@@ -5435,20 +4655,12 @@
             <p:ph type="ctrTitle"/>
           </p:nvPr>
         </p:nvSpPr>
-        <p:spPr>
-          <a:xfrm>
-            <a:off x="1524000" y="2503306"/>
-            <a:ext cx="9144000" cy="1098732"/>
-          </a:xfrm>
-        </p:spPr>
+        <p:spPr/>
         <p:txBody>
           <a:bodyPr/>
           <a:lstStyle/>
           <a:p>
-            <a:r>
-              <a:rPr lang="es-ES_tradnl" dirty="0"/>
-              <a:t>Levantamiento SG</a:t>
-            </a:r>
+            <a:endParaRPr lang="es-ES_tradnl" dirty="0"/>
           </a:p>
         </p:txBody>
       </p:sp>
@@ -5468,20 +4680,12 @@
             <p:ph type="subTitle" idx="1"/>
           </p:nvPr>
         </p:nvSpPr>
-        <p:spPr>
-          <a:xfrm>
-            <a:off x="1524000" y="3602038"/>
-            <a:ext cx="9144000" cy="922273"/>
-          </a:xfrm>
-        </p:spPr>
+        <p:spPr/>
         <p:txBody>
           <a:bodyPr/>
           <a:lstStyle/>
           <a:p>
-            <a:r>
-              <a:rPr lang="es-ES_tradnl" sz="4400" dirty="0"/>
-              <a:t>Dominio de Sistemas de Información</a:t>
-            </a:r>
+            <a:endParaRPr lang="es-ES_tradnl" dirty="0"/>
           </a:p>
         </p:txBody>
       </p:sp>
@@ -5490,7 +4694,7 @@
           <p:cNvPr id="4" name="Date Placeholder 3">
             <a:extLst>
               <a:ext uri="{FF2B5EF4-FFF2-40B4-BE49-F238E27FC236}">
-                <a16:creationId xmlns:a16="http://schemas.microsoft.com/office/drawing/2014/main" id="{8F3A4911-0D67-6BFB-3A7A-0522EA0A76A3}"/>
+                <a16:creationId xmlns:a16="http://schemas.microsoft.com/office/drawing/2014/main" id="{9C03AEC2-E875-D9D9-8A3A-1AA2E2B42CE3}"/>
               </a:ext>
             </a:extLst>
           </p:cNvPr>
@@ -5506,39 +4710,11 @@
           <a:bodyPr/>
           <a:lstStyle/>
           <a:p>
-            <a:fld id="{80E6FDC8-B188-0C45-AC93-6C49928B777B}" type="datetime1">
+            <a:fld id="{A7566C43-5608-5041-A0FF-33B799F0F28C}" type="datetime1">
               <a:rPr lang="en-US" smtClean="0"/>
               <a:t>7/15/25</a:t>
             </a:fld>
             <a:endParaRPr lang="es-ES_tradnl"/>
-          </a:p>
-        </p:txBody>
-      </p:sp>
-      <p:sp>
-        <p:nvSpPr>
-          <p:cNvPr id="5" name="Footer Placeholder 4">
-            <a:extLst>
-              <a:ext uri="{FF2B5EF4-FFF2-40B4-BE49-F238E27FC236}">
-                <a16:creationId xmlns:a16="http://schemas.microsoft.com/office/drawing/2014/main" id="{82A0E06C-A614-C810-5F9E-FF113E04EAD7}"/>
-              </a:ext>
-            </a:extLst>
-          </p:cNvPr>
-          <p:cNvSpPr>
-            <a:spLocks noGrp="1"/>
-          </p:cNvSpPr>
-          <p:nvPr>
-            <p:ph type="ftr" sz="quarter" idx="11"/>
-          </p:nvPr>
-        </p:nvSpPr>
-        <p:spPr/>
-        <p:txBody>
-          <a:bodyPr/>
-          <a:lstStyle/>
-          <a:p>
-            <a:r>
-              <a:rPr lang="es-ES_tradnl"/>
-              <a:t>Ingenium</a:t>
-            </a:r>
           </a:p>
         </p:txBody>
       </p:sp>
@@ -5546,454 +4722,6 @@
     <p:extLst>
       <p:ext uri="{BB962C8B-B14F-4D97-AF65-F5344CB8AC3E}">
         <p14:creationId xmlns:p14="http://schemas.microsoft.com/office/powerpoint/2010/main" val="113550211"/>
-      </p:ext>
-    </p:extLst>
-  </p:cSld>
-  <p:clrMapOvr>
-    <a:masterClrMapping/>
-  </p:clrMapOvr>
-</p:sld>
-</file>
-
-<file path=ppt/slides/slide2.xml><?xml version="1.0" encoding="utf-8"?>
-<p:sld xmlns:a="http://schemas.openxmlformats.org/drawingml/2006/main" xmlns:r="http://schemas.openxmlformats.org/officeDocument/2006/relationships" xmlns:p="http://schemas.openxmlformats.org/presentationml/2006/main">
-  <p:cSld>
-    <p:spTree>
-      <p:nvGrpSpPr>
-        <p:cNvPr id="1" name=""/>
-        <p:cNvGrpSpPr/>
-        <p:nvPr/>
-      </p:nvGrpSpPr>
-      <p:grpSpPr>
-        <a:xfrm>
-          <a:off x="0" y="0"/>
-          <a:ext cx="0" cy="0"/>
-          <a:chOff x="0" y="0"/>
-          <a:chExt cx="0" cy="0"/>
-        </a:xfrm>
-      </p:grpSpPr>
-      <p:sp>
-        <p:nvSpPr>
-          <p:cNvPr id="2" name="Title 1">
-            <a:extLst>
-              <a:ext uri="{FF2B5EF4-FFF2-40B4-BE49-F238E27FC236}">
-                <a16:creationId xmlns:a16="http://schemas.microsoft.com/office/drawing/2014/main" id="{F0C4D3B0-13D6-6525-4D1A-9FF2AA59E986}"/>
-              </a:ext>
-            </a:extLst>
-          </p:cNvPr>
-          <p:cNvSpPr>
-            <a:spLocks noGrp="1"/>
-          </p:cNvSpPr>
-          <p:nvPr>
-            <p:ph type="title"/>
-          </p:nvPr>
-        </p:nvSpPr>
-        <p:spPr>
-          <a:xfrm>
-            <a:off x="252000" y="361178"/>
-            <a:ext cx="10488487" cy="627834"/>
-          </a:xfrm>
-        </p:spPr>
-        <p:txBody>
-          <a:bodyPr/>
-          <a:lstStyle/>
-          <a:p>
-            <a:r>
-              <a:rPr lang="es-ES_tradnl" dirty="0"/>
-              <a:t>Objetivo General de la Arquitectura Sistemas de Información</a:t>
-            </a:r>
-          </a:p>
-        </p:txBody>
-      </p:sp>
-      <p:sp>
-        <p:nvSpPr>
-          <p:cNvPr id="4" name="Text Placeholder 3">
-            <a:extLst>
-              <a:ext uri="{FF2B5EF4-FFF2-40B4-BE49-F238E27FC236}">
-                <a16:creationId xmlns:a16="http://schemas.microsoft.com/office/drawing/2014/main" id="{F180901F-12C6-F0A3-34EE-28F6D0F3EEF1}"/>
-              </a:ext>
-            </a:extLst>
-          </p:cNvPr>
-          <p:cNvSpPr>
-            <a:spLocks noGrp="1"/>
-          </p:cNvSpPr>
-          <p:nvPr>
-            <p:ph type="body" sz="half" idx="2"/>
-          </p:nvPr>
-        </p:nvSpPr>
-        <p:spPr/>
-        <p:txBody>
-          <a:bodyPr>
-            <a:normAutofit fontScale="92500" lnSpcReduction="10000"/>
-          </a:bodyPr>
-          <a:lstStyle/>
-          <a:p>
-            <a:pPr algn="just"/>
-            <a:r>
-              <a:rPr lang="es-ES_tradnl" dirty="0"/>
-              <a:t>El objetivo principal del dominio de aplicaciones SG es desarrollar las Arquitecturas de Sistemas de Información objetivo,</a:t>
-            </a:r>
-          </a:p>
-          <a:p>
-            <a:pPr algn="just"/>
-            <a:endParaRPr lang="es-ES_tradnl" dirty="0"/>
-          </a:p>
-          <a:p>
-            <a:pPr marL="342900" indent="-342900">
-              <a:buFont typeface="Arial" panose="020B0604020202020204" pitchFamily="34" charset="0"/>
-              <a:buChar char="•"/>
-            </a:pPr>
-            <a:r>
-              <a:rPr lang="es-ES_tradnl" dirty="0"/>
-              <a:t>Que soporten la arquitectura de negocio de SG (desarrollada en la Fase 3) </a:t>
-            </a:r>
-          </a:p>
-          <a:p>
-            <a:pPr marL="342900" indent="-342900">
-              <a:buFont typeface="Arial" panose="020B0604020202020204" pitchFamily="34" charset="0"/>
-              <a:buChar char="•"/>
-            </a:pPr>
-            <a:r>
-              <a:rPr lang="es-ES_tradnl" dirty="0"/>
-              <a:t>Que implementen la visión de arquitectura inicial de SG (establecida en la Fase 1) de este ejercicio de AE.</a:t>
-            </a:r>
-          </a:p>
-        </p:txBody>
-      </p:sp>
-      <p:sp>
-        <p:nvSpPr>
-          <p:cNvPr id="5" name="Date Placeholder 4">
-            <a:extLst>
-              <a:ext uri="{FF2B5EF4-FFF2-40B4-BE49-F238E27FC236}">
-                <a16:creationId xmlns:a16="http://schemas.microsoft.com/office/drawing/2014/main" id="{92CDF565-F4F7-3723-A2E2-89B34FAD3786}"/>
-              </a:ext>
-            </a:extLst>
-          </p:cNvPr>
-          <p:cNvSpPr>
-            <a:spLocks noGrp="1"/>
-          </p:cNvSpPr>
-          <p:nvPr>
-            <p:ph type="dt" sz="half" idx="10"/>
-          </p:nvPr>
-        </p:nvSpPr>
-        <p:spPr>
-          <a:xfrm>
-            <a:off x="838200" y="6356350"/>
-            <a:ext cx="2743200" cy="365125"/>
-          </a:xfrm>
-        </p:spPr>
-        <p:txBody>
-          <a:bodyPr/>
-          <a:lstStyle/>
-          <a:p>
-            <a:fld id="{54C826EA-052C-ED44-8280-55294C865FD1}" type="datetime1">
-              <a:rPr lang="en-US" smtClean="0"/>
-              <a:t>7/15/25</a:t>
-            </a:fld>
-            <a:endParaRPr lang="es-ES_tradnl"/>
-          </a:p>
-        </p:txBody>
-      </p:sp>
-    </p:spTree>
-    <p:extLst>
-      <p:ext uri="{BB962C8B-B14F-4D97-AF65-F5344CB8AC3E}">
-        <p14:creationId xmlns:p14="http://schemas.microsoft.com/office/powerpoint/2010/main" val="2354214095"/>
-      </p:ext>
-    </p:extLst>
-  </p:cSld>
-  <p:clrMapOvr>
-    <a:masterClrMapping/>
-  </p:clrMapOvr>
-</p:sld>
-</file>
-
-<file path=ppt/slides/slide3.xml><?xml version="1.0" encoding="utf-8"?>
-<p:sld xmlns:a="http://schemas.openxmlformats.org/drawingml/2006/main" xmlns:r="http://schemas.openxmlformats.org/officeDocument/2006/relationships" xmlns:p="http://schemas.openxmlformats.org/presentationml/2006/main">
-  <p:cSld>
-    <p:spTree>
-      <p:nvGrpSpPr>
-        <p:cNvPr id="1" name=""/>
-        <p:cNvGrpSpPr/>
-        <p:nvPr/>
-      </p:nvGrpSpPr>
-      <p:grpSpPr>
-        <a:xfrm>
-          <a:off x="0" y="0"/>
-          <a:ext cx="0" cy="0"/>
-          <a:chOff x="0" y="0"/>
-          <a:chExt cx="0" cy="0"/>
-        </a:xfrm>
-      </p:grpSpPr>
-      <p:sp>
-        <p:nvSpPr>
-          <p:cNvPr id="4" name="Text Placeholder 3">
-            <a:extLst>
-              <a:ext uri="{FF2B5EF4-FFF2-40B4-BE49-F238E27FC236}">
-                <a16:creationId xmlns:a16="http://schemas.microsoft.com/office/drawing/2014/main" id="{79950ACC-0F5A-CAB9-2829-2F29FEA2FEB3}"/>
-              </a:ext>
-            </a:extLst>
-          </p:cNvPr>
-          <p:cNvSpPr>
-            <a:spLocks noGrp="1"/>
-          </p:cNvSpPr>
-          <p:nvPr>
-            <p:ph type="body" sz="half" idx="2"/>
-          </p:nvPr>
-        </p:nvSpPr>
-        <p:spPr>
-          <a:xfrm>
-            <a:off x="720000" y="1260000"/>
-            <a:ext cx="4719764" cy="5082116"/>
-          </a:xfrm>
-        </p:spPr>
-        <p:txBody>
-          <a:bodyPr>
-            <a:normAutofit fontScale="92500" lnSpcReduction="20000"/>
-          </a:bodyPr>
-          <a:lstStyle/>
-          <a:p>
-            <a:pPr>
-              <a:spcBef>
-                <a:spcPts val="0"/>
-              </a:spcBef>
-              <a:spcAft>
-                <a:spcPts val="600"/>
-              </a:spcAft>
-            </a:pPr>
-            <a:r>
-              <a:rPr lang="es-ES_tradnl" sz="1100" dirty="0"/>
-              <a:t>De estudios de AE anteriores (Resumen Ejecutivo FASE, Anexo Técnica, Análisis de Entorno SG)</a:t>
-            </a:r>
-          </a:p>
-          <a:p>
-            <a:pPr marL="180000" indent="-180000">
-              <a:spcBef>
-                <a:spcPts val="600"/>
-              </a:spcBef>
-              <a:buFont typeface="+mj-lt"/>
-              <a:buAutoNum type="arabicPeriod"/>
-            </a:pPr>
-            <a:r>
-              <a:rPr lang="es-ES_tradnl" sz="1500" dirty="0"/>
-              <a:t>Deficiente apropiación del conocimiento en procesos TI [2].</a:t>
-            </a:r>
-          </a:p>
-          <a:p>
-            <a:pPr marL="180000" indent="-180000">
-              <a:spcBef>
-                <a:spcPts val="600"/>
-              </a:spcBef>
-              <a:buFont typeface="+mj-lt"/>
-              <a:buAutoNum type="arabicPeriod"/>
-            </a:pPr>
-            <a:r>
-              <a:rPr lang="es-ES_tradnl" sz="1500" dirty="0"/>
-              <a:t>Equipos tecnológicos obsoletos que generan dificultad… [3].</a:t>
-            </a:r>
-          </a:p>
-          <a:p>
-            <a:pPr marL="180000" indent="-180000">
-              <a:spcBef>
-                <a:spcPts val="600"/>
-              </a:spcBef>
-              <a:buFont typeface="+mj-lt"/>
-              <a:buAutoNum type="arabicPeriod"/>
-            </a:pPr>
-            <a:r>
-              <a:rPr lang="es-ES_tradnl" sz="1500" dirty="0"/>
-              <a:t>Fallas recurrentes en el funcionamiento de los SI y plataformas tecnológicas de SG [4].</a:t>
-            </a:r>
-          </a:p>
-          <a:p>
-            <a:pPr marL="180000" indent="-180000">
-              <a:spcBef>
-                <a:spcPts val="600"/>
-              </a:spcBef>
-              <a:buFont typeface="+mj-lt"/>
-              <a:buAutoNum type="arabicPeriod"/>
-            </a:pPr>
-            <a:r>
-              <a:rPr lang="es-ES_tradnl" sz="1500" dirty="0"/>
-              <a:t>Insuficiencia en la capacidad de las herramientas tecnológicas de SG obstaculizan obtención material probatorio… [5].</a:t>
-            </a:r>
-          </a:p>
-          <a:p>
-            <a:pPr marL="180000" indent="-180000">
-              <a:spcBef>
-                <a:spcPts val="600"/>
-              </a:spcBef>
-              <a:buFont typeface="+mj-lt"/>
-              <a:buAutoNum type="arabicPeriod"/>
-            </a:pPr>
-            <a:r>
-              <a:rPr lang="es-ES_tradnl" sz="1500" dirty="0"/>
-              <a:t>Falta de software que permita a SG extraer información dinámica para la toma de decisiones [6].</a:t>
-            </a:r>
-          </a:p>
-          <a:p>
-            <a:pPr marL="180000" indent="-180000">
-              <a:spcBef>
-                <a:spcPts val="600"/>
-              </a:spcBef>
-              <a:buFont typeface="+mj-lt"/>
-              <a:buAutoNum type="arabicPeriod"/>
-            </a:pPr>
-            <a:r>
-              <a:rPr lang="es-ES_tradnl" sz="1500" dirty="0"/>
-              <a:t>Se realizan análisis descriptivos, pero no predictivos y prospectivos de los resultados de la gestión…[7].</a:t>
-            </a:r>
-          </a:p>
-          <a:p>
-            <a:pPr marL="180000" indent="-180000">
-              <a:spcBef>
-                <a:spcPts val="600"/>
-              </a:spcBef>
-              <a:buFont typeface="+mj-lt"/>
-              <a:buAutoNum type="arabicPeriod"/>
-            </a:pPr>
-            <a:r>
-              <a:rPr lang="es-ES_tradnl" sz="1500" dirty="0"/>
-              <a:t>Falta personal para actualizar plataformas tecnológicas… [8].</a:t>
-            </a:r>
-          </a:p>
-          <a:p>
-            <a:pPr marL="180000" indent="-180000">
-              <a:spcBef>
-                <a:spcPts val="600"/>
-              </a:spcBef>
-              <a:buFont typeface="+mj-lt"/>
-              <a:buAutoNum type="arabicPeriod"/>
-            </a:pPr>
-            <a:r>
-              <a:rPr lang="es-ES_tradnl" sz="1500" dirty="0"/>
-              <a:t>Deficiente conectividad y falta de interoperabilidad entre plataformas tecnológicas [8].</a:t>
-            </a:r>
-          </a:p>
-          <a:p>
-            <a:pPr marL="180000" indent="-180000">
-              <a:spcBef>
-                <a:spcPts val="600"/>
-              </a:spcBef>
-              <a:buFont typeface="+mj-lt"/>
-              <a:buAutoNum type="arabicPeriod"/>
-            </a:pPr>
-            <a:r>
-              <a:rPr lang="es-ES_tradnl" sz="1500" dirty="0"/>
-              <a:t>Cambios en las plataformas tecnológicas no interactúan con anteriores [9].</a:t>
-            </a:r>
-          </a:p>
-          <a:p>
-            <a:pPr marL="180000" indent="-180000">
-              <a:spcBef>
-                <a:spcPts val="600"/>
-              </a:spcBef>
-              <a:buFont typeface="+mj-lt"/>
-              <a:buAutoNum type="arabicPeriod"/>
-            </a:pPr>
-            <a:r>
-              <a:rPr lang="es-ES_tradnl" sz="1500" dirty="0"/>
-              <a:t>Inestabilidad de la conectividad, indisponibilidad servidores y vulnerabilidad en la seguridad [10].</a:t>
-            </a:r>
-          </a:p>
-          <a:p>
-            <a:pPr marL="180000" indent="-180000">
-              <a:spcBef>
-                <a:spcPts val="600"/>
-              </a:spcBef>
-              <a:buFont typeface="+mj-lt"/>
-              <a:buAutoNum type="arabicPeriod"/>
-            </a:pPr>
-            <a:r>
-              <a:rPr lang="es-ES_tradnl" sz="1500" dirty="0"/>
-              <a:t>Obsolescencia tecnológica… [11].</a:t>
-            </a:r>
-          </a:p>
-          <a:p>
-            <a:pPr marL="180000" indent="-180000">
-              <a:spcBef>
-                <a:spcPts val="600"/>
-              </a:spcBef>
-              <a:buFont typeface="+mj-lt"/>
-              <a:buAutoNum type="arabicPeriod"/>
-            </a:pPr>
-            <a:r>
-              <a:rPr lang="es-ES_tradnl" sz="1500" dirty="0"/>
-              <a:t>Altos costos de la tecnología limitan capacidad de SG para implementar y mantener sistemas [11].</a:t>
-            </a:r>
-          </a:p>
-        </p:txBody>
-      </p:sp>
-      <p:sp>
-        <p:nvSpPr>
-          <p:cNvPr id="5" name="Date Placeholder 4">
-            <a:extLst>
-              <a:ext uri="{FF2B5EF4-FFF2-40B4-BE49-F238E27FC236}">
-                <a16:creationId xmlns:a16="http://schemas.microsoft.com/office/drawing/2014/main" id="{9672301E-EF48-B60F-DB34-37D2994E90DD}"/>
-              </a:ext>
-            </a:extLst>
-          </p:cNvPr>
-          <p:cNvSpPr>
-            <a:spLocks noGrp="1"/>
-          </p:cNvSpPr>
-          <p:nvPr>
-            <p:ph type="dt" sz="half" idx="10"/>
-          </p:nvPr>
-        </p:nvSpPr>
-        <p:spPr>
-          <a:xfrm>
-            <a:off x="838200" y="6356350"/>
-            <a:ext cx="2743200" cy="365125"/>
-          </a:xfrm>
-        </p:spPr>
-        <p:txBody>
-          <a:bodyPr/>
-          <a:lstStyle/>
-          <a:p>
-            <a:fld id="{54C826EA-052C-ED44-8280-55294C865FD1}" type="datetime1">
-              <a:rPr lang="en-US" smtClean="0"/>
-              <a:t>7/15/25</a:t>
-            </a:fld>
-            <a:endParaRPr lang="es-ES_tradnl"/>
-          </a:p>
-        </p:txBody>
-      </p:sp>
-      <p:sp>
-        <p:nvSpPr>
-          <p:cNvPr id="2" name="Title 1">
-            <a:extLst>
-              <a:ext uri="{FF2B5EF4-FFF2-40B4-BE49-F238E27FC236}">
-                <a16:creationId xmlns:a16="http://schemas.microsoft.com/office/drawing/2014/main" id="{FE8D94D5-D614-2153-2D17-D952DF34F04F}"/>
-              </a:ext>
-            </a:extLst>
-          </p:cNvPr>
-          <p:cNvSpPr>
-            <a:spLocks noGrp="1"/>
-          </p:cNvSpPr>
-          <p:nvPr>
-            <p:ph type="title"/>
-          </p:nvPr>
-        </p:nvSpPr>
-        <p:spPr>
-          <a:xfrm>
-            <a:off x="252000" y="360000"/>
-            <a:ext cx="7215898" cy="627834"/>
-          </a:xfrm>
-        </p:spPr>
-        <p:txBody>
-          <a:bodyPr/>
-          <a:lstStyle/>
-          <a:p>
-            <a:r>
-              <a:rPr lang="es-ES_tradnl" dirty="0"/>
-              <a:t>Panorama del Dominio SI de Secretaría</a:t>
-            </a:r>
-          </a:p>
-        </p:txBody>
-      </p:sp>
-    </p:spTree>
-    <p:extLst>
-      <p:ext uri="{BB962C8B-B14F-4D97-AF65-F5344CB8AC3E}">
-        <p14:creationId xmlns:p14="http://schemas.microsoft.com/office/powerpoint/2010/main" val="4273810623"/>
       </p:ext>
     </p:extLst>
   </p:cSld>
@@ -6591,299 +5319,4 @@
     </a:ext>
   </a:extLst>
 </a:theme>
-</file>
-
-<file path=ppt/theme/theme3.xml><?xml version="1.0" encoding="utf-8"?>
-<a:theme xmlns:a="http://schemas.openxmlformats.org/drawingml/2006/main" name="Office Theme">
-  <a:themeElements>
-    <a:clrScheme name="Office">
-      <a:dk1>
-        <a:sysClr val="windowText" lastClr="000000"/>
-      </a:dk1>
-      <a:lt1>
-        <a:sysClr val="window" lastClr="FFFFFF"/>
-      </a:lt1>
-      <a:dk2>
-        <a:srgbClr val="44546A"/>
-      </a:dk2>
-      <a:lt2>
-        <a:srgbClr val="E7E6E6"/>
-      </a:lt2>
-      <a:accent1>
-        <a:srgbClr val="4472C4"/>
-      </a:accent1>
-      <a:accent2>
-        <a:srgbClr val="ED7D31"/>
-      </a:accent2>
-      <a:accent3>
-        <a:srgbClr val="A5A5A5"/>
-      </a:accent3>
-      <a:accent4>
-        <a:srgbClr val="FFC000"/>
-      </a:accent4>
-      <a:accent5>
-        <a:srgbClr val="5B9BD5"/>
-      </a:accent5>
-      <a:accent6>
-        <a:srgbClr val="70AD47"/>
-      </a:accent6>
-      <a:hlink>
-        <a:srgbClr val="0563C1"/>
-      </a:hlink>
-      <a:folHlink>
-        <a:srgbClr val="954F72"/>
-      </a:folHlink>
-    </a:clrScheme>
-    <a:fontScheme name="Office">
-      <a:majorFont>
-        <a:latin typeface="Calibri Light" panose="020F0302020204030204"/>
-        <a:ea typeface=""/>
-        <a:cs typeface=""/>
-        <a:font script="Jpan" typeface="游ゴシック Light"/>
-        <a:font script="Hang" typeface="맑은 고딕"/>
-        <a:font script="Hans" typeface="等线 Light"/>
-        <a:font script="Hant" typeface="新細明體"/>
-        <a:font script="Arab" typeface="Times New Roman"/>
-        <a:font script="Hebr" typeface="Times New Roman"/>
-        <a:font script="Thai" typeface="Angsana New"/>
-        <a:font script="Ethi" typeface="Nyala"/>
-        <a:font script="Beng" typeface="Vrinda"/>
-        <a:font script="Gujr" typeface="Shruti"/>
-        <a:font script="Khmr" typeface="MoolBoran"/>
-        <a:font script="Knda" typeface="Tunga"/>
-        <a:font script="Guru" typeface="Raavi"/>
-        <a:font script="Cans" typeface="Euphemia"/>
-        <a:font script="Cher" typeface="Plantagenet Cherokee"/>
-        <a:font script="Yiii" typeface="Microsoft Yi Baiti"/>
-        <a:font script="Tibt" typeface="Microsoft Himalaya"/>
-        <a:font script="Thaa" typeface="MV Boli"/>
-        <a:font script="Deva" typeface="Mangal"/>
-        <a:font script="Telu" typeface="Gautami"/>
-        <a:font script="Taml" typeface="Latha"/>
-        <a:font script="Syrc" typeface="Estrangelo Edessa"/>
-        <a:font script="Orya" typeface="Kalinga"/>
-        <a:font script="Mlym" typeface="Kartika"/>
-        <a:font script="Laoo" typeface="DokChampa"/>
-        <a:font script="Sinh" typeface="Iskoola Pota"/>
-        <a:font script="Mong" typeface="Mongolian Baiti"/>
-        <a:font script="Viet" typeface="Times New Roman"/>
-        <a:font script="Uigh" typeface="Microsoft Uighur"/>
-        <a:font script="Geor" typeface="Sylfaen"/>
-        <a:font script="Armn" typeface="Arial"/>
-        <a:font script="Bugi" typeface="Leelawadee UI"/>
-        <a:font script="Bopo" typeface="Microsoft JhengHei"/>
-        <a:font script="Java" typeface="Javanese Text"/>
-        <a:font script="Lisu" typeface="Segoe UI"/>
-        <a:font script="Mymr" typeface="Myanmar Text"/>
-        <a:font script="Nkoo" typeface="Ebrima"/>
-        <a:font script="Olck" typeface="Nirmala UI"/>
-        <a:font script="Osma" typeface="Ebrima"/>
-        <a:font script="Phag" typeface="Phagspa"/>
-        <a:font script="Syrn" typeface="Estrangelo Edessa"/>
-        <a:font script="Syrj" typeface="Estrangelo Edessa"/>
-        <a:font script="Syre" typeface="Estrangelo Edessa"/>
-        <a:font script="Sora" typeface="Nirmala UI"/>
-        <a:font script="Tale" typeface="Microsoft Tai Le"/>
-        <a:font script="Talu" typeface="Microsoft New Tai Lue"/>
-        <a:font script="Tfng" typeface="Ebrima"/>
-      </a:majorFont>
-      <a:minorFont>
-        <a:latin typeface="Calibri" panose="020F0502020204030204"/>
-        <a:ea typeface=""/>
-        <a:cs typeface=""/>
-        <a:font script="Jpan" typeface="游ゴシック"/>
-        <a:font script="Hang" typeface="맑은 고딕"/>
-        <a:font script="Hans" typeface="等线"/>
-        <a:font script="Hant" typeface="新細明體"/>
-        <a:font script="Arab" typeface="Arial"/>
-        <a:font script="Hebr" typeface="Arial"/>
-        <a:font script="Thai" typeface="Cordia New"/>
-        <a:font script="Ethi" typeface="Nyala"/>
-        <a:font script="Beng" typeface="Vrinda"/>
-        <a:font script="Gujr" typeface="Shruti"/>
-        <a:font script="Khmr" typeface="DaunPenh"/>
-        <a:font script="Knda" typeface="Tunga"/>
-        <a:font script="Guru" typeface="Raavi"/>
-        <a:font script="Cans" typeface="Euphemia"/>
-        <a:font script="Cher" typeface="Plantagenet Cherokee"/>
-        <a:font script="Yiii" typeface="Microsoft Yi Baiti"/>
-        <a:font script="Tibt" typeface="Microsoft Himalaya"/>
-        <a:font script="Thaa" typeface="MV Boli"/>
-        <a:font script="Deva" typeface="Mangal"/>
-        <a:font script="Telu" typeface="Gautami"/>
-        <a:font script="Taml" typeface="Latha"/>
-        <a:font script="Syrc" typeface="Estrangelo Edessa"/>
-        <a:font script="Orya" typeface="Kalinga"/>
-        <a:font script="Mlym" typeface="Kartika"/>
-        <a:font script="Laoo" typeface="DokChampa"/>
-        <a:font script="Sinh" typeface="Iskoola Pota"/>
-        <a:font script="Mong" typeface="Mongolian Baiti"/>
-        <a:font script="Viet" typeface="Arial"/>
-        <a:font script="Uigh" typeface="Microsoft Uighur"/>
-        <a:font script="Geor" typeface="Sylfaen"/>
-        <a:font script="Armn" typeface="Arial"/>
-        <a:font script="Bugi" typeface="Leelawadee UI"/>
-        <a:font script="Bopo" typeface="Microsoft JhengHei"/>
-        <a:font script="Java" typeface="Javanese Text"/>
-        <a:font script="Lisu" typeface="Segoe UI"/>
-        <a:font script="Mymr" typeface="Myanmar Text"/>
-        <a:font script="Nkoo" typeface="Ebrima"/>
-        <a:font script="Olck" typeface="Nirmala UI"/>
-        <a:font script="Osma" typeface="Ebrima"/>
-        <a:font script="Phag" typeface="Phagspa"/>
-        <a:font script="Syrn" typeface="Estrangelo Edessa"/>
-        <a:font script="Syrj" typeface="Estrangelo Edessa"/>
-        <a:font script="Syre" typeface="Estrangelo Edessa"/>
-        <a:font script="Sora" typeface="Nirmala UI"/>
-        <a:font script="Tale" typeface="Microsoft Tai Le"/>
-        <a:font script="Talu" typeface="Microsoft New Tai Lue"/>
-        <a:font script="Tfng" typeface="Ebrima"/>
-      </a:minorFont>
-    </a:fontScheme>
-    <a:fmtScheme name="Office">
-      <a:fillStyleLst>
-        <a:solidFill>
-          <a:schemeClr val="phClr"/>
-        </a:solidFill>
-        <a:gradFill rotWithShape="1">
-          <a:gsLst>
-            <a:gs pos="0">
-              <a:schemeClr val="phClr">
-                <a:lumMod val="110000"/>
-                <a:satMod val="105000"/>
-                <a:tint val="67000"/>
-              </a:schemeClr>
-            </a:gs>
-            <a:gs pos="50000">
-              <a:schemeClr val="phClr">
-                <a:lumMod val="105000"/>
-                <a:satMod val="103000"/>
-                <a:tint val="73000"/>
-              </a:schemeClr>
-            </a:gs>
-            <a:gs pos="100000">
-              <a:schemeClr val="phClr">
-                <a:lumMod val="105000"/>
-                <a:satMod val="109000"/>
-                <a:tint val="81000"/>
-              </a:schemeClr>
-            </a:gs>
-          </a:gsLst>
-          <a:lin ang="5400000" scaled="0"/>
-        </a:gradFill>
-        <a:gradFill rotWithShape="1">
-          <a:gsLst>
-            <a:gs pos="0">
-              <a:schemeClr val="phClr">
-                <a:satMod val="103000"/>
-                <a:lumMod val="102000"/>
-                <a:tint val="94000"/>
-              </a:schemeClr>
-            </a:gs>
-            <a:gs pos="50000">
-              <a:schemeClr val="phClr">
-                <a:satMod val="110000"/>
-                <a:lumMod val="100000"/>
-                <a:shade val="100000"/>
-              </a:schemeClr>
-            </a:gs>
-            <a:gs pos="100000">
-              <a:schemeClr val="phClr">
-                <a:lumMod val="99000"/>
-                <a:satMod val="120000"/>
-                <a:shade val="78000"/>
-              </a:schemeClr>
-            </a:gs>
-          </a:gsLst>
-          <a:lin ang="5400000" scaled="0"/>
-        </a:gradFill>
-      </a:fillStyleLst>
-      <a:lnStyleLst>
-        <a:ln w="6350" cap="flat" cmpd="sng" algn="ctr">
-          <a:solidFill>
-            <a:schemeClr val="phClr"/>
-          </a:solidFill>
-          <a:prstDash val="solid"/>
-          <a:miter lim="800000"/>
-        </a:ln>
-        <a:ln w="12700" cap="flat" cmpd="sng" algn="ctr">
-          <a:solidFill>
-            <a:schemeClr val="phClr"/>
-          </a:solidFill>
-          <a:prstDash val="solid"/>
-          <a:miter lim="800000"/>
-        </a:ln>
-        <a:ln w="19050" cap="flat" cmpd="sng" algn="ctr">
-          <a:solidFill>
-            <a:schemeClr val="phClr"/>
-          </a:solidFill>
-          <a:prstDash val="solid"/>
-          <a:miter lim="800000"/>
-        </a:ln>
-      </a:lnStyleLst>
-      <a:effectStyleLst>
-        <a:effectStyle>
-          <a:effectLst/>
-        </a:effectStyle>
-        <a:effectStyle>
-          <a:effectLst/>
-        </a:effectStyle>
-        <a:effectStyle>
-          <a:effectLst>
-            <a:outerShdw blurRad="57150" dist="19050" dir="5400000" algn="ctr" rotWithShape="0">
-              <a:srgbClr val="000000">
-                <a:alpha val="63000"/>
-              </a:srgbClr>
-            </a:outerShdw>
-          </a:effectLst>
-        </a:effectStyle>
-      </a:effectStyleLst>
-      <a:bgFillStyleLst>
-        <a:solidFill>
-          <a:schemeClr val="phClr"/>
-        </a:solidFill>
-        <a:solidFill>
-          <a:schemeClr val="phClr">
-            <a:tint val="95000"/>
-            <a:satMod val="170000"/>
-          </a:schemeClr>
-        </a:solidFill>
-        <a:gradFill rotWithShape="1">
-          <a:gsLst>
-            <a:gs pos="0">
-              <a:schemeClr val="phClr">
-                <a:tint val="93000"/>
-                <a:satMod val="150000"/>
-                <a:shade val="98000"/>
-                <a:lumMod val="102000"/>
-              </a:schemeClr>
-            </a:gs>
-            <a:gs pos="50000">
-              <a:schemeClr val="phClr">
-                <a:tint val="98000"/>
-                <a:satMod val="130000"/>
-                <a:shade val="90000"/>
-                <a:lumMod val="103000"/>
-              </a:schemeClr>
-            </a:gs>
-            <a:gs pos="100000">
-              <a:schemeClr val="phClr">
-                <a:shade val="63000"/>
-                <a:satMod val="120000"/>
-              </a:schemeClr>
-            </a:gs>
-          </a:gsLst>
-          <a:lin ang="5400000" scaled="0"/>
-        </a:gradFill>
-      </a:bgFillStyleLst>
-    </a:fmtScheme>
-  </a:themeElements>
-  <a:objectDefaults/>
-  <a:extraClrSchemeLst/>
-  <a:extLst>
-    <a:ext uri="{05A4C25C-085E-4340-85A3-A5531E510DB2}">
-      <thm15:themeFamily xmlns:thm15="http://schemas.microsoft.com/office/thememl/2012/main" name="Office Theme" id="{62F939B6-93AF-4DB8-9C6B-D6C7DFDC589F}" vid="{4A3C46E8-61CC-4603-A589-7422A47A8E4A}"/>
-    </a:ext>
-  </a:extLst>
-</a:theme>
 </file>